--- a/Aula 05 - Exemplo 3.pptx
+++ b/Aula 05 - Exemplo 3.pptx
@@ -5,43 +5,47 @@
     <p:sldMasterId id="2147483648" r:id="rId1"/>
   </p:sldMasterIdLst>
   <p:sldIdLst>
-    <p:sldId id="256" r:id="rId2"/>
-    <p:sldId id="257" r:id="rId3"/>
-    <p:sldId id="258" r:id="rId4"/>
-    <p:sldId id="259" r:id="rId5"/>
-    <p:sldId id="260" r:id="rId6"/>
-    <p:sldId id="261" r:id="rId7"/>
-    <p:sldId id="262" r:id="rId8"/>
-    <p:sldId id="291" r:id="rId9"/>
-    <p:sldId id="263" r:id="rId10"/>
-    <p:sldId id="292" r:id="rId11"/>
-    <p:sldId id="264" r:id="rId12"/>
-    <p:sldId id="265" r:id="rId13"/>
-    <p:sldId id="266" r:id="rId14"/>
-    <p:sldId id="267" r:id="rId15"/>
-    <p:sldId id="268" r:id="rId16"/>
-    <p:sldId id="269" r:id="rId17"/>
-    <p:sldId id="270" r:id="rId18"/>
-    <p:sldId id="271" r:id="rId19"/>
-    <p:sldId id="272" r:id="rId20"/>
-    <p:sldId id="273" r:id="rId21"/>
-    <p:sldId id="274" r:id="rId22"/>
-    <p:sldId id="275" r:id="rId23"/>
-    <p:sldId id="276" r:id="rId24"/>
-    <p:sldId id="277" r:id="rId25"/>
-    <p:sldId id="278" r:id="rId26"/>
-    <p:sldId id="279" r:id="rId27"/>
-    <p:sldId id="280" r:id="rId28"/>
-    <p:sldId id="281" r:id="rId29"/>
-    <p:sldId id="282" r:id="rId30"/>
-    <p:sldId id="283" r:id="rId31"/>
-    <p:sldId id="284" r:id="rId32"/>
-    <p:sldId id="285" r:id="rId33"/>
-    <p:sldId id="286" r:id="rId34"/>
-    <p:sldId id="287" r:id="rId35"/>
-    <p:sldId id="288" r:id="rId36"/>
-    <p:sldId id="289" r:id="rId37"/>
-    <p:sldId id="290" r:id="rId38"/>
+    <p:sldId id="293" r:id="rId2"/>
+    <p:sldId id="294" r:id="rId3"/>
+    <p:sldId id="295" r:id="rId4"/>
+    <p:sldId id="296" r:id="rId5"/>
+    <p:sldId id="256" r:id="rId6"/>
+    <p:sldId id="257" r:id="rId7"/>
+    <p:sldId id="258" r:id="rId8"/>
+    <p:sldId id="259" r:id="rId9"/>
+    <p:sldId id="260" r:id="rId10"/>
+    <p:sldId id="261" r:id="rId11"/>
+    <p:sldId id="262" r:id="rId12"/>
+    <p:sldId id="291" r:id="rId13"/>
+    <p:sldId id="263" r:id="rId14"/>
+    <p:sldId id="292" r:id="rId15"/>
+    <p:sldId id="264" r:id="rId16"/>
+    <p:sldId id="265" r:id="rId17"/>
+    <p:sldId id="266" r:id="rId18"/>
+    <p:sldId id="267" r:id="rId19"/>
+    <p:sldId id="268" r:id="rId20"/>
+    <p:sldId id="269" r:id="rId21"/>
+    <p:sldId id="270" r:id="rId22"/>
+    <p:sldId id="271" r:id="rId23"/>
+    <p:sldId id="272" r:id="rId24"/>
+    <p:sldId id="273" r:id="rId25"/>
+    <p:sldId id="274" r:id="rId26"/>
+    <p:sldId id="275" r:id="rId27"/>
+    <p:sldId id="276" r:id="rId28"/>
+    <p:sldId id="277" r:id="rId29"/>
+    <p:sldId id="278" r:id="rId30"/>
+    <p:sldId id="279" r:id="rId31"/>
+    <p:sldId id="280" r:id="rId32"/>
+    <p:sldId id="281" r:id="rId33"/>
+    <p:sldId id="282" r:id="rId34"/>
+    <p:sldId id="283" r:id="rId35"/>
+    <p:sldId id="284" r:id="rId36"/>
+    <p:sldId id="285" r:id="rId37"/>
+    <p:sldId id="286" r:id="rId38"/>
+    <p:sldId id="287" r:id="rId39"/>
+    <p:sldId id="288" r:id="rId40"/>
+    <p:sldId id="289" r:id="rId41"/>
+    <p:sldId id="290" r:id="rId42"/>
   </p:sldIdLst>
   <p:sldSz cx="12192000" cy="6858000"/>
   <p:notesSz cx="6858000" cy="9144000"/>
@@ -140,6 +144,11 @@
       </a:defRPr>
     </a:lvl9pPr>
   </p:defaultTextStyle>
+  <p:extLst>
+    <p:ext uri="{EFAFB233-063F-42B5-8137-9DF3F51BA10A}">
+      <p15:sldGuideLst xmlns:p15="http://schemas.microsoft.com/office/powerpoint/2012/main"/>
+    </p:ext>
+  </p:extLst>
 </p:presentation>
 </file>
 
@@ -290,7 +299,7 @@
           <a:p>
             <a:fld id="{E15F8590-0EAC-44F7-8DC6-3A1411D2B327}" type="datetimeFigureOut">
               <a:rPr lang="pt-BR" smtClean="0"/>
-              <a:t>30/07/2026</a:t>
+              <a:t>31/07/2026</a:t>
             </a:fld>
             <a:endParaRPr lang="pt-BR"/>
           </a:p>
@@ -488,7 +497,7 @@
           <a:p>
             <a:fld id="{E15F8590-0EAC-44F7-8DC6-3A1411D2B327}" type="datetimeFigureOut">
               <a:rPr lang="pt-BR" smtClean="0"/>
-              <a:t>30/07/2026</a:t>
+              <a:t>31/07/2026</a:t>
             </a:fld>
             <a:endParaRPr lang="pt-BR"/>
           </a:p>
@@ -696,7 +705,7 @@
           <a:p>
             <a:fld id="{E15F8590-0EAC-44F7-8DC6-3A1411D2B327}" type="datetimeFigureOut">
               <a:rPr lang="pt-BR" smtClean="0"/>
-              <a:t>30/07/2026</a:t>
+              <a:t>31/07/2026</a:t>
             </a:fld>
             <a:endParaRPr lang="pt-BR"/>
           </a:p>
@@ -894,7 +903,7 @@
           <a:p>
             <a:fld id="{E15F8590-0EAC-44F7-8DC6-3A1411D2B327}" type="datetimeFigureOut">
               <a:rPr lang="pt-BR" smtClean="0"/>
-              <a:t>30/07/2026</a:t>
+              <a:t>31/07/2026</a:t>
             </a:fld>
             <a:endParaRPr lang="pt-BR"/>
           </a:p>
@@ -1169,7 +1178,7 @@
           <a:p>
             <a:fld id="{E15F8590-0EAC-44F7-8DC6-3A1411D2B327}" type="datetimeFigureOut">
               <a:rPr lang="pt-BR" smtClean="0"/>
-              <a:t>30/07/2026</a:t>
+              <a:t>31/07/2026</a:t>
             </a:fld>
             <a:endParaRPr lang="pt-BR"/>
           </a:p>
@@ -1434,7 +1443,7 @@
           <a:p>
             <a:fld id="{E15F8590-0EAC-44F7-8DC6-3A1411D2B327}" type="datetimeFigureOut">
               <a:rPr lang="pt-BR" smtClean="0"/>
-              <a:t>30/07/2026</a:t>
+              <a:t>31/07/2026</a:t>
             </a:fld>
             <a:endParaRPr lang="pt-BR"/>
           </a:p>
@@ -1846,7 +1855,7 @@
           <a:p>
             <a:fld id="{E15F8590-0EAC-44F7-8DC6-3A1411D2B327}" type="datetimeFigureOut">
               <a:rPr lang="pt-BR" smtClean="0"/>
-              <a:t>30/07/2026</a:t>
+              <a:t>31/07/2026</a:t>
             </a:fld>
             <a:endParaRPr lang="pt-BR"/>
           </a:p>
@@ -1987,7 +1996,7 @@
           <a:p>
             <a:fld id="{E15F8590-0EAC-44F7-8DC6-3A1411D2B327}" type="datetimeFigureOut">
               <a:rPr lang="pt-BR" smtClean="0"/>
-              <a:t>30/07/2026</a:t>
+              <a:t>31/07/2026</a:t>
             </a:fld>
             <a:endParaRPr lang="pt-BR"/>
           </a:p>
@@ -2100,7 +2109,7 @@
           <a:p>
             <a:fld id="{E15F8590-0EAC-44F7-8DC6-3A1411D2B327}" type="datetimeFigureOut">
               <a:rPr lang="pt-BR" smtClean="0"/>
-              <a:t>30/07/2026</a:t>
+              <a:t>31/07/2026</a:t>
             </a:fld>
             <a:endParaRPr lang="pt-BR"/>
           </a:p>
@@ -2411,7 +2420,7 @@
           <a:p>
             <a:fld id="{E15F8590-0EAC-44F7-8DC6-3A1411D2B327}" type="datetimeFigureOut">
               <a:rPr lang="pt-BR" smtClean="0"/>
-              <a:t>30/07/2026</a:t>
+              <a:t>31/07/2026</a:t>
             </a:fld>
             <a:endParaRPr lang="pt-BR"/>
           </a:p>
@@ -2699,7 +2708,7 @@
           <a:p>
             <a:fld id="{E15F8590-0EAC-44F7-8DC6-3A1411D2B327}" type="datetimeFigureOut">
               <a:rPr lang="pt-BR" smtClean="0"/>
-              <a:t>30/07/2026</a:t>
+              <a:t>31/07/2026</a:t>
             </a:fld>
             <a:endParaRPr lang="pt-BR"/>
           </a:p>
@@ -2940,7 +2949,7 @@
           <a:p>
             <a:fld id="{E15F8590-0EAC-44F7-8DC6-3A1411D2B327}" type="datetimeFigureOut">
               <a:rPr lang="pt-BR" smtClean="0"/>
-              <a:t>30/07/2026</a:t>
+              <a:t>31/07/2026</a:t>
             </a:fld>
             <a:endParaRPr lang="pt-BR"/>
           </a:p>
@@ -3357,266 +3366,55 @@
           <a:chExt cx="0" cy="0"/>
         </a:xfrm>
       </p:grpSpPr>
-      <p:pic>
-        <p:nvPicPr>
-          <p:cNvPr id="5" name="Imagem 4">
-            <a:extLst>
-              <a:ext uri="{FF2B5EF4-FFF2-40B4-BE49-F238E27FC236}">
-                <a16:creationId xmlns:a16="http://schemas.microsoft.com/office/drawing/2014/main" id="{D8983BCF-5B3E-4C14-8086-22D1C8AAB59C}"/>
-              </a:ext>
-            </a:extLst>
-          </p:cNvPr>
-          <p:cNvPicPr>
-            <a:picLocks noChangeAspect="1"/>
-          </p:cNvPicPr>
-          <p:nvPr/>
-        </p:nvPicPr>
-        <p:blipFill>
-          <a:blip r:embed="rId2">
-            <a:extLst>
-              <a:ext uri="{28A0092B-C50C-407E-A947-70E740481C1C}">
-                <a14:useLocalDpi xmlns:a14="http://schemas.microsoft.com/office/drawing/2010/main" val="0"/>
-              </a:ext>
-            </a:extLst>
-          </a:blip>
-          <a:stretch>
-            <a:fillRect/>
-          </a:stretch>
-        </p:blipFill>
-        <p:spPr>
-          <a:xfrm>
-            <a:off x="3132104" y="0"/>
-            <a:ext cx="5927792" cy="6858000"/>
-          </a:xfrm>
-          <a:prstGeom prst="rect">
-            <a:avLst/>
-          </a:prstGeom>
-        </p:spPr>
-      </p:pic>
-      <p:sp>
-        <p:nvSpPr>
-          <p:cNvPr id="9" name="Retângulo 8">
-            <a:extLst>
-              <a:ext uri="{FF2B5EF4-FFF2-40B4-BE49-F238E27FC236}">
-                <a16:creationId xmlns:a16="http://schemas.microsoft.com/office/drawing/2014/main" id="{72404E74-9A78-46B6-8AE7-EA61E556E95E}"/>
-              </a:ext>
-            </a:extLst>
-          </p:cNvPr>
-          <p:cNvSpPr/>
-          <p:nvPr/>
-        </p:nvSpPr>
-        <p:spPr>
-          <a:xfrm>
-            <a:off x="3479800" y="1109133"/>
-            <a:ext cx="4428067" cy="2040467"/>
-          </a:xfrm>
-          <a:prstGeom prst="rect">
-            <a:avLst/>
-          </a:prstGeom>
-          <a:noFill/>
-          <a:ln w="38100">
-            <a:solidFill>
-              <a:srgbClr val="FF0000"/>
-            </a:solidFill>
-          </a:ln>
-        </p:spPr>
-        <p:style>
-          <a:lnRef idx="2">
-            <a:schemeClr val="accent1">
-              <a:shade val="50000"/>
-            </a:schemeClr>
-          </a:lnRef>
-          <a:fillRef idx="1">
-            <a:schemeClr val="accent1"/>
-          </a:fillRef>
-          <a:effectRef idx="0">
-            <a:schemeClr val="accent1"/>
-          </a:effectRef>
-          <a:fontRef idx="minor">
-            <a:schemeClr val="lt1"/>
-          </a:fontRef>
-        </p:style>
-        <p:txBody>
-          <a:bodyPr rot="0" spcFirstLastPara="0" vertOverflow="overflow" horzOverflow="overflow" vert="horz" wrap="square" lIns="91440" tIns="45720" rIns="91440" bIns="45720" numCol="1" spcCol="0" rtlCol="0" fromWordArt="0" anchor="ctr" anchorCtr="0" forceAA="0" compatLnSpc="1">
-            <a:prstTxWarp prst="textNoShape">
-              <a:avLst/>
-            </a:prstTxWarp>
-            <a:noAutofit/>
-          </a:bodyPr>
-          <a:lstStyle/>
-          <a:p>
-            <a:pPr algn="ctr"/>
-            <a:endParaRPr lang="pt-BR"/>
-          </a:p>
-        </p:txBody>
-      </p:sp>
-      <p:sp>
-        <p:nvSpPr>
-          <p:cNvPr id="10" name="Retângulo 9">
-            <a:extLst>
-              <a:ext uri="{FF2B5EF4-FFF2-40B4-BE49-F238E27FC236}">
-                <a16:creationId xmlns:a16="http://schemas.microsoft.com/office/drawing/2014/main" id="{0022AC2F-EB36-4147-A622-371FB55C4DDB}"/>
-              </a:ext>
-            </a:extLst>
-          </p:cNvPr>
-          <p:cNvSpPr/>
-          <p:nvPr/>
-        </p:nvSpPr>
-        <p:spPr>
-          <a:xfrm>
-            <a:off x="3479800" y="3318933"/>
-            <a:ext cx="4428067" cy="2040467"/>
-          </a:xfrm>
-          <a:prstGeom prst="rect">
-            <a:avLst/>
-          </a:prstGeom>
-          <a:noFill/>
-          <a:ln w="38100">
-            <a:solidFill>
-              <a:srgbClr val="FF0000"/>
-            </a:solidFill>
-          </a:ln>
-        </p:spPr>
-        <p:style>
-          <a:lnRef idx="2">
-            <a:schemeClr val="accent1">
-              <a:shade val="50000"/>
-            </a:schemeClr>
-          </a:lnRef>
-          <a:fillRef idx="1">
-            <a:schemeClr val="accent1"/>
-          </a:fillRef>
-          <a:effectRef idx="0">
-            <a:schemeClr val="accent1"/>
-          </a:effectRef>
-          <a:fontRef idx="minor">
-            <a:schemeClr val="lt1"/>
-          </a:fontRef>
-        </p:style>
-        <p:txBody>
-          <a:bodyPr rot="0" spcFirstLastPara="0" vertOverflow="overflow" horzOverflow="overflow" vert="horz" wrap="square" lIns="91440" tIns="45720" rIns="91440" bIns="45720" numCol="1" spcCol="0" rtlCol="0" fromWordArt="0" anchor="ctr" anchorCtr="0" forceAA="0" compatLnSpc="1">
-            <a:prstTxWarp prst="textNoShape">
-              <a:avLst/>
-            </a:prstTxWarp>
-            <a:noAutofit/>
-          </a:bodyPr>
-          <a:lstStyle/>
-          <a:p>
-            <a:pPr algn="ctr"/>
-            <a:endParaRPr lang="pt-BR"/>
-          </a:p>
-        </p:txBody>
-      </p:sp>
-      <p:sp>
-        <p:nvSpPr>
-          <p:cNvPr id="11" name="Seta: para a Direita 10">
-            <a:extLst>
-              <a:ext uri="{FF2B5EF4-FFF2-40B4-BE49-F238E27FC236}">
-                <a16:creationId xmlns:a16="http://schemas.microsoft.com/office/drawing/2014/main" id="{E92C9069-8D35-4D31-826A-11222EAC567A}"/>
-              </a:ext>
-            </a:extLst>
-          </p:cNvPr>
-          <p:cNvSpPr/>
-          <p:nvPr/>
-        </p:nvSpPr>
-        <p:spPr>
-          <a:xfrm>
-            <a:off x="1574800" y="1634067"/>
-            <a:ext cx="1557304" cy="1109133"/>
-          </a:xfrm>
-          <a:prstGeom prst="rightArrow">
-            <a:avLst/>
-          </a:prstGeom>
-          <a:noFill/>
-          <a:ln w="38100">
-            <a:solidFill>
-              <a:srgbClr val="FF0000"/>
-            </a:solidFill>
-          </a:ln>
-        </p:spPr>
-        <p:style>
-          <a:lnRef idx="2">
-            <a:schemeClr val="accent1">
-              <a:shade val="50000"/>
-            </a:schemeClr>
-          </a:lnRef>
-          <a:fillRef idx="1">
-            <a:schemeClr val="accent1"/>
-          </a:fillRef>
-          <a:effectRef idx="0">
-            <a:schemeClr val="accent1"/>
-          </a:effectRef>
-          <a:fontRef idx="minor">
-            <a:schemeClr val="lt1"/>
-          </a:fontRef>
-        </p:style>
-        <p:txBody>
-          <a:bodyPr rot="0" spcFirstLastPara="0" vertOverflow="overflow" horzOverflow="overflow" vert="horz" wrap="square" lIns="91440" tIns="45720" rIns="91440" bIns="45720" numCol="1" spcCol="0" rtlCol="0" fromWordArt="0" anchor="ctr" anchorCtr="0" forceAA="0" compatLnSpc="1">
-            <a:prstTxWarp prst="textNoShape">
-              <a:avLst/>
-            </a:prstTxWarp>
-            <a:noAutofit/>
-          </a:bodyPr>
-          <a:lstStyle/>
-          <a:p>
-            <a:pPr algn="ctr"/>
-            <a:endParaRPr lang="pt-BR"/>
-          </a:p>
-        </p:txBody>
-      </p:sp>
-      <p:sp>
-        <p:nvSpPr>
-          <p:cNvPr id="12" name="Seta: para a Direita 11">
-            <a:extLst>
-              <a:ext uri="{FF2B5EF4-FFF2-40B4-BE49-F238E27FC236}">
-                <a16:creationId xmlns:a16="http://schemas.microsoft.com/office/drawing/2014/main" id="{BA645492-2F85-4B62-8430-D00A6224F5DA}"/>
-              </a:ext>
-            </a:extLst>
-          </p:cNvPr>
-          <p:cNvSpPr/>
-          <p:nvPr/>
-        </p:nvSpPr>
-        <p:spPr>
-          <a:xfrm>
-            <a:off x="1676400" y="3674534"/>
-            <a:ext cx="1455704" cy="1109133"/>
-          </a:xfrm>
-          <a:prstGeom prst="rightArrow">
-            <a:avLst/>
-          </a:prstGeom>
-          <a:noFill/>
-          <a:ln w="38100">
-            <a:solidFill>
-              <a:srgbClr val="FF0000"/>
-            </a:solidFill>
-          </a:ln>
-        </p:spPr>
-        <p:style>
-          <a:lnRef idx="2">
-            <a:schemeClr val="accent1">
-              <a:shade val="50000"/>
-            </a:schemeClr>
-          </a:lnRef>
-          <a:fillRef idx="1">
-            <a:schemeClr val="accent1"/>
-          </a:fillRef>
-          <a:effectRef idx="0">
-            <a:schemeClr val="accent1"/>
-          </a:effectRef>
-          <a:fontRef idx="minor">
-            <a:schemeClr val="lt1"/>
-          </a:fontRef>
-        </p:style>
-        <p:txBody>
-          <a:bodyPr rot="0" spcFirstLastPara="0" vertOverflow="overflow" horzOverflow="overflow" vert="horz" wrap="square" lIns="91440" tIns="45720" rIns="91440" bIns="45720" numCol="1" spcCol="0" rtlCol="0" fromWordArt="0" anchor="ctr" anchorCtr="0" forceAA="0" compatLnSpc="1">
-            <a:prstTxWarp prst="textNoShape">
-              <a:avLst/>
-            </a:prstTxWarp>
-            <a:noAutofit/>
-          </a:bodyPr>
-          <a:lstStyle/>
-          <a:p>
-            <a:pPr algn="ctr"/>
+      <p:sp>
+        <p:nvSpPr>
+          <p:cNvPr id="2" name="Título 1">
+            <a:extLst>
+              <a:ext uri="{FF2B5EF4-FFF2-40B4-BE49-F238E27FC236}">
+                <a16:creationId xmlns:a16="http://schemas.microsoft.com/office/drawing/2014/main" id="{D7430315-065D-476E-A9E5-14253F32CEF5}"/>
+              </a:ext>
+            </a:extLst>
+          </p:cNvPr>
+          <p:cNvSpPr>
+            <a:spLocks noGrp="1"/>
+          </p:cNvSpPr>
+          <p:nvPr>
+            <p:ph type="ctrTitle"/>
+          </p:nvPr>
+        </p:nvSpPr>
+        <p:spPr/>
+        <p:txBody>
+          <a:bodyPr/>
+          <a:lstStyle/>
+          <a:p>
+            <a:r>
+              <a:rPr lang="pt-BR" dirty="0"/>
+              <a:t>Exemplo3.html</a:t>
+            </a:r>
+          </a:p>
+        </p:txBody>
+      </p:sp>
+      <p:sp>
+        <p:nvSpPr>
+          <p:cNvPr id="3" name="Subtítulo 2">
+            <a:extLst>
+              <a:ext uri="{FF2B5EF4-FFF2-40B4-BE49-F238E27FC236}">
+                <a16:creationId xmlns:a16="http://schemas.microsoft.com/office/drawing/2014/main" id="{D02E3CCF-3B32-4BD4-BDBD-D5C5C4DE6CF0}"/>
+              </a:ext>
+            </a:extLst>
+          </p:cNvPr>
+          <p:cNvSpPr>
+            <a:spLocks noGrp="1"/>
+          </p:cNvSpPr>
+          <p:nvPr>
+            <p:ph type="subTitle" idx="1"/>
+          </p:nvPr>
+        </p:nvSpPr>
+        <p:spPr/>
+        <p:txBody>
+          <a:bodyPr/>
+          <a:lstStyle/>
+          <a:p>
             <a:endParaRPr lang="pt-BR"/>
           </a:p>
         </p:txBody>
@@ -3624,7 +3422,7 @@
     </p:spTree>
     <p:extLst>
       <p:ext uri="{BB962C8B-B14F-4D97-AF65-F5344CB8AC3E}">
-        <p14:creationId xmlns:p14="http://schemas.microsoft.com/office/powerpoint/2010/main" val="2099739676"/>
+        <p14:creationId xmlns:p14="http://schemas.microsoft.com/office/powerpoint/2010/main" val="4219261001"/>
       </p:ext>
     </p:extLst>
   </p:cSld>
@@ -3651,78 +3449,261 @@
           <a:chExt cx="0" cy="0"/>
         </a:xfrm>
       </p:grpSpPr>
-      <p:sp>
-        <p:nvSpPr>
-          <p:cNvPr id="2" name="Título 1">
-            <a:extLst>
-              <a:ext uri="{FF2B5EF4-FFF2-40B4-BE49-F238E27FC236}">
-                <a16:creationId xmlns:a16="http://schemas.microsoft.com/office/drawing/2014/main" id="{E2320889-A3EB-4A85-B1C7-C9DA0504194D}"/>
-              </a:ext>
-            </a:extLst>
-          </p:cNvPr>
-          <p:cNvSpPr>
-            <a:spLocks noGrp="1"/>
-          </p:cNvSpPr>
-          <p:nvPr>
-            <p:ph type="ctrTitle"/>
-          </p:nvPr>
-        </p:nvSpPr>
-        <p:spPr/>
-        <p:txBody>
-          <a:bodyPr>
-            <a:normAutofit/>
+      <p:pic>
+        <p:nvPicPr>
+          <p:cNvPr id="3" name="Imagem 2">
+            <a:extLst>
+              <a:ext uri="{FF2B5EF4-FFF2-40B4-BE49-F238E27FC236}">
+                <a16:creationId xmlns:a16="http://schemas.microsoft.com/office/drawing/2014/main" id="{D40A6E9E-513F-416B-814B-6E28EEDE54B9}"/>
+              </a:ext>
+            </a:extLst>
+          </p:cNvPr>
+          <p:cNvPicPr>
+            <a:picLocks noChangeAspect="1"/>
+          </p:cNvPicPr>
+          <p:nvPr/>
+        </p:nvPicPr>
+        <p:blipFill>
+          <a:blip r:embed="rId2">
+            <a:extLst>
+              <a:ext uri="{28A0092B-C50C-407E-A947-70E740481C1C}">
+                <a14:useLocalDpi xmlns:a14="http://schemas.microsoft.com/office/drawing/2010/main" val="0"/>
+              </a:ext>
+            </a:extLst>
+          </a:blip>
+          <a:stretch>
+            <a:fillRect/>
+          </a:stretch>
+        </p:blipFill>
+        <p:spPr>
+          <a:xfrm>
+            <a:off x="1050379" y="128127"/>
+            <a:ext cx="10091241" cy="6601747"/>
+          </a:xfrm>
+          <a:prstGeom prst="rect">
+            <a:avLst/>
+          </a:prstGeom>
+        </p:spPr>
+      </p:pic>
+      <p:sp>
+        <p:nvSpPr>
+          <p:cNvPr id="4" name="Retângulo 3">
+            <a:extLst>
+              <a:ext uri="{FF2B5EF4-FFF2-40B4-BE49-F238E27FC236}">
+                <a16:creationId xmlns:a16="http://schemas.microsoft.com/office/drawing/2014/main" id="{189823EE-9725-4A57-B50B-7109F4F2F6FB}"/>
+              </a:ext>
+            </a:extLst>
+          </p:cNvPr>
+          <p:cNvSpPr/>
+          <p:nvPr/>
+        </p:nvSpPr>
+        <p:spPr>
+          <a:xfrm>
+            <a:off x="2692400" y="3158067"/>
+            <a:ext cx="2633133" cy="1507066"/>
+          </a:xfrm>
+          <a:prstGeom prst="rect">
+            <a:avLst/>
+          </a:prstGeom>
+          <a:noFill/>
+          <a:ln w="38100">
+            <a:solidFill>
+              <a:srgbClr val="FF0000"/>
+            </a:solidFill>
+          </a:ln>
+        </p:spPr>
+        <p:style>
+          <a:lnRef idx="2">
+            <a:schemeClr val="accent1">
+              <a:shade val="50000"/>
+            </a:schemeClr>
+          </a:lnRef>
+          <a:fillRef idx="1">
+            <a:schemeClr val="accent1"/>
+          </a:fillRef>
+          <a:effectRef idx="0">
+            <a:schemeClr val="accent1"/>
+          </a:effectRef>
+          <a:fontRef idx="minor">
+            <a:schemeClr val="lt1"/>
+          </a:fontRef>
+        </p:style>
+        <p:txBody>
+          <a:bodyPr rot="0" spcFirstLastPara="0" vertOverflow="overflow" horzOverflow="overflow" vert="horz" wrap="square" lIns="91440" tIns="45720" rIns="91440" bIns="45720" numCol="1" spcCol="0" rtlCol="0" fromWordArt="0" anchor="ctr" anchorCtr="0" forceAA="0" compatLnSpc="1">
+            <a:prstTxWarp prst="textNoShape">
+              <a:avLst/>
+            </a:prstTxWarp>
+            <a:noAutofit/>
           </a:bodyPr>
           <a:lstStyle/>
           <a:p>
+            <a:pPr algn="ctr"/>
+            <a:endParaRPr lang="pt-BR"/>
+          </a:p>
+        </p:txBody>
+      </p:sp>
+      <p:sp>
+        <p:nvSpPr>
+          <p:cNvPr id="5" name="Seta: para a Direita 4">
+            <a:extLst>
+              <a:ext uri="{FF2B5EF4-FFF2-40B4-BE49-F238E27FC236}">
+                <a16:creationId xmlns:a16="http://schemas.microsoft.com/office/drawing/2014/main" id="{8033E91F-AEAD-4E23-B77A-A02D0A922533}"/>
+              </a:ext>
+            </a:extLst>
+          </p:cNvPr>
+          <p:cNvSpPr/>
+          <p:nvPr/>
+        </p:nvSpPr>
+        <p:spPr>
+          <a:xfrm>
+            <a:off x="1329267" y="3318933"/>
+            <a:ext cx="1193800" cy="982134"/>
+          </a:xfrm>
+          <a:prstGeom prst="rightArrow">
+            <a:avLst/>
+          </a:prstGeom>
+          <a:solidFill>
+            <a:srgbClr val="FFFF00"/>
+          </a:solidFill>
+          <a:ln w="38100">
+            <a:solidFill>
+              <a:srgbClr val="FF0000"/>
+            </a:solidFill>
+          </a:ln>
+        </p:spPr>
+        <p:style>
+          <a:lnRef idx="2">
+            <a:schemeClr val="accent1">
+              <a:shade val="50000"/>
+            </a:schemeClr>
+          </a:lnRef>
+          <a:fillRef idx="1">
+            <a:schemeClr val="accent1"/>
+          </a:fillRef>
+          <a:effectRef idx="0">
+            <a:schemeClr val="accent1"/>
+          </a:effectRef>
+          <a:fontRef idx="minor">
+            <a:schemeClr val="lt1"/>
+          </a:fontRef>
+        </p:style>
+        <p:txBody>
+          <a:bodyPr rot="0" spcFirstLastPara="0" vertOverflow="overflow" horzOverflow="overflow" vert="horz" wrap="square" lIns="91440" tIns="45720" rIns="91440" bIns="45720" numCol="1" spcCol="0" rtlCol="0" fromWordArt="0" anchor="ctr" anchorCtr="0" forceAA="0" compatLnSpc="1">
+            <a:prstTxWarp prst="textNoShape">
+              <a:avLst/>
+            </a:prstTxWarp>
+            <a:noAutofit/>
+          </a:bodyPr>
+          <a:lstStyle/>
+          <a:p>
+            <a:pPr algn="ctr"/>
+            <a:endParaRPr lang="pt-BR"/>
+          </a:p>
+        </p:txBody>
+      </p:sp>
+      <p:cxnSp>
+        <p:nvCxnSpPr>
+          <p:cNvPr id="7" name="Conector de Seta Reta 6">
+            <a:extLst>
+              <a:ext uri="{FF2B5EF4-FFF2-40B4-BE49-F238E27FC236}">
+                <a16:creationId xmlns:a16="http://schemas.microsoft.com/office/drawing/2014/main" id="{4FEC145C-B362-4376-BD35-A77A6C348F17}"/>
+              </a:ext>
+            </a:extLst>
+          </p:cNvPr>
+          <p:cNvCxnSpPr/>
+          <p:nvPr/>
+        </p:nvCxnSpPr>
+        <p:spPr>
+          <a:xfrm flipH="1" flipV="1">
+            <a:off x="7636676" y="4758267"/>
+            <a:ext cx="101857" cy="711200"/>
+          </a:xfrm>
+          <a:prstGeom prst="straightConnector1">
+            <a:avLst/>
+          </a:prstGeom>
+          <a:ln w="38100">
+            <a:solidFill>
+              <a:schemeClr val="accent6"/>
+            </a:solidFill>
+            <a:tailEnd type="triangle"/>
+          </a:ln>
+        </p:spPr>
+        <p:style>
+          <a:lnRef idx="1">
+            <a:schemeClr val="accent1"/>
+          </a:lnRef>
+          <a:fillRef idx="0">
+            <a:schemeClr val="accent1"/>
+          </a:fillRef>
+          <a:effectRef idx="0">
+            <a:schemeClr val="accent1"/>
+          </a:effectRef>
+          <a:fontRef idx="minor">
+            <a:schemeClr val="tx1"/>
+          </a:fontRef>
+        </p:style>
+      </p:cxnSp>
+      <p:sp>
+        <p:nvSpPr>
+          <p:cNvPr id="8" name="Elipse 7">
+            <a:extLst>
+              <a:ext uri="{FF2B5EF4-FFF2-40B4-BE49-F238E27FC236}">
+                <a16:creationId xmlns:a16="http://schemas.microsoft.com/office/drawing/2014/main" id="{203BBF35-A274-4DF1-9A40-3069B3E14F63}"/>
+              </a:ext>
+            </a:extLst>
+          </p:cNvPr>
+          <p:cNvSpPr/>
+          <p:nvPr/>
+        </p:nvSpPr>
+        <p:spPr>
+          <a:xfrm>
+            <a:off x="6867736" y="5469467"/>
+            <a:ext cx="1741593" cy="990600"/>
+          </a:xfrm>
+          <a:prstGeom prst="ellipse">
+            <a:avLst/>
+          </a:prstGeom>
+          <a:ln>
+            <a:solidFill>
+              <a:schemeClr val="accent6"/>
+            </a:solidFill>
+          </a:ln>
+        </p:spPr>
+        <p:style>
+          <a:lnRef idx="1">
+            <a:schemeClr val="accent6"/>
+          </a:lnRef>
+          <a:fillRef idx="2">
+            <a:schemeClr val="accent6"/>
+          </a:fillRef>
+          <a:effectRef idx="1">
+            <a:schemeClr val="accent6"/>
+          </a:effectRef>
+          <a:fontRef idx="minor">
+            <a:schemeClr val="dk1"/>
+          </a:fontRef>
+        </p:style>
+        <p:txBody>
+          <a:bodyPr rot="0" spcFirstLastPara="0" vertOverflow="overflow" horzOverflow="overflow" vert="horz" wrap="square" lIns="91440" tIns="45720" rIns="91440" bIns="45720" numCol="1" spcCol="0" rtlCol="0" fromWordArt="0" anchor="ctr" anchorCtr="0" forceAA="0" compatLnSpc="1">
+            <a:prstTxWarp prst="textNoShape">
+              <a:avLst/>
+            </a:prstTxWarp>
+            <a:noAutofit/>
+          </a:bodyPr>
+          <a:lstStyle/>
+          <a:p>
+            <a:pPr algn="ctr"/>
             <a:r>
               <a:rPr lang="pt-BR" dirty="0"/>
-              <a:t>HTML </a:t>
+              <a:t>Resultado</a:t>
             </a:r>
-            <a:r>
-              <a:rPr lang="pt-BR" dirty="0" err="1"/>
-              <a:t>Table</a:t>
-            </a:r>
-            <a:r>
-              <a:rPr lang="pt-BR" dirty="0"/>
-              <a:t> - </a:t>
-            </a:r>
-            <a:r>
-              <a:rPr lang="pt-BR" dirty="0" err="1"/>
-              <a:t>Colspan</a:t>
-            </a:r>
-            <a:endParaRPr lang="pt-BR" dirty="0"/>
-          </a:p>
-        </p:txBody>
-      </p:sp>
-      <p:sp>
-        <p:nvSpPr>
-          <p:cNvPr id="3" name="Subtítulo 2">
-            <a:extLst>
-              <a:ext uri="{FF2B5EF4-FFF2-40B4-BE49-F238E27FC236}">
-                <a16:creationId xmlns:a16="http://schemas.microsoft.com/office/drawing/2014/main" id="{B921187D-463F-4FAA-B2B4-34A89B8202B2}"/>
-              </a:ext>
-            </a:extLst>
-          </p:cNvPr>
-          <p:cNvSpPr>
-            <a:spLocks noGrp="1"/>
-          </p:cNvSpPr>
-          <p:nvPr>
-            <p:ph type="subTitle" idx="1"/>
-          </p:nvPr>
-        </p:nvSpPr>
-        <p:spPr/>
-        <p:txBody>
-          <a:bodyPr/>
-          <a:lstStyle/>
-          <a:p>
-            <a:endParaRPr lang="pt-BR"/>
           </a:p>
         </p:txBody>
       </p:sp>
     </p:spTree>
     <p:extLst>
       <p:ext uri="{BB962C8B-B14F-4D97-AF65-F5344CB8AC3E}">
-        <p14:creationId xmlns:p14="http://schemas.microsoft.com/office/powerpoint/2010/main" val="1628388197"/>
+        <p14:creationId xmlns:p14="http://schemas.microsoft.com/office/powerpoint/2010/main" val="3160457805"/>
       </p:ext>
     </p:extLst>
   </p:cSld>
@@ -3754,7 +3735,7 @@
           <p:cNvPr id="3" name="Imagem 2">
             <a:extLst>
               <a:ext uri="{FF2B5EF4-FFF2-40B4-BE49-F238E27FC236}">
-                <a16:creationId xmlns:a16="http://schemas.microsoft.com/office/drawing/2014/main" id="{3DA39D41-98A0-4ABD-A526-5BAB5C758DE7}"/>
+                <a16:creationId xmlns:a16="http://schemas.microsoft.com/office/drawing/2014/main" id="{01E9F0F6-4C5B-4198-B6EC-9292C5CE0ABB}"/>
               </a:ext>
             </a:extLst>
           </p:cNvPr>
@@ -3777,68 +3758,32 @@
         </p:blipFill>
         <p:spPr>
           <a:xfrm>
-            <a:off x="341044" y="927364"/>
-            <a:ext cx="5169144" cy="5117836"/>
+            <a:off x="470893" y="685607"/>
+            <a:ext cx="11250215" cy="5486785"/>
           </a:xfrm>
           <a:prstGeom prst="rect">
             <a:avLst/>
           </a:prstGeom>
         </p:spPr>
       </p:pic>
-      <p:pic>
-        <p:nvPicPr>
-          <p:cNvPr id="5" name="Imagem 4">
-            <a:extLst>
-              <a:ext uri="{FF2B5EF4-FFF2-40B4-BE49-F238E27FC236}">
-                <a16:creationId xmlns:a16="http://schemas.microsoft.com/office/drawing/2014/main" id="{3298D32E-A8C3-486B-B3EC-898626F74354}"/>
-              </a:ext>
-            </a:extLst>
-          </p:cNvPr>
-          <p:cNvPicPr>
-            <a:picLocks noChangeAspect="1"/>
-          </p:cNvPicPr>
-          <p:nvPr/>
-        </p:nvPicPr>
-        <p:blipFill>
-          <a:blip r:embed="rId3">
-            <a:extLst>
-              <a:ext uri="{28A0092B-C50C-407E-A947-70E740481C1C}">
-                <a14:useLocalDpi xmlns:a14="http://schemas.microsoft.com/office/drawing/2010/main" val="0"/>
-              </a:ext>
-            </a:extLst>
-          </a:blip>
-          <a:stretch>
-            <a:fillRect/>
-          </a:stretch>
-        </p:blipFill>
-        <p:spPr>
-          <a:xfrm>
-            <a:off x="5935133" y="3946690"/>
-            <a:ext cx="6256867" cy="624236"/>
+      <p:sp>
+        <p:nvSpPr>
+          <p:cNvPr id="4" name="Retângulo 3">
+            <a:extLst>
+              <a:ext uri="{FF2B5EF4-FFF2-40B4-BE49-F238E27FC236}">
+                <a16:creationId xmlns:a16="http://schemas.microsoft.com/office/drawing/2014/main" id="{8154BCBE-E1EE-4559-BD93-29CB9BF9121E}"/>
+              </a:ext>
+            </a:extLst>
+          </p:cNvPr>
+          <p:cNvSpPr/>
+          <p:nvPr/>
+        </p:nvSpPr>
+        <p:spPr>
+          <a:xfrm>
+            <a:off x="1532467" y="1820333"/>
+            <a:ext cx="3843866" cy="2370667"/>
           </a:xfrm>
           <a:prstGeom prst="rect">
-            <a:avLst/>
-          </a:prstGeom>
-        </p:spPr>
-      </p:pic>
-      <p:sp>
-        <p:nvSpPr>
-          <p:cNvPr id="6" name="Seta: Dobrada para Cima 5">
-            <a:extLst>
-              <a:ext uri="{FF2B5EF4-FFF2-40B4-BE49-F238E27FC236}">
-                <a16:creationId xmlns:a16="http://schemas.microsoft.com/office/drawing/2014/main" id="{94ADAA02-9E89-4DC5-8C52-475107355060}"/>
-              </a:ext>
-            </a:extLst>
-          </p:cNvPr>
-          <p:cNvSpPr/>
-          <p:nvPr/>
-        </p:nvSpPr>
-        <p:spPr>
-          <a:xfrm rot="10800000" flipH="1">
-            <a:off x="1363133" y="2455332"/>
-            <a:ext cx="6874934" cy="1398223"/>
-          </a:xfrm>
-          <a:prstGeom prst="bentUpArrow">
             <a:avLst/>
           </a:prstGeom>
           <a:noFill/>
@@ -3878,54 +3823,12 @@
           </a:p>
         </p:txBody>
       </p:sp>
-      <p:cxnSp>
-        <p:nvCxnSpPr>
-          <p:cNvPr id="8" name="Conector de Seta Reta 7">
-            <a:extLst>
-              <a:ext uri="{FF2B5EF4-FFF2-40B4-BE49-F238E27FC236}">
-                <a16:creationId xmlns:a16="http://schemas.microsoft.com/office/drawing/2014/main" id="{6F16A848-2A6F-48C1-ACCC-C0C28269A983}"/>
-              </a:ext>
-            </a:extLst>
-          </p:cNvPr>
-          <p:cNvCxnSpPr/>
-          <p:nvPr/>
-        </p:nvCxnSpPr>
-        <p:spPr>
-          <a:xfrm flipH="1" flipV="1">
-            <a:off x="8026400" y="4428067"/>
-            <a:ext cx="127000" cy="821266"/>
-          </a:xfrm>
-          <a:prstGeom prst="straightConnector1">
-            <a:avLst/>
-          </a:prstGeom>
-          <a:ln w="38100">
-            <a:solidFill>
-              <a:srgbClr val="FF0000"/>
-            </a:solidFill>
-            <a:tailEnd type="triangle"/>
-          </a:ln>
-        </p:spPr>
-        <p:style>
-          <a:lnRef idx="1">
-            <a:schemeClr val="accent1"/>
-          </a:lnRef>
-          <a:fillRef idx="0">
-            <a:schemeClr val="accent1"/>
-          </a:fillRef>
-          <a:effectRef idx="0">
-            <a:schemeClr val="accent1"/>
-          </a:effectRef>
-          <a:fontRef idx="minor">
-            <a:schemeClr val="tx1"/>
-          </a:fontRef>
-        </p:style>
-      </p:cxnSp>
-      <p:sp>
-        <p:nvSpPr>
-          <p:cNvPr id="9" name="Retângulo 8">
-            <a:extLst>
-              <a:ext uri="{FF2B5EF4-FFF2-40B4-BE49-F238E27FC236}">
-                <a16:creationId xmlns:a16="http://schemas.microsoft.com/office/drawing/2014/main" id="{2281A1E4-7922-42C1-8DFF-A7DBEC98BCF0}"/>
+      <p:sp>
+        <p:nvSpPr>
+          <p:cNvPr id="5" name="Retângulo 4">
+            <a:extLst>
+              <a:ext uri="{FF2B5EF4-FFF2-40B4-BE49-F238E27FC236}">
+                <a16:creationId xmlns:a16="http://schemas.microsoft.com/office/drawing/2014/main" id="{11CAE6A6-0AB7-4AFA-9BA9-9C1C2701CAC6}"/>
               </a:ext>
             </a:extLst>
           </p:cNvPr>
@@ -3934,8 +3837,8 @@
         </p:nvSpPr>
         <p:spPr>
           <a:xfrm>
-            <a:off x="6681814" y="5249333"/>
-            <a:ext cx="3556000" cy="966892"/>
+            <a:off x="2286000" y="2226733"/>
+            <a:ext cx="2904067" cy="1524000"/>
           </a:xfrm>
           <a:prstGeom prst="rect">
             <a:avLst/>
@@ -3943,7 +3846,7 @@
           <a:noFill/>
           <a:ln w="38100">
             <a:solidFill>
-              <a:srgbClr val="FF0000"/>
+              <a:schemeClr val="accent6"/>
             </a:solidFill>
           </a:ln>
         </p:spPr>
@@ -3973,40 +3876,14 @@
           <a:lstStyle/>
           <a:p>
             <a:pPr algn="ctr"/>
-            <a:r>
-              <a:rPr lang="pt-BR" dirty="0">
-                <a:solidFill>
-                  <a:schemeClr val="tx1"/>
-                </a:solidFill>
-              </a:rPr>
-              <a:t>Inserir o atributo </a:t>
-            </a:r>
-          </a:p>
-          <a:p>
-            <a:pPr algn="ctr"/>
-            <a:r>
-              <a:rPr lang="pt-BR" sz="3600" dirty="0" err="1">
-                <a:solidFill>
-                  <a:schemeClr val="tx1"/>
-                </a:solidFill>
-              </a:rPr>
-              <a:t>colspan</a:t>
-            </a:r>
-            <a:r>
-              <a:rPr lang="pt-BR" sz="3600" dirty="0">
-                <a:solidFill>
-                  <a:schemeClr val="tx1"/>
-                </a:solidFill>
-              </a:rPr>
-              <a:t>=“2”</a:t>
-            </a:r>
+            <a:endParaRPr lang="pt-BR"/>
           </a:p>
         </p:txBody>
       </p:sp>
     </p:spTree>
     <p:extLst>
       <p:ext uri="{BB962C8B-B14F-4D97-AF65-F5344CB8AC3E}">
-        <p14:creationId xmlns:p14="http://schemas.microsoft.com/office/powerpoint/2010/main" val="2816553980"/>
+        <p14:creationId xmlns:p14="http://schemas.microsoft.com/office/powerpoint/2010/main" val="1823519928"/>
       </p:ext>
     </p:extLst>
   </p:cSld>
@@ -4035,10 +3912,10 @@
       </p:grpSpPr>
       <p:pic>
         <p:nvPicPr>
-          <p:cNvPr id="2" name="Imagem 1">
-            <a:extLst>
-              <a:ext uri="{FF2B5EF4-FFF2-40B4-BE49-F238E27FC236}">
-                <a16:creationId xmlns:a16="http://schemas.microsoft.com/office/drawing/2014/main" id="{1D07F105-4D76-41B7-A5AB-2B1FCA816070}"/>
+          <p:cNvPr id="3" name="Imagem 2">
+            <a:extLst>
+              <a:ext uri="{FF2B5EF4-FFF2-40B4-BE49-F238E27FC236}">
+                <a16:creationId xmlns:a16="http://schemas.microsoft.com/office/drawing/2014/main" id="{2C03970E-6B55-4304-B08A-0259397C57EE}"/>
               </a:ext>
             </a:extLst>
           </p:cNvPr>
@@ -4048,69 +3925,33 @@
           <p:nvPr/>
         </p:nvPicPr>
         <p:blipFill>
-          <a:blip r:embed="rId2"/>
+          <a:blip r:embed="rId2">
+            <a:extLst>
+              <a:ext uri="{28A0092B-C50C-407E-A947-70E740481C1C}">
+                <a14:useLocalDpi xmlns:a14="http://schemas.microsoft.com/office/drawing/2010/main" val="0"/>
+              </a:ext>
+            </a:extLst>
+          </a:blip>
           <a:stretch>
             <a:fillRect/>
           </a:stretch>
         </p:blipFill>
         <p:spPr>
           <a:xfrm>
-            <a:off x="3705225" y="990600"/>
-            <a:ext cx="4781550" cy="4876800"/>
+            <a:off x="1029421" y="60014"/>
+            <a:ext cx="10133157" cy="6737973"/>
           </a:xfrm>
           <a:prstGeom prst="rect">
             <a:avLst/>
           </a:prstGeom>
         </p:spPr>
       </p:pic>
-      <p:cxnSp>
-        <p:nvCxnSpPr>
-          <p:cNvPr id="4" name="Conector de Seta Reta 3">
-            <a:extLst>
-              <a:ext uri="{FF2B5EF4-FFF2-40B4-BE49-F238E27FC236}">
-                <a16:creationId xmlns:a16="http://schemas.microsoft.com/office/drawing/2014/main" id="{A94AD6DC-F981-4083-BE74-8047836743D0}"/>
-              </a:ext>
-            </a:extLst>
-          </p:cNvPr>
-          <p:cNvCxnSpPr/>
-          <p:nvPr/>
-        </p:nvCxnSpPr>
-        <p:spPr>
-          <a:xfrm flipV="1">
-            <a:off x="2658533" y="3488267"/>
-            <a:ext cx="1176867" cy="541866"/>
-          </a:xfrm>
-          <a:prstGeom prst="straightConnector1">
-            <a:avLst/>
-          </a:prstGeom>
-          <a:ln w="38100">
-            <a:solidFill>
-              <a:srgbClr val="FF0000"/>
-            </a:solidFill>
-            <a:tailEnd type="triangle"/>
-          </a:ln>
-        </p:spPr>
-        <p:style>
-          <a:lnRef idx="1">
-            <a:schemeClr val="accent1"/>
-          </a:lnRef>
-          <a:fillRef idx="0">
-            <a:schemeClr val="accent1"/>
-          </a:fillRef>
-          <a:effectRef idx="0">
-            <a:schemeClr val="accent1"/>
-          </a:effectRef>
-          <a:fontRef idx="minor">
-            <a:schemeClr val="tx1"/>
-          </a:fontRef>
-        </p:style>
-      </p:cxnSp>
-      <p:sp>
-        <p:nvSpPr>
-          <p:cNvPr id="5" name="Elipse 4">
-            <a:extLst>
-              <a:ext uri="{FF2B5EF4-FFF2-40B4-BE49-F238E27FC236}">
-                <a16:creationId xmlns:a16="http://schemas.microsoft.com/office/drawing/2014/main" id="{9EE113BF-D914-4A76-B0C4-8C360921EAE6}"/>
+      <p:sp>
+        <p:nvSpPr>
+          <p:cNvPr id="4" name="Retângulo 3">
+            <a:extLst>
+              <a:ext uri="{FF2B5EF4-FFF2-40B4-BE49-F238E27FC236}">
+                <a16:creationId xmlns:a16="http://schemas.microsoft.com/office/drawing/2014/main" id="{30B41244-7C8C-4183-AFD9-63BCD5677BCC}"/>
               </a:ext>
             </a:extLst>
           </p:cNvPr>
@@ -4119,15 +3960,13 @@
         </p:nvSpPr>
         <p:spPr>
           <a:xfrm>
-            <a:off x="797136" y="3589867"/>
-            <a:ext cx="2579794" cy="1837266"/>
-          </a:xfrm>
-          <a:prstGeom prst="ellipse">
-            <a:avLst/>
-          </a:prstGeom>
-          <a:solidFill>
-            <a:srgbClr val="FFFF00"/>
-          </a:solidFill>
+            <a:off x="1998133" y="660400"/>
+            <a:ext cx="3217334" cy="2209800"/>
+          </a:xfrm>
+          <a:prstGeom prst="rect">
+            <a:avLst/>
+          </a:prstGeom>
+          <a:noFill/>
           <a:ln w="38100">
             <a:solidFill>
               <a:srgbClr val="FF0000"/>
@@ -4160,65 +3999,16 @@
           <a:lstStyle/>
           <a:p>
             <a:pPr algn="ctr"/>
-            <a:r>
-              <a:rPr lang="pt-BR" dirty="0">
-                <a:solidFill>
-                  <a:schemeClr val="tx1"/>
-                </a:solidFill>
-              </a:rPr>
-              <a:t>A célula com o texto Guilherme agora ocupa o espaço de 2 colunas</a:t>
-            </a:r>
-          </a:p>
-        </p:txBody>
-      </p:sp>
-      <p:cxnSp>
-        <p:nvCxnSpPr>
-          <p:cNvPr id="7" name="Conector de Seta Reta 6">
-            <a:extLst>
-              <a:ext uri="{FF2B5EF4-FFF2-40B4-BE49-F238E27FC236}">
-                <a16:creationId xmlns:a16="http://schemas.microsoft.com/office/drawing/2014/main" id="{B94CC7B5-EBEE-4506-8217-061B23A6CEB2}"/>
-              </a:ext>
-            </a:extLst>
-          </p:cNvPr>
-          <p:cNvCxnSpPr/>
-          <p:nvPr/>
-        </p:nvCxnSpPr>
-        <p:spPr>
-          <a:xfrm flipH="1" flipV="1">
-            <a:off x="6688667" y="3429000"/>
-            <a:ext cx="2286000" cy="702733"/>
-          </a:xfrm>
-          <a:prstGeom prst="straightConnector1">
-            <a:avLst/>
-          </a:prstGeom>
-          <a:ln w="38100">
-            <a:solidFill>
-              <a:srgbClr val="FF0000"/>
-            </a:solidFill>
-            <a:tailEnd type="triangle"/>
-          </a:ln>
-        </p:spPr>
-        <p:style>
-          <a:lnRef idx="1">
-            <a:schemeClr val="accent1"/>
-          </a:lnRef>
-          <a:fillRef idx="0">
-            <a:schemeClr val="accent1"/>
-          </a:fillRef>
-          <a:effectRef idx="0">
-            <a:schemeClr val="accent1"/>
-          </a:effectRef>
-          <a:fontRef idx="minor">
-            <a:schemeClr val="tx1"/>
-          </a:fontRef>
-        </p:style>
-      </p:cxnSp>
-      <p:sp>
-        <p:nvSpPr>
-          <p:cNvPr id="8" name="Elipse 7">
-            <a:extLst>
-              <a:ext uri="{FF2B5EF4-FFF2-40B4-BE49-F238E27FC236}">
-                <a16:creationId xmlns:a16="http://schemas.microsoft.com/office/drawing/2014/main" id="{C278320F-0816-47A9-A160-E6D65062EA2C}"/>
+            <a:endParaRPr lang="pt-BR"/>
+          </a:p>
+        </p:txBody>
+      </p:sp>
+      <p:sp>
+        <p:nvSpPr>
+          <p:cNvPr id="5" name="Retângulo 4">
+            <a:extLst>
+              <a:ext uri="{FF2B5EF4-FFF2-40B4-BE49-F238E27FC236}">
+                <a16:creationId xmlns:a16="http://schemas.microsoft.com/office/drawing/2014/main" id="{73A90CF6-DE53-40C3-AE93-E154E93C2CC0}"/>
               </a:ext>
             </a:extLst>
           </p:cNvPr>
@@ -4227,15 +4017,13 @@
         </p:nvSpPr>
         <p:spPr>
           <a:xfrm>
-            <a:off x="8815070" y="3810000"/>
-            <a:ext cx="2286000" cy="1388533"/>
-          </a:xfrm>
-          <a:prstGeom prst="ellipse">
-            <a:avLst/>
-          </a:prstGeom>
-          <a:solidFill>
-            <a:srgbClr val="FFFF00"/>
-          </a:solidFill>
+            <a:off x="1998133" y="3031067"/>
+            <a:ext cx="3217334" cy="2209800"/>
+          </a:xfrm>
+          <a:prstGeom prst="rect">
+            <a:avLst/>
+          </a:prstGeom>
+          <a:noFill/>
           <a:ln w="38100">
             <a:solidFill>
               <a:srgbClr val="FF0000"/>
@@ -4268,21 +4056,274 @@
           <a:lstStyle/>
           <a:p>
             <a:pPr algn="ctr"/>
+            <a:endParaRPr lang="pt-BR"/>
+          </a:p>
+        </p:txBody>
+      </p:sp>
+      <p:sp>
+        <p:nvSpPr>
+          <p:cNvPr id="6" name="Retângulo 5">
+            <a:extLst>
+              <a:ext uri="{FF2B5EF4-FFF2-40B4-BE49-F238E27FC236}">
+                <a16:creationId xmlns:a16="http://schemas.microsoft.com/office/drawing/2014/main" id="{663429A4-C321-4934-83EF-AD7BC1BAB8E3}"/>
+              </a:ext>
+            </a:extLst>
+          </p:cNvPr>
+          <p:cNvSpPr/>
+          <p:nvPr/>
+        </p:nvSpPr>
+        <p:spPr>
+          <a:xfrm>
+            <a:off x="2760133" y="1007533"/>
+            <a:ext cx="2319867" cy="1380067"/>
+          </a:xfrm>
+          <a:prstGeom prst="rect">
+            <a:avLst/>
+          </a:prstGeom>
+          <a:noFill/>
+          <a:ln w="38100">
+            <a:solidFill>
+              <a:schemeClr val="accent6"/>
+            </a:solidFill>
+          </a:ln>
+        </p:spPr>
+        <p:style>
+          <a:lnRef idx="2">
+            <a:schemeClr val="accent1">
+              <a:shade val="50000"/>
+            </a:schemeClr>
+          </a:lnRef>
+          <a:fillRef idx="1">
+            <a:schemeClr val="accent1"/>
+          </a:fillRef>
+          <a:effectRef idx="0">
+            <a:schemeClr val="accent1"/>
+          </a:effectRef>
+          <a:fontRef idx="minor">
+            <a:schemeClr val="lt1"/>
+          </a:fontRef>
+        </p:style>
+        <p:txBody>
+          <a:bodyPr rot="0" spcFirstLastPara="0" vertOverflow="overflow" horzOverflow="overflow" vert="horz" wrap="square" lIns="91440" tIns="45720" rIns="91440" bIns="45720" numCol="1" spcCol="0" rtlCol="0" fromWordArt="0" anchor="ctr" anchorCtr="0" forceAA="0" compatLnSpc="1">
+            <a:prstTxWarp prst="textNoShape">
+              <a:avLst/>
+            </a:prstTxWarp>
+            <a:noAutofit/>
+          </a:bodyPr>
+          <a:lstStyle/>
+          <a:p>
+            <a:pPr algn="ctr"/>
+            <a:endParaRPr lang="pt-BR"/>
+          </a:p>
+        </p:txBody>
+      </p:sp>
+      <p:sp>
+        <p:nvSpPr>
+          <p:cNvPr id="7" name="Retângulo 6">
+            <a:extLst>
+              <a:ext uri="{FF2B5EF4-FFF2-40B4-BE49-F238E27FC236}">
+                <a16:creationId xmlns:a16="http://schemas.microsoft.com/office/drawing/2014/main" id="{7154FE27-5A4E-4817-83C1-BF7A3D252073}"/>
+              </a:ext>
+            </a:extLst>
+          </p:cNvPr>
+          <p:cNvSpPr/>
+          <p:nvPr/>
+        </p:nvSpPr>
+        <p:spPr>
+          <a:xfrm>
+            <a:off x="2760132" y="3429000"/>
+            <a:ext cx="2319867" cy="1380067"/>
+          </a:xfrm>
+          <a:prstGeom prst="rect">
+            <a:avLst/>
+          </a:prstGeom>
+          <a:noFill/>
+          <a:ln w="38100">
+            <a:solidFill>
+              <a:schemeClr val="accent6"/>
+            </a:solidFill>
+          </a:ln>
+        </p:spPr>
+        <p:style>
+          <a:lnRef idx="2">
+            <a:schemeClr val="accent1">
+              <a:shade val="50000"/>
+            </a:schemeClr>
+          </a:lnRef>
+          <a:fillRef idx="1">
+            <a:schemeClr val="accent1"/>
+          </a:fillRef>
+          <a:effectRef idx="0">
+            <a:schemeClr val="accent1"/>
+          </a:effectRef>
+          <a:fontRef idx="minor">
+            <a:schemeClr val="lt1"/>
+          </a:fontRef>
+        </p:style>
+        <p:txBody>
+          <a:bodyPr rot="0" spcFirstLastPara="0" vertOverflow="overflow" horzOverflow="overflow" vert="horz" wrap="square" lIns="91440" tIns="45720" rIns="91440" bIns="45720" numCol="1" spcCol="0" rtlCol="0" fromWordArt="0" anchor="ctr" anchorCtr="0" forceAA="0" compatLnSpc="1">
+            <a:prstTxWarp prst="textNoShape">
+              <a:avLst/>
+            </a:prstTxWarp>
+            <a:noAutofit/>
+          </a:bodyPr>
+          <a:lstStyle/>
+          <a:p>
+            <a:pPr algn="ctr"/>
+            <a:endParaRPr lang="pt-BR"/>
+          </a:p>
+        </p:txBody>
+      </p:sp>
+      <p:cxnSp>
+        <p:nvCxnSpPr>
+          <p:cNvPr id="8" name="Conector de Seta Reta 7">
+            <a:extLst>
+              <a:ext uri="{FF2B5EF4-FFF2-40B4-BE49-F238E27FC236}">
+                <a16:creationId xmlns:a16="http://schemas.microsoft.com/office/drawing/2014/main" id="{0C37E236-99D2-41DE-A242-4B7EE1DCBCE3}"/>
+              </a:ext>
+            </a:extLst>
+          </p:cNvPr>
+          <p:cNvCxnSpPr>
+            <a:cxnSpLocks/>
+            <a:stCxn id="9" idx="1"/>
+          </p:cNvCxnSpPr>
+          <p:nvPr/>
+        </p:nvCxnSpPr>
+        <p:spPr>
+          <a:xfrm flipH="1" flipV="1">
+            <a:off x="6307667" y="5342467"/>
+            <a:ext cx="394812" cy="432937"/>
+          </a:xfrm>
+          <a:prstGeom prst="straightConnector1">
+            <a:avLst/>
+          </a:prstGeom>
+          <a:ln w="38100">
+            <a:solidFill>
+              <a:schemeClr val="accent6"/>
+            </a:solidFill>
+            <a:tailEnd type="triangle"/>
+          </a:ln>
+        </p:spPr>
+        <p:style>
+          <a:lnRef idx="1">
+            <a:schemeClr val="accent1"/>
+          </a:lnRef>
+          <a:fillRef idx="0">
+            <a:schemeClr val="accent1"/>
+          </a:fillRef>
+          <a:effectRef idx="0">
+            <a:schemeClr val="accent1"/>
+          </a:effectRef>
+          <a:fontRef idx="minor">
+            <a:schemeClr val="tx1"/>
+          </a:fontRef>
+        </p:style>
+      </p:cxnSp>
+      <p:sp>
+        <p:nvSpPr>
+          <p:cNvPr id="9" name="Elipse 8">
+            <a:extLst>
+              <a:ext uri="{FF2B5EF4-FFF2-40B4-BE49-F238E27FC236}">
+                <a16:creationId xmlns:a16="http://schemas.microsoft.com/office/drawing/2014/main" id="{F2500FE0-68C5-411D-AFC2-A9BEDE078550}"/>
+              </a:ext>
+            </a:extLst>
+          </p:cNvPr>
+          <p:cNvSpPr/>
+          <p:nvPr/>
+        </p:nvSpPr>
+        <p:spPr>
+          <a:xfrm>
+            <a:off x="6447429" y="5630334"/>
+            <a:ext cx="1741593" cy="990600"/>
+          </a:xfrm>
+          <a:prstGeom prst="ellipse">
+            <a:avLst/>
+          </a:prstGeom>
+          <a:ln>
+            <a:solidFill>
+              <a:schemeClr val="accent6"/>
+            </a:solidFill>
+          </a:ln>
+        </p:spPr>
+        <p:style>
+          <a:lnRef idx="1">
+            <a:schemeClr val="accent6"/>
+          </a:lnRef>
+          <a:fillRef idx="2">
+            <a:schemeClr val="accent6"/>
+          </a:fillRef>
+          <a:effectRef idx="1">
+            <a:schemeClr val="accent6"/>
+          </a:effectRef>
+          <a:fontRef idx="minor">
+            <a:schemeClr val="dk1"/>
+          </a:fontRef>
+        </p:style>
+        <p:txBody>
+          <a:bodyPr rot="0" spcFirstLastPara="0" vertOverflow="overflow" horzOverflow="overflow" vert="horz" wrap="square" lIns="91440" tIns="45720" rIns="91440" bIns="45720" numCol="1" spcCol="0" rtlCol="0" fromWordArt="0" anchor="ctr" anchorCtr="0" forceAA="0" compatLnSpc="1">
+            <a:prstTxWarp prst="textNoShape">
+              <a:avLst/>
+            </a:prstTxWarp>
+            <a:noAutofit/>
+          </a:bodyPr>
+          <a:lstStyle/>
+          <a:p>
+            <a:pPr algn="ctr"/>
             <a:r>
-              <a:rPr lang="pt-BR" dirty="0">
-                <a:solidFill>
-                  <a:schemeClr val="tx1"/>
-                </a:solidFill>
-              </a:rPr>
-              <a:t>Efeito Colateral</a:t>
+              <a:rPr lang="pt-BR" dirty="0"/>
+              <a:t>Resultado</a:t>
             </a:r>
           </a:p>
         </p:txBody>
       </p:sp>
+      <p:cxnSp>
+        <p:nvCxnSpPr>
+          <p:cNvPr id="12" name="Conector de Seta Reta 11">
+            <a:extLst>
+              <a:ext uri="{FF2B5EF4-FFF2-40B4-BE49-F238E27FC236}">
+                <a16:creationId xmlns:a16="http://schemas.microsoft.com/office/drawing/2014/main" id="{5425374E-1593-4355-B56E-AA5004BD2523}"/>
+              </a:ext>
+            </a:extLst>
+          </p:cNvPr>
+          <p:cNvCxnSpPr>
+            <a:cxnSpLocks/>
+          </p:cNvCxnSpPr>
+          <p:nvPr/>
+        </p:nvCxnSpPr>
+        <p:spPr>
+          <a:xfrm flipH="1" flipV="1">
+            <a:off x="6510867" y="5024399"/>
+            <a:ext cx="191612" cy="751005"/>
+          </a:xfrm>
+          <a:prstGeom prst="straightConnector1">
+            <a:avLst/>
+          </a:prstGeom>
+          <a:ln w="38100">
+            <a:solidFill>
+              <a:schemeClr val="accent6"/>
+            </a:solidFill>
+            <a:tailEnd type="triangle"/>
+          </a:ln>
+        </p:spPr>
+        <p:style>
+          <a:lnRef idx="1">
+            <a:schemeClr val="accent1"/>
+          </a:lnRef>
+          <a:fillRef idx="0">
+            <a:schemeClr val="accent1"/>
+          </a:fillRef>
+          <a:effectRef idx="0">
+            <a:schemeClr val="accent1"/>
+          </a:effectRef>
+          <a:fontRef idx="minor">
+            <a:schemeClr val="tx1"/>
+          </a:fontRef>
+        </p:style>
+      </p:cxnSp>
     </p:spTree>
     <p:extLst>
       <p:ext uri="{BB962C8B-B14F-4D97-AF65-F5344CB8AC3E}">
-        <p14:creationId xmlns:p14="http://schemas.microsoft.com/office/powerpoint/2010/main" val="1121700961"/>
+        <p14:creationId xmlns:p14="http://schemas.microsoft.com/office/powerpoint/2010/main" val="2399348406"/>
       </p:ext>
     </p:extLst>
   </p:cSld>
@@ -4311,10 +4352,10 @@
       </p:grpSpPr>
       <p:pic>
         <p:nvPicPr>
-          <p:cNvPr id="2" name="Imagem 1">
-            <a:extLst>
-              <a:ext uri="{FF2B5EF4-FFF2-40B4-BE49-F238E27FC236}">
-                <a16:creationId xmlns:a16="http://schemas.microsoft.com/office/drawing/2014/main" id="{3B97B676-171E-4FBB-A070-9CE32106C58A}"/>
+          <p:cNvPr id="4" name="Imagem 3">
+            <a:extLst>
+              <a:ext uri="{FF2B5EF4-FFF2-40B4-BE49-F238E27FC236}">
+                <a16:creationId xmlns:a16="http://schemas.microsoft.com/office/drawing/2014/main" id="{2B0E1C5E-1220-46CB-A461-B2D5781811AD}"/>
               </a:ext>
             </a:extLst>
           </p:cNvPr>
@@ -4324,196 +4365,25 @@
           <p:nvPr/>
         </p:nvPicPr>
         <p:blipFill>
-          <a:blip r:embed="rId2">
-            <a:extLst>
-              <a:ext uri="{28A0092B-C50C-407E-A947-70E740481C1C}">
-                <a14:useLocalDpi xmlns:a14="http://schemas.microsoft.com/office/drawing/2010/main" val="0"/>
-              </a:ext>
-            </a:extLst>
-          </a:blip>
+          <a:blip r:embed="rId2"/>
           <a:stretch>
             <a:fillRect/>
           </a:stretch>
         </p:blipFill>
         <p:spPr>
           <a:xfrm>
-            <a:off x="341044" y="927364"/>
-            <a:ext cx="5169144" cy="5117836"/>
+            <a:off x="3705225" y="990600"/>
+            <a:ext cx="4781550" cy="4876800"/>
           </a:xfrm>
           <a:prstGeom prst="rect">
             <a:avLst/>
           </a:prstGeom>
         </p:spPr>
       </p:pic>
-      <p:sp>
-        <p:nvSpPr>
-          <p:cNvPr id="3" name="Retângulo 2">
-            <a:extLst>
-              <a:ext uri="{FF2B5EF4-FFF2-40B4-BE49-F238E27FC236}">
-                <a16:creationId xmlns:a16="http://schemas.microsoft.com/office/drawing/2014/main" id="{841CBFCD-6762-4E22-8240-75BE239CBCE1}"/>
-              </a:ext>
-            </a:extLst>
-          </p:cNvPr>
-          <p:cNvSpPr/>
-          <p:nvPr/>
-        </p:nvSpPr>
-        <p:spPr>
-          <a:xfrm>
-            <a:off x="1168400" y="3691467"/>
-            <a:ext cx="1913467" cy="431800"/>
-          </a:xfrm>
-          <a:prstGeom prst="rect">
-            <a:avLst/>
-          </a:prstGeom>
-          <a:noFill/>
-          <a:ln w="38100">
-            <a:solidFill>
-              <a:srgbClr val="FF0000"/>
-            </a:solidFill>
-          </a:ln>
-        </p:spPr>
-        <p:style>
-          <a:lnRef idx="2">
-            <a:schemeClr val="accent1">
-              <a:shade val="50000"/>
-            </a:schemeClr>
-          </a:lnRef>
-          <a:fillRef idx="1">
-            <a:schemeClr val="accent1"/>
-          </a:fillRef>
-          <a:effectRef idx="0">
-            <a:schemeClr val="accent1"/>
-          </a:effectRef>
-          <a:fontRef idx="minor">
-            <a:schemeClr val="lt1"/>
-          </a:fontRef>
-        </p:style>
-        <p:txBody>
-          <a:bodyPr rot="0" spcFirstLastPara="0" vertOverflow="overflow" horzOverflow="overflow" vert="horz" wrap="square" lIns="91440" tIns="45720" rIns="91440" bIns="45720" numCol="1" spcCol="0" rtlCol="0" fromWordArt="0" anchor="ctr" anchorCtr="0" forceAA="0" compatLnSpc="1">
-            <a:prstTxWarp prst="textNoShape">
-              <a:avLst/>
-            </a:prstTxWarp>
-            <a:noAutofit/>
-          </a:bodyPr>
-          <a:lstStyle/>
-          <a:p>
-            <a:pPr algn="ctr"/>
-            <a:endParaRPr lang="pt-BR"/>
-          </a:p>
-        </p:txBody>
-      </p:sp>
-      <p:cxnSp>
-        <p:nvCxnSpPr>
-          <p:cNvPr id="5" name="Conector de Seta Reta 4">
-            <a:extLst>
-              <a:ext uri="{FF2B5EF4-FFF2-40B4-BE49-F238E27FC236}">
-                <a16:creationId xmlns:a16="http://schemas.microsoft.com/office/drawing/2014/main" id="{692BCA09-8FE6-4425-9865-65993E1205BA}"/>
-              </a:ext>
-            </a:extLst>
-          </p:cNvPr>
-          <p:cNvCxnSpPr/>
-          <p:nvPr/>
-        </p:nvCxnSpPr>
-        <p:spPr>
-          <a:xfrm flipH="1" flipV="1">
-            <a:off x="3378200" y="4038600"/>
-            <a:ext cx="3064933" cy="1041400"/>
-          </a:xfrm>
-          <a:prstGeom prst="straightConnector1">
-            <a:avLst/>
-          </a:prstGeom>
-          <a:ln w="38100">
-            <a:solidFill>
-              <a:srgbClr val="FF0000"/>
-            </a:solidFill>
-            <a:tailEnd type="triangle"/>
-          </a:ln>
-        </p:spPr>
-        <p:style>
-          <a:lnRef idx="1">
-            <a:schemeClr val="accent1"/>
-          </a:lnRef>
-          <a:fillRef idx="0">
-            <a:schemeClr val="accent1"/>
-          </a:fillRef>
-          <a:effectRef idx="0">
-            <a:schemeClr val="accent1"/>
-          </a:effectRef>
-          <a:fontRef idx="minor">
-            <a:schemeClr val="tx1"/>
-          </a:fontRef>
-        </p:style>
-      </p:cxnSp>
-      <p:sp>
-        <p:nvSpPr>
-          <p:cNvPr id="6" name="Elipse 5">
-            <a:extLst>
-              <a:ext uri="{FF2B5EF4-FFF2-40B4-BE49-F238E27FC236}">
-                <a16:creationId xmlns:a16="http://schemas.microsoft.com/office/drawing/2014/main" id="{A541971C-9BAF-4DDD-8167-4B9160B4EEC6}"/>
-              </a:ext>
-            </a:extLst>
-          </p:cNvPr>
-          <p:cNvSpPr/>
-          <p:nvPr/>
-        </p:nvSpPr>
-        <p:spPr>
-          <a:xfrm>
-            <a:off x="6337544" y="4555067"/>
-            <a:ext cx="2730256" cy="2082800"/>
-          </a:xfrm>
-          <a:prstGeom prst="ellipse">
-            <a:avLst/>
-          </a:prstGeom>
-          <a:solidFill>
-            <a:srgbClr val="FFFF00"/>
-          </a:solidFill>
-          <a:ln w="38100">
-            <a:solidFill>
-              <a:srgbClr val="FF0000"/>
-            </a:solidFill>
-          </a:ln>
-        </p:spPr>
-        <p:style>
-          <a:lnRef idx="2">
-            <a:schemeClr val="accent1">
-              <a:shade val="50000"/>
-            </a:schemeClr>
-          </a:lnRef>
-          <a:fillRef idx="1">
-            <a:schemeClr val="accent1"/>
-          </a:fillRef>
-          <a:effectRef idx="0">
-            <a:schemeClr val="accent1"/>
-          </a:effectRef>
-          <a:fontRef idx="minor">
-            <a:schemeClr val="lt1"/>
-          </a:fontRef>
-        </p:style>
-        <p:txBody>
-          <a:bodyPr rot="0" spcFirstLastPara="0" vertOverflow="overflow" horzOverflow="overflow" vert="horz" wrap="square" lIns="91440" tIns="45720" rIns="91440" bIns="45720" numCol="1" spcCol="0" rtlCol="0" fromWordArt="0" anchor="ctr" anchorCtr="0" forceAA="0" compatLnSpc="1">
-            <a:prstTxWarp prst="textNoShape">
-              <a:avLst/>
-            </a:prstTxWarp>
-            <a:noAutofit/>
-          </a:bodyPr>
-          <a:lstStyle/>
-          <a:p>
-            <a:pPr algn="ctr"/>
-            <a:r>
-              <a:rPr lang="pt-BR" dirty="0">
-                <a:solidFill>
-                  <a:schemeClr val="tx1"/>
-                </a:solidFill>
-              </a:rPr>
-              <a:t>Para arrumar o efeito colateral vamos excluir uma célula</a:t>
-            </a:r>
-          </a:p>
-        </p:txBody>
-      </p:sp>
     </p:spTree>
     <p:extLst>
       <p:ext uri="{BB962C8B-B14F-4D97-AF65-F5344CB8AC3E}">
-        <p14:creationId xmlns:p14="http://schemas.microsoft.com/office/powerpoint/2010/main" val="942231544"/>
+        <p14:creationId xmlns:p14="http://schemas.microsoft.com/office/powerpoint/2010/main" val="1916289122"/>
       </p:ext>
     </p:extLst>
   </p:cSld>
@@ -4540,6 +4410,895 @@
           <a:chExt cx="0" cy="0"/>
         </a:xfrm>
       </p:grpSpPr>
+      <p:sp>
+        <p:nvSpPr>
+          <p:cNvPr id="2" name="Título 1">
+            <a:extLst>
+              <a:ext uri="{FF2B5EF4-FFF2-40B4-BE49-F238E27FC236}">
+                <a16:creationId xmlns:a16="http://schemas.microsoft.com/office/drawing/2014/main" id="{E2320889-A3EB-4A85-B1C7-C9DA0504194D}"/>
+              </a:ext>
+            </a:extLst>
+          </p:cNvPr>
+          <p:cNvSpPr>
+            <a:spLocks noGrp="1"/>
+          </p:cNvSpPr>
+          <p:nvPr>
+            <p:ph type="ctrTitle"/>
+          </p:nvPr>
+        </p:nvSpPr>
+        <p:spPr/>
+        <p:txBody>
+          <a:bodyPr>
+            <a:normAutofit/>
+          </a:bodyPr>
+          <a:lstStyle/>
+          <a:p>
+            <a:r>
+              <a:rPr lang="pt-BR" dirty="0"/>
+              <a:t>HTML </a:t>
+            </a:r>
+            <a:r>
+              <a:rPr lang="pt-BR" dirty="0" err="1"/>
+              <a:t>Table</a:t>
+            </a:r>
+            <a:r>
+              <a:rPr lang="pt-BR" dirty="0"/>
+              <a:t> - </a:t>
+            </a:r>
+            <a:r>
+              <a:rPr lang="pt-BR" dirty="0" err="1"/>
+              <a:t>Colspan</a:t>
+            </a:r>
+            <a:endParaRPr lang="pt-BR" dirty="0"/>
+          </a:p>
+        </p:txBody>
+      </p:sp>
+      <p:sp>
+        <p:nvSpPr>
+          <p:cNvPr id="3" name="Subtítulo 2">
+            <a:extLst>
+              <a:ext uri="{FF2B5EF4-FFF2-40B4-BE49-F238E27FC236}">
+                <a16:creationId xmlns:a16="http://schemas.microsoft.com/office/drawing/2014/main" id="{B921187D-463F-4FAA-B2B4-34A89B8202B2}"/>
+              </a:ext>
+            </a:extLst>
+          </p:cNvPr>
+          <p:cNvSpPr>
+            <a:spLocks noGrp="1"/>
+          </p:cNvSpPr>
+          <p:nvPr>
+            <p:ph type="subTitle" idx="1"/>
+          </p:nvPr>
+        </p:nvSpPr>
+        <p:spPr/>
+        <p:txBody>
+          <a:bodyPr/>
+          <a:lstStyle/>
+          <a:p>
+            <a:endParaRPr lang="pt-BR"/>
+          </a:p>
+        </p:txBody>
+      </p:sp>
+    </p:spTree>
+    <p:extLst>
+      <p:ext uri="{BB962C8B-B14F-4D97-AF65-F5344CB8AC3E}">
+        <p14:creationId xmlns:p14="http://schemas.microsoft.com/office/powerpoint/2010/main" val="1628388197"/>
+      </p:ext>
+    </p:extLst>
+  </p:cSld>
+  <p:clrMapOvr>
+    <a:masterClrMapping/>
+  </p:clrMapOvr>
+</p:sld>
+</file>
+
+<file path=ppt/slides/slide15.xml><?xml version="1.0" encoding="utf-8"?>
+<p:sld xmlns:a="http://schemas.openxmlformats.org/drawingml/2006/main" xmlns:r="http://schemas.openxmlformats.org/officeDocument/2006/relationships" xmlns:p="http://schemas.openxmlformats.org/presentationml/2006/main">
+  <p:cSld>
+    <p:spTree>
+      <p:nvGrpSpPr>
+        <p:cNvPr id="1" name=""/>
+        <p:cNvGrpSpPr/>
+        <p:nvPr/>
+      </p:nvGrpSpPr>
+      <p:grpSpPr>
+        <a:xfrm>
+          <a:off x="0" y="0"/>
+          <a:ext cx="0" cy="0"/>
+          <a:chOff x="0" y="0"/>
+          <a:chExt cx="0" cy="0"/>
+        </a:xfrm>
+      </p:grpSpPr>
+      <p:pic>
+        <p:nvPicPr>
+          <p:cNvPr id="3" name="Imagem 2">
+            <a:extLst>
+              <a:ext uri="{FF2B5EF4-FFF2-40B4-BE49-F238E27FC236}">
+                <a16:creationId xmlns:a16="http://schemas.microsoft.com/office/drawing/2014/main" id="{3DA39D41-98A0-4ABD-A526-5BAB5C758DE7}"/>
+              </a:ext>
+            </a:extLst>
+          </p:cNvPr>
+          <p:cNvPicPr>
+            <a:picLocks noChangeAspect="1"/>
+          </p:cNvPicPr>
+          <p:nvPr/>
+        </p:nvPicPr>
+        <p:blipFill>
+          <a:blip r:embed="rId2">
+            <a:extLst>
+              <a:ext uri="{28A0092B-C50C-407E-A947-70E740481C1C}">
+                <a14:useLocalDpi xmlns:a14="http://schemas.microsoft.com/office/drawing/2010/main" val="0"/>
+              </a:ext>
+            </a:extLst>
+          </a:blip>
+          <a:stretch>
+            <a:fillRect/>
+          </a:stretch>
+        </p:blipFill>
+        <p:spPr>
+          <a:xfrm>
+            <a:off x="341044" y="927364"/>
+            <a:ext cx="5169144" cy="5117836"/>
+          </a:xfrm>
+          <a:prstGeom prst="rect">
+            <a:avLst/>
+          </a:prstGeom>
+        </p:spPr>
+      </p:pic>
+      <p:pic>
+        <p:nvPicPr>
+          <p:cNvPr id="5" name="Imagem 4">
+            <a:extLst>
+              <a:ext uri="{FF2B5EF4-FFF2-40B4-BE49-F238E27FC236}">
+                <a16:creationId xmlns:a16="http://schemas.microsoft.com/office/drawing/2014/main" id="{3298D32E-A8C3-486B-B3EC-898626F74354}"/>
+              </a:ext>
+            </a:extLst>
+          </p:cNvPr>
+          <p:cNvPicPr>
+            <a:picLocks noChangeAspect="1"/>
+          </p:cNvPicPr>
+          <p:nvPr/>
+        </p:nvPicPr>
+        <p:blipFill>
+          <a:blip r:embed="rId3">
+            <a:extLst>
+              <a:ext uri="{28A0092B-C50C-407E-A947-70E740481C1C}">
+                <a14:useLocalDpi xmlns:a14="http://schemas.microsoft.com/office/drawing/2010/main" val="0"/>
+              </a:ext>
+            </a:extLst>
+          </a:blip>
+          <a:stretch>
+            <a:fillRect/>
+          </a:stretch>
+        </p:blipFill>
+        <p:spPr>
+          <a:xfrm>
+            <a:off x="5935133" y="3946690"/>
+            <a:ext cx="6256867" cy="624236"/>
+          </a:xfrm>
+          <a:prstGeom prst="rect">
+            <a:avLst/>
+          </a:prstGeom>
+        </p:spPr>
+      </p:pic>
+      <p:sp>
+        <p:nvSpPr>
+          <p:cNvPr id="6" name="Seta: Dobrada para Cima 5">
+            <a:extLst>
+              <a:ext uri="{FF2B5EF4-FFF2-40B4-BE49-F238E27FC236}">
+                <a16:creationId xmlns:a16="http://schemas.microsoft.com/office/drawing/2014/main" id="{94ADAA02-9E89-4DC5-8C52-475107355060}"/>
+              </a:ext>
+            </a:extLst>
+          </p:cNvPr>
+          <p:cNvSpPr/>
+          <p:nvPr/>
+        </p:nvSpPr>
+        <p:spPr>
+          <a:xfrm rot="10800000" flipH="1">
+            <a:off x="1363133" y="2455332"/>
+            <a:ext cx="6874934" cy="1398223"/>
+          </a:xfrm>
+          <a:prstGeom prst="bentUpArrow">
+            <a:avLst/>
+          </a:prstGeom>
+          <a:noFill/>
+          <a:ln w="38100">
+            <a:solidFill>
+              <a:srgbClr val="FF0000"/>
+            </a:solidFill>
+          </a:ln>
+        </p:spPr>
+        <p:style>
+          <a:lnRef idx="2">
+            <a:schemeClr val="accent1">
+              <a:shade val="50000"/>
+            </a:schemeClr>
+          </a:lnRef>
+          <a:fillRef idx="1">
+            <a:schemeClr val="accent1"/>
+          </a:fillRef>
+          <a:effectRef idx="0">
+            <a:schemeClr val="accent1"/>
+          </a:effectRef>
+          <a:fontRef idx="minor">
+            <a:schemeClr val="lt1"/>
+          </a:fontRef>
+        </p:style>
+        <p:txBody>
+          <a:bodyPr rot="0" spcFirstLastPara="0" vertOverflow="overflow" horzOverflow="overflow" vert="horz" wrap="square" lIns="91440" tIns="45720" rIns="91440" bIns="45720" numCol="1" spcCol="0" rtlCol="0" fromWordArt="0" anchor="ctr" anchorCtr="0" forceAA="0" compatLnSpc="1">
+            <a:prstTxWarp prst="textNoShape">
+              <a:avLst/>
+            </a:prstTxWarp>
+            <a:noAutofit/>
+          </a:bodyPr>
+          <a:lstStyle/>
+          <a:p>
+            <a:pPr algn="ctr"/>
+            <a:endParaRPr lang="pt-BR"/>
+          </a:p>
+        </p:txBody>
+      </p:sp>
+      <p:cxnSp>
+        <p:nvCxnSpPr>
+          <p:cNvPr id="8" name="Conector de Seta Reta 7">
+            <a:extLst>
+              <a:ext uri="{FF2B5EF4-FFF2-40B4-BE49-F238E27FC236}">
+                <a16:creationId xmlns:a16="http://schemas.microsoft.com/office/drawing/2014/main" id="{6F16A848-2A6F-48C1-ACCC-C0C28269A983}"/>
+              </a:ext>
+            </a:extLst>
+          </p:cNvPr>
+          <p:cNvCxnSpPr/>
+          <p:nvPr/>
+        </p:nvCxnSpPr>
+        <p:spPr>
+          <a:xfrm flipH="1" flipV="1">
+            <a:off x="8026400" y="4428067"/>
+            <a:ext cx="127000" cy="821266"/>
+          </a:xfrm>
+          <a:prstGeom prst="straightConnector1">
+            <a:avLst/>
+          </a:prstGeom>
+          <a:ln w="38100">
+            <a:solidFill>
+              <a:srgbClr val="FF0000"/>
+            </a:solidFill>
+            <a:tailEnd type="triangle"/>
+          </a:ln>
+        </p:spPr>
+        <p:style>
+          <a:lnRef idx="1">
+            <a:schemeClr val="accent1"/>
+          </a:lnRef>
+          <a:fillRef idx="0">
+            <a:schemeClr val="accent1"/>
+          </a:fillRef>
+          <a:effectRef idx="0">
+            <a:schemeClr val="accent1"/>
+          </a:effectRef>
+          <a:fontRef idx="minor">
+            <a:schemeClr val="tx1"/>
+          </a:fontRef>
+        </p:style>
+      </p:cxnSp>
+      <p:sp>
+        <p:nvSpPr>
+          <p:cNvPr id="9" name="Retângulo 8">
+            <a:extLst>
+              <a:ext uri="{FF2B5EF4-FFF2-40B4-BE49-F238E27FC236}">
+                <a16:creationId xmlns:a16="http://schemas.microsoft.com/office/drawing/2014/main" id="{2281A1E4-7922-42C1-8DFF-A7DBEC98BCF0}"/>
+              </a:ext>
+            </a:extLst>
+          </p:cNvPr>
+          <p:cNvSpPr/>
+          <p:nvPr/>
+        </p:nvSpPr>
+        <p:spPr>
+          <a:xfrm>
+            <a:off x="6681814" y="5249333"/>
+            <a:ext cx="3556000" cy="966892"/>
+          </a:xfrm>
+          <a:prstGeom prst="rect">
+            <a:avLst/>
+          </a:prstGeom>
+          <a:noFill/>
+          <a:ln w="38100">
+            <a:solidFill>
+              <a:srgbClr val="FF0000"/>
+            </a:solidFill>
+          </a:ln>
+        </p:spPr>
+        <p:style>
+          <a:lnRef idx="2">
+            <a:schemeClr val="accent1">
+              <a:shade val="50000"/>
+            </a:schemeClr>
+          </a:lnRef>
+          <a:fillRef idx="1">
+            <a:schemeClr val="accent1"/>
+          </a:fillRef>
+          <a:effectRef idx="0">
+            <a:schemeClr val="accent1"/>
+          </a:effectRef>
+          <a:fontRef idx="minor">
+            <a:schemeClr val="lt1"/>
+          </a:fontRef>
+        </p:style>
+        <p:txBody>
+          <a:bodyPr rot="0" spcFirstLastPara="0" vertOverflow="overflow" horzOverflow="overflow" vert="horz" wrap="square" lIns="91440" tIns="45720" rIns="91440" bIns="45720" numCol="1" spcCol="0" rtlCol="0" fromWordArt="0" anchor="ctr" anchorCtr="0" forceAA="0" compatLnSpc="1">
+            <a:prstTxWarp prst="textNoShape">
+              <a:avLst/>
+            </a:prstTxWarp>
+            <a:noAutofit/>
+          </a:bodyPr>
+          <a:lstStyle/>
+          <a:p>
+            <a:pPr algn="ctr"/>
+            <a:r>
+              <a:rPr lang="pt-BR" dirty="0">
+                <a:solidFill>
+                  <a:schemeClr val="tx1"/>
+                </a:solidFill>
+              </a:rPr>
+              <a:t>Inserir o atributo </a:t>
+            </a:r>
+          </a:p>
+          <a:p>
+            <a:pPr algn="ctr"/>
+            <a:r>
+              <a:rPr lang="pt-BR" sz="3600" dirty="0" err="1">
+                <a:solidFill>
+                  <a:schemeClr val="tx1"/>
+                </a:solidFill>
+              </a:rPr>
+              <a:t>colspan</a:t>
+            </a:r>
+            <a:r>
+              <a:rPr lang="pt-BR" sz="3600" dirty="0">
+                <a:solidFill>
+                  <a:schemeClr val="tx1"/>
+                </a:solidFill>
+              </a:rPr>
+              <a:t>=“2”</a:t>
+            </a:r>
+          </a:p>
+        </p:txBody>
+      </p:sp>
+    </p:spTree>
+    <p:extLst>
+      <p:ext uri="{BB962C8B-B14F-4D97-AF65-F5344CB8AC3E}">
+        <p14:creationId xmlns:p14="http://schemas.microsoft.com/office/powerpoint/2010/main" val="2816553980"/>
+      </p:ext>
+    </p:extLst>
+  </p:cSld>
+  <p:clrMapOvr>
+    <a:masterClrMapping/>
+  </p:clrMapOvr>
+</p:sld>
+</file>
+
+<file path=ppt/slides/slide16.xml><?xml version="1.0" encoding="utf-8"?>
+<p:sld xmlns:a="http://schemas.openxmlformats.org/drawingml/2006/main" xmlns:r="http://schemas.openxmlformats.org/officeDocument/2006/relationships" xmlns:p="http://schemas.openxmlformats.org/presentationml/2006/main">
+  <p:cSld>
+    <p:spTree>
+      <p:nvGrpSpPr>
+        <p:cNvPr id="1" name=""/>
+        <p:cNvGrpSpPr/>
+        <p:nvPr/>
+      </p:nvGrpSpPr>
+      <p:grpSpPr>
+        <a:xfrm>
+          <a:off x="0" y="0"/>
+          <a:ext cx="0" cy="0"/>
+          <a:chOff x="0" y="0"/>
+          <a:chExt cx="0" cy="0"/>
+        </a:xfrm>
+      </p:grpSpPr>
+      <p:pic>
+        <p:nvPicPr>
+          <p:cNvPr id="2" name="Imagem 1">
+            <a:extLst>
+              <a:ext uri="{FF2B5EF4-FFF2-40B4-BE49-F238E27FC236}">
+                <a16:creationId xmlns:a16="http://schemas.microsoft.com/office/drawing/2014/main" id="{1D07F105-4D76-41B7-A5AB-2B1FCA816070}"/>
+              </a:ext>
+            </a:extLst>
+          </p:cNvPr>
+          <p:cNvPicPr>
+            <a:picLocks noChangeAspect="1"/>
+          </p:cNvPicPr>
+          <p:nvPr/>
+        </p:nvPicPr>
+        <p:blipFill>
+          <a:blip r:embed="rId2"/>
+          <a:stretch>
+            <a:fillRect/>
+          </a:stretch>
+        </p:blipFill>
+        <p:spPr>
+          <a:xfrm>
+            <a:off x="3705225" y="990600"/>
+            <a:ext cx="4781550" cy="4876800"/>
+          </a:xfrm>
+          <a:prstGeom prst="rect">
+            <a:avLst/>
+          </a:prstGeom>
+        </p:spPr>
+      </p:pic>
+      <p:cxnSp>
+        <p:nvCxnSpPr>
+          <p:cNvPr id="4" name="Conector de Seta Reta 3">
+            <a:extLst>
+              <a:ext uri="{FF2B5EF4-FFF2-40B4-BE49-F238E27FC236}">
+                <a16:creationId xmlns:a16="http://schemas.microsoft.com/office/drawing/2014/main" id="{A94AD6DC-F981-4083-BE74-8047836743D0}"/>
+              </a:ext>
+            </a:extLst>
+          </p:cNvPr>
+          <p:cNvCxnSpPr/>
+          <p:nvPr/>
+        </p:nvCxnSpPr>
+        <p:spPr>
+          <a:xfrm flipV="1">
+            <a:off x="2658533" y="3488267"/>
+            <a:ext cx="1176867" cy="541866"/>
+          </a:xfrm>
+          <a:prstGeom prst="straightConnector1">
+            <a:avLst/>
+          </a:prstGeom>
+          <a:ln w="38100">
+            <a:solidFill>
+              <a:srgbClr val="FF0000"/>
+            </a:solidFill>
+            <a:tailEnd type="triangle"/>
+          </a:ln>
+        </p:spPr>
+        <p:style>
+          <a:lnRef idx="1">
+            <a:schemeClr val="accent1"/>
+          </a:lnRef>
+          <a:fillRef idx="0">
+            <a:schemeClr val="accent1"/>
+          </a:fillRef>
+          <a:effectRef idx="0">
+            <a:schemeClr val="accent1"/>
+          </a:effectRef>
+          <a:fontRef idx="minor">
+            <a:schemeClr val="tx1"/>
+          </a:fontRef>
+        </p:style>
+      </p:cxnSp>
+      <p:sp>
+        <p:nvSpPr>
+          <p:cNvPr id="5" name="Elipse 4">
+            <a:extLst>
+              <a:ext uri="{FF2B5EF4-FFF2-40B4-BE49-F238E27FC236}">
+                <a16:creationId xmlns:a16="http://schemas.microsoft.com/office/drawing/2014/main" id="{9EE113BF-D914-4A76-B0C4-8C360921EAE6}"/>
+              </a:ext>
+            </a:extLst>
+          </p:cNvPr>
+          <p:cNvSpPr/>
+          <p:nvPr/>
+        </p:nvSpPr>
+        <p:spPr>
+          <a:xfrm>
+            <a:off x="797136" y="3589867"/>
+            <a:ext cx="2579794" cy="1837266"/>
+          </a:xfrm>
+          <a:prstGeom prst="ellipse">
+            <a:avLst/>
+          </a:prstGeom>
+          <a:solidFill>
+            <a:srgbClr val="FFFF00"/>
+          </a:solidFill>
+          <a:ln w="38100">
+            <a:solidFill>
+              <a:srgbClr val="FF0000"/>
+            </a:solidFill>
+          </a:ln>
+        </p:spPr>
+        <p:style>
+          <a:lnRef idx="2">
+            <a:schemeClr val="accent1">
+              <a:shade val="50000"/>
+            </a:schemeClr>
+          </a:lnRef>
+          <a:fillRef idx="1">
+            <a:schemeClr val="accent1"/>
+          </a:fillRef>
+          <a:effectRef idx="0">
+            <a:schemeClr val="accent1"/>
+          </a:effectRef>
+          <a:fontRef idx="minor">
+            <a:schemeClr val="lt1"/>
+          </a:fontRef>
+        </p:style>
+        <p:txBody>
+          <a:bodyPr rot="0" spcFirstLastPara="0" vertOverflow="overflow" horzOverflow="overflow" vert="horz" wrap="square" lIns="91440" tIns="45720" rIns="91440" bIns="45720" numCol="1" spcCol="0" rtlCol="0" fromWordArt="0" anchor="ctr" anchorCtr="0" forceAA="0" compatLnSpc="1">
+            <a:prstTxWarp prst="textNoShape">
+              <a:avLst/>
+            </a:prstTxWarp>
+            <a:noAutofit/>
+          </a:bodyPr>
+          <a:lstStyle/>
+          <a:p>
+            <a:pPr algn="ctr"/>
+            <a:r>
+              <a:rPr lang="pt-BR" dirty="0">
+                <a:solidFill>
+                  <a:schemeClr val="tx1"/>
+                </a:solidFill>
+              </a:rPr>
+              <a:t>A célula com o texto Guilherme agora ocupa o espaço de 2 colunas</a:t>
+            </a:r>
+          </a:p>
+        </p:txBody>
+      </p:sp>
+      <p:cxnSp>
+        <p:nvCxnSpPr>
+          <p:cNvPr id="7" name="Conector de Seta Reta 6">
+            <a:extLst>
+              <a:ext uri="{FF2B5EF4-FFF2-40B4-BE49-F238E27FC236}">
+                <a16:creationId xmlns:a16="http://schemas.microsoft.com/office/drawing/2014/main" id="{B94CC7B5-EBEE-4506-8217-061B23A6CEB2}"/>
+              </a:ext>
+            </a:extLst>
+          </p:cNvPr>
+          <p:cNvCxnSpPr/>
+          <p:nvPr/>
+        </p:nvCxnSpPr>
+        <p:spPr>
+          <a:xfrm flipH="1" flipV="1">
+            <a:off x="6688667" y="3429000"/>
+            <a:ext cx="2286000" cy="702733"/>
+          </a:xfrm>
+          <a:prstGeom prst="straightConnector1">
+            <a:avLst/>
+          </a:prstGeom>
+          <a:ln w="38100">
+            <a:solidFill>
+              <a:srgbClr val="FF0000"/>
+            </a:solidFill>
+            <a:tailEnd type="triangle"/>
+          </a:ln>
+        </p:spPr>
+        <p:style>
+          <a:lnRef idx="1">
+            <a:schemeClr val="accent1"/>
+          </a:lnRef>
+          <a:fillRef idx="0">
+            <a:schemeClr val="accent1"/>
+          </a:fillRef>
+          <a:effectRef idx="0">
+            <a:schemeClr val="accent1"/>
+          </a:effectRef>
+          <a:fontRef idx="minor">
+            <a:schemeClr val="tx1"/>
+          </a:fontRef>
+        </p:style>
+      </p:cxnSp>
+      <p:sp>
+        <p:nvSpPr>
+          <p:cNvPr id="8" name="Elipse 7">
+            <a:extLst>
+              <a:ext uri="{FF2B5EF4-FFF2-40B4-BE49-F238E27FC236}">
+                <a16:creationId xmlns:a16="http://schemas.microsoft.com/office/drawing/2014/main" id="{C278320F-0816-47A9-A160-E6D65062EA2C}"/>
+              </a:ext>
+            </a:extLst>
+          </p:cNvPr>
+          <p:cNvSpPr/>
+          <p:nvPr/>
+        </p:nvSpPr>
+        <p:spPr>
+          <a:xfrm>
+            <a:off x="8815070" y="3810000"/>
+            <a:ext cx="2286000" cy="1388533"/>
+          </a:xfrm>
+          <a:prstGeom prst="ellipse">
+            <a:avLst/>
+          </a:prstGeom>
+          <a:solidFill>
+            <a:srgbClr val="FFFF00"/>
+          </a:solidFill>
+          <a:ln w="38100">
+            <a:solidFill>
+              <a:srgbClr val="FF0000"/>
+            </a:solidFill>
+          </a:ln>
+        </p:spPr>
+        <p:style>
+          <a:lnRef idx="2">
+            <a:schemeClr val="accent1">
+              <a:shade val="50000"/>
+            </a:schemeClr>
+          </a:lnRef>
+          <a:fillRef idx="1">
+            <a:schemeClr val="accent1"/>
+          </a:fillRef>
+          <a:effectRef idx="0">
+            <a:schemeClr val="accent1"/>
+          </a:effectRef>
+          <a:fontRef idx="minor">
+            <a:schemeClr val="lt1"/>
+          </a:fontRef>
+        </p:style>
+        <p:txBody>
+          <a:bodyPr rot="0" spcFirstLastPara="0" vertOverflow="overflow" horzOverflow="overflow" vert="horz" wrap="square" lIns="91440" tIns="45720" rIns="91440" bIns="45720" numCol="1" spcCol="0" rtlCol="0" fromWordArt="0" anchor="ctr" anchorCtr="0" forceAA="0" compatLnSpc="1">
+            <a:prstTxWarp prst="textNoShape">
+              <a:avLst/>
+            </a:prstTxWarp>
+            <a:noAutofit/>
+          </a:bodyPr>
+          <a:lstStyle/>
+          <a:p>
+            <a:pPr algn="ctr"/>
+            <a:r>
+              <a:rPr lang="pt-BR" dirty="0">
+                <a:solidFill>
+                  <a:schemeClr val="tx1"/>
+                </a:solidFill>
+              </a:rPr>
+              <a:t>Efeito Colateral</a:t>
+            </a:r>
+          </a:p>
+        </p:txBody>
+      </p:sp>
+    </p:spTree>
+    <p:extLst>
+      <p:ext uri="{BB962C8B-B14F-4D97-AF65-F5344CB8AC3E}">
+        <p14:creationId xmlns:p14="http://schemas.microsoft.com/office/powerpoint/2010/main" val="1121700961"/>
+      </p:ext>
+    </p:extLst>
+  </p:cSld>
+  <p:clrMapOvr>
+    <a:masterClrMapping/>
+  </p:clrMapOvr>
+</p:sld>
+</file>
+
+<file path=ppt/slides/slide17.xml><?xml version="1.0" encoding="utf-8"?>
+<p:sld xmlns:a="http://schemas.openxmlformats.org/drawingml/2006/main" xmlns:r="http://schemas.openxmlformats.org/officeDocument/2006/relationships" xmlns:p="http://schemas.openxmlformats.org/presentationml/2006/main">
+  <p:cSld>
+    <p:spTree>
+      <p:nvGrpSpPr>
+        <p:cNvPr id="1" name=""/>
+        <p:cNvGrpSpPr/>
+        <p:nvPr/>
+      </p:nvGrpSpPr>
+      <p:grpSpPr>
+        <a:xfrm>
+          <a:off x="0" y="0"/>
+          <a:ext cx="0" cy="0"/>
+          <a:chOff x="0" y="0"/>
+          <a:chExt cx="0" cy="0"/>
+        </a:xfrm>
+      </p:grpSpPr>
+      <p:pic>
+        <p:nvPicPr>
+          <p:cNvPr id="2" name="Imagem 1">
+            <a:extLst>
+              <a:ext uri="{FF2B5EF4-FFF2-40B4-BE49-F238E27FC236}">
+                <a16:creationId xmlns:a16="http://schemas.microsoft.com/office/drawing/2014/main" id="{3B97B676-171E-4FBB-A070-9CE32106C58A}"/>
+              </a:ext>
+            </a:extLst>
+          </p:cNvPr>
+          <p:cNvPicPr>
+            <a:picLocks noChangeAspect="1"/>
+          </p:cNvPicPr>
+          <p:nvPr/>
+        </p:nvPicPr>
+        <p:blipFill>
+          <a:blip r:embed="rId2">
+            <a:extLst>
+              <a:ext uri="{28A0092B-C50C-407E-A947-70E740481C1C}">
+                <a14:useLocalDpi xmlns:a14="http://schemas.microsoft.com/office/drawing/2010/main" val="0"/>
+              </a:ext>
+            </a:extLst>
+          </a:blip>
+          <a:stretch>
+            <a:fillRect/>
+          </a:stretch>
+        </p:blipFill>
+        <p:spPr>
+          <a:xfrm>
+            <a:off x="341044" y="927364"/>
+            <a:ext cx="5169144" cy="5117836"/>
+          </a:xfrm>
+          <a:prstGeom prst="rect">
+            <a:avLst/>
+          </a:prstGeom>
+        </p:spPr>
+      </p:pic>
+      <p:sp>
+        <p:nvSpPr>
+          <p:cNvPr id="3" name="Retângulo 2">
+            <a:extLst>
+              <a:ext uri="{FF2B5EF4-FFF2-40B4-BE49-F238E27FC236}">
+                <a16:creationId xmlns:a16="http://schemas.microsoft.com/office/drawing/2014/main" id="{841CBFCD-6762-4E22-8240-75BE239CBCE1}"/>
+              </a:ext>
+            </a:extLst>
+          </p:cNvPr>
+          <p:cNvSpPr/>
+          <p:nvPr/>
+        </p:nvSpPr>
+        <p:spPr>
+          <a:xfrm>
+            <a:off x="1168400" y="3691467"/>
+            <a:ext cx="1913467" cy="431800"/>
+          </a:xfrm>
+          <a:prstGeom prst="rect">
+            <a:avLst/>
+          </a:prstGeom>
+          <a:noFill/>
+          <a:ln w="38100">
+            <a:solidFill>
+              <a:srgbClr val="FF0000"/>
+            </a:solidFill>
+          </a:ln>
+        </p:spPr>
+        <p:style>
+          <a:lnRef idx="2">
+            <a:schemeClr val="accent1">
+              <a:shade val="50000"/>
+            </a:schemeClr>
+          </a:lnRef>
+          <a:fillRef idx="1">
+            <a:schemeClr val="accent1"/>
+          </a:fillRef>
+          <a:effectRef idx="0">
+            <a:schemeClr val="accent1"/>
+          </a:effectRef>
+          <a:fontRef idx="minor">
+            <a:schemeClr val="lt1"/>
+          </a:fontRef>
+        </p:style>
+        <p:txBody>
+          <a:bodyPr rot="0" spcFirstLastPara="0" vertOverflow="overflow" horzOverflow="overflow" vert="horz" wrap="square" lIns="91440" tIns="45720" rIns="91440" bIns="45720" numCol="1" spcCol="0" rtlCol="0" fromWordArt="0" anchor="ctr" anchorCtr="0" forceAA="0" compatLnSpc="1">
+            <a:prstTxWarp prst="textNoShape">
+              <a:avLst/>
+            </a:prstTxWarp>
+            <a:noAutofit/>
+          </a:bodyPr>
+          <a:lstStyle/>
+          <a:p>
+            <a:pPr algn="ctr"/>
+            <a:endParaRPr lang="pt-BR"/>
+          </a:p>
+        </p:txBody>
+      </p:sp>
+      <p:cxnSp>
+        <p:nvCxnSpPr>
+          <p:cNvPr id="5" name="Conector de Seta Reta 4">
+            <a:extLst>
+              <a:ext uri="{FF2B5EF4-FFF2-40B4-BE49-F238E27FC236}">
+                <a16:creationId xmlns:a16="http://schemas.microsoft.com/office/drawing/2014/main" id="{692BCA09-8FE6-4425-9865-65993E1205BA}"/>
+              </a:ext>
+            </a:extLst>
+          </p:cNvPr>
+          <p:cNvCxnSpPr/>
+          <p:nvPr/>
+        </p:nvCxnSpPr>
+        <p:spPr>
+          <a:xfrm flipH="1" flipV="1">
+            <a:off x="3378200" y="4038600"/>
+            <a:ext cx="3064933" cy="1041400"/>
+          </a:xfrm>
+          <a:prstGeom prst="straightConnector1">
+            <a:avLst/>
+          </a:prstGeom>
+          <a:ln w="38100">
+            <a:solidFill>
+              <a:srgbClr val="FF0000"/>
+            </a:solidFill>
+            <a:tailEnd type="triangle"/>
+          </a:ln>
+        </p:spPr>
+        <p:style>
+          <a:lnRef idx="1">
+            <a:schemeClr val="accent1"/>
+          </a:lnRef>
+          <a:fillRef idx="0">
+            <a:schemeClr val="accent1"/>
+          </a:fillRef>
+          <a:effectRef idx="0">
+            <a:schemeClr val="accent1"/>
+          </a:effectRef>
+          <a:fontRef idx="minor">
+            <a:schemeClr val="tx1"/>
+          </a:fontRef>
+        </p:style>
+      </p:cxnSp>
+      <p:sp>
+        <p:nvSpPr>
+          <p:cNvPr id="6" name="Elipse 5">
+            <a:extLst>
+              <a:ext uri="{FF2B5EF4-FFF2-40B4-BE49-F238E27FC236}">
+                <a16:creationId xmlns:a16="http://schemas.microsoft.com/office/drawing/2014/main" id="{A541971C-9BAF-4DDD-8167-4B9160B4EEC6}"/>
+              </a:ext>
+            </a:extLst>
+          </p:cNvPr>
+          <p:cNvSpPr/>
+          <p:nvPr/>
+        </p:nvSpPr>
+        <p:spPr>
+          <a:xfrm>
+            <a:off x="6337544" y="4555067"/>
+            <a:ext cx="2730256" cy="2082800"/>
+          </a:xfrm>
+          <a:prstGeom prst="ellipse">
+            <a:avLst/>
+          </a:prstGeom>
+          <a:solidFill>
+            <a:srgbClr val="FFFF00"/>
+          </a:solidFill>
+          <a:ln w="38100">
+            <a:solidFill>
+              <a:srgbClr val="FF0000"/>
+            </a:solidFill>
+          </a:ln>
+        </p:spPr>
+        <p:style>
+          <a:lnRef idx="2">
+            <a:schemeClr val="accent1">
+              <a:shade val="50000"/>
+            </a:schemeClr>
+          </a:lnRef>
+          <a:fillRef idx="1">
+            <a:schemeClr val="accent1"/>
+          </a:fillRef>
+          <a:effectRef idx="0">
+            <a:schemeClr val="accent1"/>
+          </a:effectRef>
+          <a:fontRef idx="minor">
+            <a:schemeClr val="lt1"/>
+          </a:fontRef>
+        </p:style>
+        <p:txBody>
+          <a:bodyPr rot="0" spcFirstLastPara="0" vertOverflow="overflow" horzOverflow="overflow" vert="horz" wrap="square" lIns="91440" tIns="45720" rIns="91440" bIns="45720" numCol="1" spcCol="0" rtlCol="0" fromWordArt="0" anchor="ctr" anchorCtr="0" forceAA="0" compatLnSpc="1">
+            <a:prstTxWarp prst="textNoShape">
+              <a:avLst/>
+            </a:prstTxWarp>
+            <a:noAutofit/>
+          </a:bodyPr>
+          <a:lstStyle/>
+          <a:p>
+            <a:pPr algn="ctr"/>
+            <a:r>
+              <a:rPr lang="pt-BR" dirty="0">
+                <a:solidFill>
+                  <a:schemeClr val="tx1"/>
+                </a:solidFill>
+              </a:rPr>
+              <a:t>Para arrumar o efeito colateral vamos excluir uma célula</a:t>
+            </a:r>
+          </a:p>
+        </p:txBody>
+      </p:sp>
+    </p:spTree>
+    <p:extLst>
+      <p:ext uri="{BB962C8B-B14F-4D97-AF65-F5344CB8AC3E}">
+        <p14:creationId xmlns:p14="http://schemas.microsoft.com/office/powerpoint/2010/main" val="942231544"/>
+      </p:ext>
+    </p:extLst>
+  </p:cSld>
+  <p:clrMapOvr>
+    <a:masterClrMapping/>
+  </p:clrMapOvr>
+</p:sld>
+</file>
+
+<file path=ppt/slides/slide18.xml><?xml version="1.0" encoding="utf-8"?>
+<p:sld xmlns:a="http://schemas.openxmlformats.org/drawingml/2006/main" xmlns:r="http://schemas.openxmlformats.org/officeDocument/2006/relationships" xmlns:p="http://schemas.openxmlformats.org/presentationml/2006/main">
+  <p:cSld>
+    <p:spTree>
+      <p:nvGrpSpPr>
+        <p:cNvPr id="1" name=""/>
+        <p:cNvGrpSpPr/>
+        <p:nvPr/>
+      </p:nvGrpSpPr>
+      <p:grpSpPr>
+        <a:xfrm>
+          <a:off x="0" y="0"/>
+          <a:ext cx="0" cy="0"/>
+          <a:chOff x="0" y="0"/>
+          <a:chExt cx="0" cy="0"/>
+        </a:xfrm>
+      </p:grpSpPr>
       <p:pic>
         <p:nvPicPr>
           <p:cNvPr id="2" name="Imagem 1">
@@ -4714,7 +5473,7 @@
 </p:sld>
 </file>
 
-<file path=ppt/slides/slide15.xml><?xml version="1.0" encoding="utf-8"?>
+<file path=ppt/slides/slide19.xml><?xml version="1.0" encoding="utf-8"?>
 <p:sld xmlns:a="http://schemas.openxmlformats.org/drawingml/2006/main" xmlns:r="http://schemas.openxmlformats.org/officeDocument/2006/relationships" xmlns:p="http://schemas.openxmlformats.org/presentationml/2006/main">
   <p:cSld>
     <p:spTree>
@@ -5247,7 +6006,73 @@
 </p:sld>
 </file>
 
-<file path=ppt/slides/slide16.xml><?xml version="1.0" encoding="utf-8"?>
+<file path=ppt/slides/slide2.xml><?xml version="1.0" encoding="utf-8"?>
+<p:sld xmlns:a="http://schemas.openxmlformats.org/drawingml/2006/main" xmlns:r="http://schemas.openxmlformats.org/officeDocument/2006/relationships" xmlns:p="http://schemas.openxmlformats.org/presentationml/2006/main">
+  <p:cSld>
+    <p:spTree>
+      <p:nvGrpSpPr>
+        <p:cNvPr id="1" name=""/>
+        <p:cNvGrpSpPr/>
+        <p:nvPr/>
+      </p:nvGrpSpPr>
+      <p:grpSpPr>
+        <a:xfrm>
+          <a:off x="0" y="0"/>
+          <a:ext cx="0" cy="0"/>
+          <a:chOff x="0" y="0"/>
+          <a:chExt cx="0" cy="0"/>
+        </a:xfrm>
+      </p:grpSpPr>
+      <p:pic>
+        <p:nvPicPr>
+          <p:cNvPr id="3" name="Imagem 2">
+            <a:extLst>
+              <a:ext uri="{FF2B5EF4-FFF2-40B4-BE49-F238E27FC236}">
+                <a16:creationId xmlns:a16="http://schemas.microsoft.com/office/drawing/2014/main" id="{14D70AA7-18F6-4182-A3CE-9F2FB6A7AECF}"/>
+              </a:ext>
+            </a:extLst>
+          </p:cNvPr>
+          <p:cNvPicPr>
+            <a:picLocks noChangeAspect="1"/>
+          </p:cNvPicPr>
+          <p:nvPr/>
+        </p:nvPicPr>
+        <p:blipFill>
+          <a:blip r:embed="rId2">
+            <a:extLst>
+              <a:ext uri="{28A0092B-C50C-407E-A947-70E740481C1C}">
+                <a14:useLocalDpi xmlns:a14="http://schemas.microsoft.com/office/drawing/2010/main" val="0"/>
+              </a:ext>
+            </a:extLst>
+          </a:blip>
+          <a:stretch>
+            <a:fillRect/>
+          </a:stretch>
+        </p:blipFill>
+        <p:spPr>
+          <a:xfrm>
+            <a:off x="632269" y="904618"/>
+            <a:ext cx="10927462" cy="5048764"/>
+          </a:xfrm>
+          <a:prstGeom prst="rect">
+            <a:avLst/>
+          </a:prstGeom>
+        </p:spPr>
+      </p:pic>
+    </p:spTree>
+    <p:extLst>
+      <p:ext uri="{BB962C8B-B14F-4D97-AF65-F5344CB8AC3E}">
+        <p14:creationId xmlns:p14="http://schemas.microsoft.com/office/powerpoint/2010/main" val="888297528"/>
+      </p:ext>
+    </p:extLst>
+  </p:cSld>
+  <p:clrMapOvr>
+    <a:masterClrMapping/>
+  </p:clrMapOvr>
+</p:sld>
+</file>
+
+<file path=ppt/slides/slide20.xml><?xml version="1.0" encoding="utf-8"?>
 <p:sld xmlns:a="http://schemas.openxmlformats.org/drawingml/2006/main" xmlns:r="http://schemas.openxmlformats.org/officeDocument/2006/relationships" xmlns:p="http://schemas.openxmlformats.org/presentationml/2006/main">
   <p:cSld>
     <p:spTree>
@@ -5415,7 +6240,7 @@
 </p:sld>
 </file>
 
-<file path=ppt/slides/slide17.xml><?xml version="1.0" encoding="utf-8"?>
+<file path=ppt/slides/slide21.xml><?xml version="1.0" encoding="utf-8"?>
 <p:sld xmlns:a="http://schemas.openxmlformats.org/drawingml/2006/main" xmlns:r="http://schemas.openxmlformats.org/officeDocument/2006/relationships" xmlns:p="http://schemas.openxmlformats.org/presentationml/2006/main">
   <p:cSld>
     <p:spTree>
@@ -5948,837 +6773,6 @@
 </p:sld>
 </file>
 
-<file path=ppt/slides/slide18.xml><?xml version="1.0" encoding="utf-8"?>
-<p:sld xmlns:a="http://schemas.openxmlformats.org/drawingml/2006/main" xmlns:r="http://schemas.openxmlformats.org/officeDocument/2006/relationships" xmlns:p="http://schemas.openxmlformats.org/presentationml/2006/main">
-  <p:cSld>
-    <p:spTree>
-      <p:nvGrpSpPr>
-        <p:cNvPr id="1" name=""/>
-        <p:cNvGrpSpPr/>
-        <p:nvPr/>
-      </p:nvGrpSpPr>
-      <p:grpSpPr>
-        <a:xfrm>
-          <a:off x="0" y="0"/>
-          <a:ext cx="0" cy="0"/>
-          <a:chOff x="0" y="0"/>
-          <a:chExt cx="0" cy="0"/>
-        </a:xfrm>
-      </p:grpSpPr>
-      <p:pic>
-        <p:nvPicPr>
-          <p:cNvPr id="3" name="Imagem 2">
-            <a:extLst>
-              <a:ext uri="{FF2B5EF4-FFF2-40B4-BE49-F238E27FC236}">
-                <a16:creationId xmlns:a16="http://schemas.microsoft.com/office/drawing/2014/main" id="{2572F7F0-C9CD-4307-B47D-D143A2742827}"/>
-              </a:ext>
-            </a:extLst>
-          </p:cNvPr>
-          <p:cNvPicPr>
-            <a:picLocks noChangeAspect="1"/>
-          </p:cNvPicPr>
-          <p:nvPr/>
-        </p:nvPicPr>
-        <p:blipFill>
-          <a:blip r:embed="rId2"/>
-          <a:stretch>
-            <a:fillRect/>
-          </a:stretch>
-        </p:blipFill>
-        <p:spPr>
-          <a:xfrm>
-            <a:off x="3705225" y="990600"/>
-            <a:ext cx="4781550" cy="4876800"/>
-          </a:xfrm>
-          <a:prstGeom prst="rect">
-            <a:avLst/>
-          </a:prstGeom>
-        </p:spPr>
-      </p:pic>
-      <p:sp>
-        <p:nvSpPr>
-          <p:cNvPr id="4" name="Elipse 3">
-            <a:extLst>
-              <a:ext uri="{FF2B5EF4-FFF2-40B4-BE49-F238E27FC236}">
-                <a16:creationId xmlns:a16="http://schemas.microsoft.com/office/drawing/2014/main" id="{50662871-7A51-4283-9C66-7F529D44A739}"/>
-              </a:ext>
-            </a:extLst>
-          </p:cNvPr>
-          <p:cNvSpPr/>
-          <p:nvPr/>
-        </p:nvSpPr>
-        <p:spPr>
-          <a:xfrm>
-            <a:off x="797136" y="3589867"/>
-            <a:ext cx="2579794" cy="1837266"/>
-          </a:xfrm>
-          <a:prstGeom prst="ellipse">
-            <a:avLst/>
-          </a:prstGeom>
-          <a:solidFill>
-            <a:srgbClr val="FFFF00"/>
-          </a:solidFill>
-          <a:ln w="38100">
-            <a:solidFill>
-              <a:srgbClr val="FF0000"/>
-            </a:solidFill>
-          </a:ln>
-        </p:spPr>
-        <p:style>
-          <a:lnRef idx="2">
-            <a:schemeClr val="accent1">
-              <a:shade val="50000"/>
-            </a:schemeClr>
-          </a:lnRef>
-          <a:fillRef idx="1">
-            <a:schemeClr val="accent1"/>
-          </a:fillRef>
-          <a:effectRef idx="0">
-            <a:schemeClr val="accent1"/>
-          </a:effectRef>
-          <a:fontRef idx="minor">
-            <a:schemeClr val="lt1"/>
-          </a:fontRef>
-        </p:style>
-        <p:txBody>
-          <a:bodyPr rot="0" spcFirstLastPara="0" vertOverflow="overflow" horzOverflow="overflow" vert="horz" wrap="square" lIns="91440" tIns="45720" rIns="91440" bIns="45720" numCol="1" spcCol="0" rtlCol="0" fromWordArt="0" anchor="ctr" anchorCtr="0" forceAA="0" compatLnSpc="1">
-            <a:prstTxWarp prst="textNoShape">
-              <a:avLst/>
-            </a:prstTxWarp>
-            <a:noAutofit/>
-          </a:bodyPr>
-          <a:lstStyle/>
-          <a:p>
-            <a:pPr algn="ctr"/>
-            <a:r>
-              <a:rPr lang="pt-BR" dirty="0">
-                <a:solidFill>
-                  <a:schemeClr val="tx1"/>
-                </a:solidFill>
-              </a:rPr>
-              <a:t>A célula com o texto Felipe agora ocupa o espaço de 4 colunas</a:t>
-            </a:r>
-          </a:p>
-        </p:txBody>
-      </p:sp>
-      <p:cxnSp>
-        <p:nvCxnSpPr>
-          <p:cNvPr id="6" name="Conector de Seta Reta 5">
-            <a:extLst>
-              <a:ext uri="{FF2B5EF4-FFF2-40B4-BE49-F238E27FC236}">
-                <a16:creationId xmlns:a16="http://schemas.microsoft.com/office/drawing/2014/main" id="{9152EE91-DC6C-4785-A1E7-9CCE264B1B37}"/>
-              </a:ext>
-            </a:extLst>
-          </p:cNvPr>
-          <p:cNvCxnSpPr/>
-          <p:nvPr/>
-        </p:nvCxnSpPr>
-        <p:spPr>
-          <a:xfrm flipV="1">
-            <a:off x="3302000" y="3945467"/>
-            <a:ext cx="465667" cy="143933"/>
-          </a:xfrm>
-          <a:prstGeom prst="straightConnector1">
-            <a:avLst/>
-          </a:prstGeom>
-          <a:ln w="38100">
-            <a:solidFill>
-              <a:srgbClr val="FF0000"/>
-            </a:solidFill>
-            <a:tailEnd type="triangle"/>
-          </a:ln>
-        </p:spPr>
-        <p:style>
-          <a:lnRef idx="1">
-            <a:schemeClr val="accent1"/>
-          </a:lnRef>
-          <a:fillRef idx="0">
-            <a:schemeClr val="accent1"/>
-          </a:fillRef>
-          <a:effectRef idx="0">
-            <a:schemeClr val="accent1"/>
-          </a:effectRef>
-          <a:fontRef idx="minor">
-            <a:schemeClr val="tx1"/>
-          </a:fontRef>
-        </p:style>
-      </p:cxnSp>
-    </p:spTree>
-    <p:extLst>
-      <p:ext uri="{BB962C8B-B14F-4D97-AF65-F5344CB8AC3E}">
-        <p14:creationId xmlns:p14="http://schemas.microsoft.com/office/powerpoint/2010/main" val="1075692153"/>
-      </p:ext>
-    </p:extLst>
-  </p:cSld>
-  <p:clrMapOvr>
-    <a:masterClrMapping/>
-  </p:clrMapOvr>
-</p:sld>
-</file>
-
-<file path=ppt/slides/slide19.xml><?xml version="1.0" encoding="utf-8"?>
-<p:sld xmlns:a="http://schemas.openxmlformats.org/drawingml/2006/main" xmlns:r="http://schemas.openxmlformats.org/officeDocument/2006/relationships" xmlns:p="http://schemas.openxmlformats.org/presentationml/2006/main">
-  <p:cSld>
-    <p:spTree>
-      <p:nvGrpSpPr>
-        <p:cNvPr id="1" name=""/>
-        <p:cNvGrpSpPr/>
-        <p:nvPr/>
-      </p:nvGrpSpPr>
-      <p:grpSpPr>
-        <a:xfrm>
-          <a:off x="0" y="0"/>
-          <a:ext cx="0" cy="0"/>
-          <a:chOff x="0" y="0"/>
-          <a:chExt cx="0" cy="0"/>
-        </a:xfrm>
-      </p:grpSpPr>
-      <p:pic>
-        <p:nvPicPr>
-          <p:cNvPr id="3" name="Imagem 2">
-            <a:extLst>
-              <a:ext uri="{FF2B5EF4-FFF2-40B4-BE49-F238E27FC236}">
-                <a16:creationId xmlns:a16="http://schemas.microsoft.com/office/drawing/2014/main" id="{D4F4F7DF-5F9E-4550-8315-ABE5C5D21340}"/>
-              </a:ext>
-            </a:extLst>
-          </p:cNvPr>
-          <p:cNvPicPr>
-            <a:picLocks noChangeAspect="1"/>
-          </p:cNvPicPr>
-          <p:nvPr/>
-        </p:nvPicPr>
-        <p:blipFill>
-          <a:blip r:embed="rId2">
-            <a:extLst>
-              <a:ext uri="{28A0092B-C50C-407E-A947-70E740481C1C}">
-                <a14:useLocalDpi xmlns:a14="http://schemas.microsoft.com/office/drawing/2010/main" val="0"/>
-              </a:ext>
-            </a:extLst>
-          </a:blip>
-          <a:stretch>
-            <a:fillRect/>
-          </a:stretch>
-        </p:blipFill>
-        <p:spPr>
-          <a:xfrm>
-            <a:off x="2495745" y="417608"/>
-            <a:ext cx="5490243" cy="6022784"/>
-          </a:xfrm>
-          <a:prstGeom prst="rect">
-            <a:avLst/>
-          </a:prstGeom>
-        </p:spPr>
-      </p:pic>
-      <p:sp>
-        <p:nvSpPr>
-          <p:cNvPr id="4" name="Retângulo 3">
-            <a:extLst>
-              <a:ext uri="{FF2B5EF4-FFF2-40B4-BE49-F238E27FC236}">
-                <a16:creationId xmlns:a16="http://schemas.microsoft.com/office/drawing/2014/main" id="{2E4E5CA5-7F26-4D38-8EF2-D686AB930F7C}"/>
-              </a:ext>
-            </a:extLst>
-          </p:cNvPr>
-          <p:cNvSpPr/>
-          <p:nvPr/>
-        </p:nvSpPr>
-        <p:spPr>
-          <a:xfrm>
-            <a:off x="3200400" y="1354667"/>
-            <a:ext cx="3996267" cy="1371600"/>
-          </a:xfrm>
-          <a:prstGeom prst="rect">
-            <a:avLst/>
-          </a:prstGeom>
-          <a:noFill/>
-          <a:ln w="38100">
-            <a:solidFill>
-              <a:srgbClr val="FF0000"/>
-            </a:solidFill>
-          </a:ln>
-        </p:spPr>
-        <p:style>
-          <a:lnRef idx="2">
-            <a:schemeClr val="accent1">
-              <a:shade val="50000"/>
-            </a:schemeClr>
-          </a:lnRef>
-          <a:fillRef idx="1">
-            <a:schemeClr val="accent1"/>
-          </a:fillRef>
-          <a:effectRef idx="0">
-            <a:schemeClr val="accent1"/>
-          </a:effectRef>
-          <a:fontRef idx="minor">
-            <a:schemeClr val="lt1"/>
-          </a:fontRef>
-        </p:style>
-        <p:txBody>
-          <a:bodyPr rot="0" spcFirstLastPara="0" vertOverflow="overflow" horzOverflow="overflow" vert="horz" wrap="square" lIns="91440" tIns="45720" rIns="91440" bIns="45720" numCol="1" spcCol="0" rtlCol="0" fromWordArt="0" anchor="ctr" anchorCtr="0" forceAA="0" compatLnSpc="1">
-            <a:prstTxWarp prst="textNoShape">
-              <a:avLst/>
-            </a:prstTxWarp>
-            <a:noAutofit/>
-          </a:bodyPr>
-          <a:lstStyle/>
-          <a:p>
-            <a:pPr algn="ctr"/>
-            <a:endParaRPr lang="pt-BR"/>
-          </a:p>
-        </p:txBody>
-      </p:sp>
-      <p:sp>
-        <p:nvSpPr>
-          <p:cNvPr id="5" name="Retângulo 4">
-            <a:extLst>
-              <a:ext uri="{FF2B5EF4-FFF2-40B4-BE49-F238E27FC236}">
-                <a16:creationId xmlns:a16="http://schemas.microsoft.com/office/drawing/2014/main" id="{1164D556-686D-47D1-A0AD-6C064DF184D6}"/>
-              </a:ext>
-            </a:extLst>
-          </p:cNvPr>
-          <p:cNvSpPr/>
-          <p:nvPr/>
-        </p:nvSpPr>
-        <p:spPr>
-          <a:xfrm>
-            <a:off x="3200399" y="3031066"/>
-            <a:ext cx="3996267" cy="2252133"/>
-          </a:xfrm>
-          <a:prstGeom prst="rect">
-            <a:avLst/>
-          </a:prstGeom>
-          <a:noFill/>
-          <a:ln w="38100">
-            <a:solidFill>
-              <a:srgbClr val="FF0000"/>
-            </a:solidFill>
-          </a:ln>
-        </p:spPr>
-        <p:style>
-          <a:lnRef idx="2">
-            <a:schemeClr val="accent1">
-              <a:shade val="50000"/>
-            </a:schemeClr>
-          </a:lnRef>
-          <a:fillRef idx="1">
-            <a:schemeClr val="accent1"/>
-          </a:fillRef>
-          <a:effectRef idx="0">
-            <a:schemeClr val="accent1"/>
-          </a:effectRef>
-          <a:fontRef idx="minor">
-            <a:schemeClr val="lt1"/>
-          </a:fontRef>
-        </p:style>
-        <p:txBody>
-          <a:bodyPr rot="0" spcFirstLastPara="0" vertOverflow="overflow" horzOverflow="overflow" vert="horz" wrap="square" lIns="91440" tIns="45720" rIns="91440" bIns="45720" numCol="1" spcCol="0" rtlCol="0" fromWordArt="0" anchor="ctr" anchorCtr="0" forceAA="0" compatLnSpc="1">
-            <a:prstTxWarp prst="textNoShape">
-              <a:avLst/>
-            </a:prstTxWarp>
-            <a:noAutofit/>
-          </a:bodyPr>
-          <a:lstStyle/>
-          <a:p>
-            <a:pPr algn="ctr"/>
-            <a:endParaRPr lang="pt-BR"/>
-          </a:p>
-        </p:txBody>
-      </p:sp>
-      <p:sp>
-        <p:nvSpPr>
-          <p:cNvPr id="6" name="Seta: para a Direita 5">
-            <a:extLst>
-              <a:ext uri="{FF2B5EF4-FFF2-40B4-BE49-F238E27FC236}">
-                <a16:creationId xmlns:a16="http://schemas.microsoft.com/office/drawing/2014/main" id="{51C1D2ED-1710-4958-85B3-02E273A2756C}"/>
-              </a:ext>
-            </a:extLst>
-          </p:cNvPr>
-          <p:cNvSpPr/>
-          <p:nvPr/>
-        </p:nvSpPr>
-        <p:spPr>
-          <a:xfrm>
-            <a:off x="1075267" y="1557867"/>
-            <a:ext cx="1854200" cy="1109133"/>
-          </a:xfrm>
-          <a:prstGeom prst="rightArrow">
-            <a:avLst/>
-          </a:prstGeom>
-          <a:solidFill>
-            <a:srgbClr val="FFFF00"/>
-          </a:solidFill>
-          <a:ln w="38100">
-            <a:solidFill>
-              <a:srgbClr val="FF0000"/>
-            </a:solidFill>
-          </a:ln>
-        </p:spPr>
-        <p:style>
-          <a:lnRef idx="2">
-            <a:schemeClr val="accent1">
-              <a:shade val="50000"/>
-            </a:schemeClr>
-          </a:lnRef>
-          <a:fillRef idx="1">
-            <a:schemeClr val="accent1"/>
-          </a:fillRef>
-          <a:effectRef idx="0">
-            <a:schemeClr val="accent1"/>
-          </a:effectRef>
-          <a:fontRef idx="minor">
-            <a:schemeClr val="lt1"/>
-          </a:fontRef>
-        </p:style>
-        <p:txBody>
-          <a:bodyPr rot="0" spcFirstLastPara="0" vertOverflow="overflow" horzOverflow="overflow" vert="horz" wrap="square" lIns="91440" tIns="45720" rIns="91440" bIns="45720" numCol="1" spcCol="0" rtlCol="0" fromWordArt="0" anchor="ctr" anchorCtr="0" forceAA="0" compatLnSpc="1">
-            <a:prstTxWarp prst="textNoShape">
-              <a:avLst/>
-            </a:prstTxWarp>
-            <a:noAutofit/>
-          </a:bodyPr>
-          <a:lstStyle/>
-          <a:p>
-            <a:pPr algn="ctr"/>
-            <a:r>
-              <a:rPr lang="pt-BR" dirty="0">
-                <a:solidFill>
-                  <a:schemeClr val="tx1"/>
-                </a:solidFill>
-              </a:rPr>
-              <a:t>Insira h3</a:t>
-            </a:r>
-          </a:p>
-        </p:txBody>
-      </p:sp>
-      <p:sp>
-        <p:nvSpPr>
-          <p:cNvPr id="7" name="Seta: para a Direita 6">
-            <a:extLst>
-              <a:ext uri="{FF2B5EF4-FFF2-40B4-BE49-F238E27FC236}">
-                <a16:creationId xmlns:a16="http://schemas.microsoft.com/office/drawing/2014/main" id="{B367AE79-1AEB-4180-AFFC-B1DE08E34035}"/>
-              </a:ext>
-            </a:extLst>
-          </p:cNvPr>
-          <p:cNvSpPr/>
-          <p:nvPr/>
-        </p:nvSpPr>
-        <p:spPr>
-          <a:xfrm>
-            <a:off x="1210733" y="3716867"/>
-            <a:ext cx="1718734" cy="1168400"/>
-          </a:xfrm>
-          <a:prstGeom prst="rightArrow">
-            <a:avLst/>
-          </a:prstGeom>
-          <a:solidFill>
-            <a:srgbClr val="FFFF00"/>
-          </a:solidFill>
-          <a:ln w="38100">
-            <a:solidFill>
-              <a:srgbClr val="FF0000"/>
-            </a:solidFill>
-          </a:ln>
-        </p:spPr>
-        <p:style>
-          <a:lnRef idx="2">
-            <a:schemeClr val="accent1">
-              <a:shade val="50000"/>
-            </a:schemeClr>
-          </a:lnRef>
-          <a:fillRef idx="1">
-            <a:schemeClr val="accent1"/>
-          </a:fillRef>
-          <a:effectRef idx="0">
-            <a:schemeClr val="accent1"/>
-          </a:effectRef>
-          <a:fontRef idx="minor">
-            <a:schemeClr val="lt1"/>
-          </a:fontRef>
-        </p:style>
-        <p:txBody>
-          <a:bodyPr rot="0" spcFirstLastPara="0" vertOverflow="overflow" horzOverflow="overflow" vert="horz" wrap="square" lIns="91440" tIns="45720" rIns="91440" bIns="45720" numCol="1" spcCol="0" rtlCol="0" fromWordArt="0" anchor="ctr" anchorCtr="0" forceAA="0" compatLnSpc="1">
-            <a:prstTxWarp prst="textNoShape">
-              <a:avLst/>
-            </a:prstTxWarp>
-            <a:noAutofit/>
-          </a:bodyPr>
-          <a:lstStyle/>
-          <a:p>
-            <a:pPr algn="ctr"/>
-            <a:r>
-              <a:rPr lang="pt-BR" dirty="0">
-                <a:solidFill>
-                  <a:schemeClr val="tx1"/>
-                </a:solidFill>
-              </a:rPr>
-              <a:t>Insira o </a:t>
-            </a:r>
-            <a:r>
-              <a:rPr lang="pt-BR" dirty="0" err="1">
-                <a:solidFill>
-                  <a:schemeClr val="tx1"/>
-                </a:solidFill>
-              </a:rPr>
-              <a:t>table</a:t>
-            </a:r>
-            <a:endParaRPr lang="pt-BR" dirty="0">
-              <a:solidFill>
-                <a:schemeClr val="tx1"/>
-              </a:solidFill>
-            </a:endParaRPr>
-          </a:p>
-        </p:txBody>
-      </p:sp>
-    </p:spTree>
-    <p:extLst>
-      <p:ext uri="{BB962C8B-B14F-4D97-AF65-F5344CB8AC3E}">
-        <p14:creationId xmlns:p14="http://schemas.microsoft.com/office/powerpoint/2010/main" val="94773565"/>
-      </p:ext>
-    </p:extLst>
-  </p:cSld>
-  <p:clrMapOvr>
-    <a:masterClrMapping/>
-  </p:clrMapOvr>
-</p:sld>
-</file>
-
-<file path=ppt/slides/slide2.xml><?xml version="1.0" encoding="utf-8"?>
-<p:sld xmlns:a="http://schemas.openxmlformats.org/drawingml/2006/main" xmlns:r="http://schemas.openxmlformats.org/officeDocument/2006/relationships" xmlns:p="http://schemas.openxmlformats.org/presentationml/2006/main">
-  <p:cSld>
-    <p:spTree>
-      <p:nvGrpSpPr>
-        <p:cNvPr id="1" name=""/>
-        <p:cNvGrpSpPr/>
-        <p:nvPr/>
-      </p:nvGrpSpPr>
-      <p:grpSpPr>
-        <a:xfrm>
-          <a:off x="0" y="0"/>
-          <a:ext cx="0" cy="0"/>
-          <a:chOff x="0" y="0"/>
-          <a:chExt cx="0" cy="0"/>
-        </a:xfrm>
-      </p:grpSpPr>
-      <p:pic>
-        <p:nvPicPr>
-          <p:cNvPr id="2" name="Imagem 1">
-            <a:extLst>
-              <a:ext uri="{FF2B5EF4-FFF2-40B4-BE49-F238E27FC236}">
-                <a16:creationId xmlns:a16="http://schemas.microsoft.com/office/drawing/2014/main" id="{F6354D68-90D4-48BA-A6C7-11B99C3C3262}"/>
-              </a:ext>
-            </a:extLst>
-          </p:cNvPr>
-          <p:cNvPicPr>
-            <a:picLocks noChangeAspect="1"/>
-          </p:cNvPicPr>
-          <p:nvPr/>
-        </p:nvPicPr>
-        <p:blipFill>
-          <a:blip r:embed="rId2"/>
-          <a:stretch>
-            <a:fillRect/>
-          </a:stretch>
-        </p:blipFill>
-        <p:spPr>
-          <a:xfrm>
-            <a:off x="3108863" y="543121"/>
-            <a:ext cx="5974273" cy="5771757"/>
-          </a:xfrm>
-          <a:prstGeom prst="rect">
-            <a:avLst/>
-          </a:prstGeom>
-        </p:spPr>
-      </p:pic>
-    </p:spTree>
-    <p:extLst>
-      <p:ext uri="{BB962C8B-B14F-4D97-AF65-F5344CB8AC3E}">
-        <p14:creationId xmlns:p14="http://schemas.microsoft.com/office/powerpoint/2010/main" val="1571144132"/>
-      </p:ext>
-    </p:extLst>
-  </p:cSld>
-  <p:clrMapOvr>
-    <a:masterClrMapping/>
-  </p:clrMapOvr>
-</p:sld>
-</file>
-
-<file path=ppt/slides/slide20.xml><?xml version="1.0" encoding="utf-8"?>
-<p:sld xmlns:a="http://schemas.openxmlformats.org/drawingml/2006/main" xmlns:r="http://schemas.openxmlformats.org/officeDocument/2006/relationships" xmlns:p="http://schemas.openxmlformats.org/presentationml/2006/main">
-  <p:cSld>
-    <p:spTree>
-      <p:nvGrpSpPr>
-        <p:cNvPr id="1" name=""/>
-        <p:cNvGrpSpPr/>
-        <p:nvPr/>
-      </p:nvGrpSpPr>
-      <p:grpSpPr>
-        <a:xfrm>
-          <a:off x="0" y="0"/>
-          <a:ext cx="0" cy="0"/>
-          <a:chOff x="0" y="0"/>
-          <a:chExt cx="0" cy="0"/>
-        </a:xfrm>
-      </p:grpSpPr>
-      <p:pic>
-        <p:nvPicPr>
-          <p:cNvPr id="3" name="Imagem 2">
-            <a:extLst>
-              <a:ext uri="{FF2B5EF4-FFF2-40B4-BE49-F238E27FC236}">
-                <a16:creationId xmlns:a16="http://schemas.microsoft.com/office/drawing/2014/main" id="{D7CEA340-CDAA-442F-9890-CB1489FFB193}"/>
-              </a:ext>
-            </a:extLst>
-          </p:cNvPr>
-          <p:cNvPicPr>
-            <a:picLocks noChangeAspect="1"/>
-          </p:cNvPicPr>
-          <p:nvPr/>
-        </p:nvPicPr>
-        <p:blipFill>
-          <a:blip r:embed="rId2">
-            <a:extLst>
-              <a:ext uri="{28A0092B-C50C-407E-A947-70E740481C1C}">
-                <a14:useLocalDpi xmlns:a14="http://schemas.microsoft.com/office/drawing/2010/main" val="0"/>
-              </a:ext>
-            </a:extLst>
-          </a:blip>
-          <a:stretch>
-            <a:fillRect/>
-          </a:stretch>
-        </p:blipFill>
-        <p:spPr>
-          <a:xfrm>
-            <a:off x="461654" y="1816962"/>
-            <a:ext cx="5778741" cy="3669438"/>
-          </a:xfrm>
-          <a:prstGeom prst="rect">
-            <a:avLst/>
-          </a:prstGeom>
-        </p:spPr>
-      </p:pic>
-      <p:pic>
-        <p:nvPicPr>
-          <p:cNvPr id="4" name="Imagem 3">
-            <a:extLst>
-              <a:ext uri="{FF2B5EF4-FFF2-40B4-BE49-F238E27FC236}">
-                <a16:creationId xmlns:a16="http://schemas.microsoft.com/office/drawing/2014/main" id="{DF64668E-D3B1-4BB3-B52A-071B51A341A0}"/>
-              </a:ext>
-            </a:extLst>
-          </p:cNvPr>
-          <p:cNvPicPr>
-            <a:picLocks noChangeAspect="1"/>
-          </p:cNvPicPr>
-          <p:nvPr/>
-        </p:nvPicPr>
-        <p:blipFill>
-          <a:blip r:embed="rId3"/>
-          <a:stretch>
-            <a:fillRect/>
-          </a:stretch>
-        </p:blipFill>
-        <p:spPr>
-          <a:xfrm>
-            <a:off x="6948796" y="1126067"/>
-            <a:ext cx="4781550" cy="4876800"/>
-          </a:xfrm>
-          <a:prstGeom prst="rect">
-            <a:avLst/>
-          </a:prstGeom>
-        </p:spPr>
-      </p:pic>
-    </p:spTree>
-    <p:extLst>
-      <p:ext uri="{BB962C8B-B14F-4D97-AF65-F5344CB8AC3E}">
-        <p14:creationId xmlns:p14="http://schemas.microsoft.com/office/powerpoint/2010/main" val="3967689529"/>
-      </p:ext>
-    </p:extLst>
-  </p:cSld>
-  <p:clrMapOvr>
-    <a:masterClrMapping/>
-  </p:clrMapOvr>
-</p:sld>
-</file>
-
-<file path=ppt/slides/slide21.xml><?xml version="1.0" encoding="utf-8"?>
-<p:sld xmlns:a="http://schemas.openxmlformats.org/drawingml/2006/main" xmlns:r="http://schemas.openxmlformats.org/officeDocument/2006/relationships" xmlns:p="http://schemas.openxmlformats.org/presentationml/2006/main">
-  <p:cSld>
-    <p:spTree>
-      <p:nvGrpSpPr>
-        <p:cNvPr id="1" name=""/>
-        <p:cNvGrpSpPr/>
-        <p:nvPr/>
-      </p:nvGrpSpPr>
-      <p:grpSpPr>
-        <a:xfrm>
-          <a:off x="0" y="0"/>
-          <a:ext cx="0" cy="0"/>
-          <a:chOff x="0" y="0"/>
-          <a:chExt cx="0" cy="0"/>
-        </a:xfrm>
-      </p:grpSpPr>
-      <p:pic>
-        <p:nvPicPr>
-          <p:cNvPr id="3" name="Imagem 2">
-            <a:extLst>
-              <a:ext uri="{FF2B5EF4-FFF2-40B4-BE49-F238E27FC236}">
-                <a16:creationId xmlns:a16="http://schemas.microsoft.com/office/drawing/2014/main" id="{4070E73D-080F-44D2-9806-7BD12CBB96F8}"/>
-              </a:ext>
-            </a:extLst>
-          </p:cNvPr>
-          <p:cNvPicPr>
-            <a:picLocks noChangeAspect="1"/>
-          </p:cNvPicPr>
-          <p:nvPr/>
-        </p:nvPicPr>
-        <p:blipFill>
-          <a:blip r:embed="rId2">
-            <a:extLst>
-              <a:ext uri="{28A0092B-C50C-407E-A947-70E740481C1C}">
-                <a14:useLocalDpi xmlns:a14="http://schemas.microsoft.com/office/drawing/2010/main" val="0"/>
-              </a:ext>
-            </a:extLst>
-          </a:blip>
-          <a:stretch>
-            <a:fillRect/>
-          </a:stretch>
-        </p:blipFill>
-        <p:spPr>
-          <a:xfrm>
-            <a:off x="989887" y="366285"/>
-            <a:ext cx="10212225" cy="6125430"/>
-          </a:xfrm>
-          <a:prstGeom prst="rect">
-            <a:avLst/>
-          </a:prstGeom>
-        </p:spPr>
-      </p:pic>
-      <p:sp>
-        <p:nvSpPr>
-          <p:cNvPr id="4" name="Retângulo 3">
-            <a:extLst>
-              <a:ext uri="{FF2B5EF4-FFF2-40B4-BE49-F238E27FC236}">
-                <a16:creationId xmlns:a16="http://schemas.microsoft.com/office/drawing/2014/main" id="{D949A4FE-EDA1-4693-8E03-71C05149E938}"/>
-              </a:ext>
-            </a:extLst>
-          </p:cNvPr>
-          <p:cNvSpPr/>
-          <p:nvPr/>
-        </p:nvSpPr>
-        <p:spPr>
-          <a:xfrm>
-            <a:off x="2497667" y="2988733"/>
-            <a:ext cx="2438400" cy="1862667"/>
-          </a:xfrm>
-          <a:prstGeom prst="rect">
-            <a:avLst/>
-          </a:prstGeom>
-          <a:noFill/>
-          <a:ln w="38100">
-            <a:solidFill>
-              <a:srgbClr val="FF0000"/>
-            </a:solidFill>
-          </a:ln>
-        </p:spPr>
-        <p:style>
-          <a:lnRef idx="2">
-            <a:schemeClr val="accent1">
-              <a:shade val="50000"/>
-            </a:schemeClr>
-          </a:lnRef>
-          <a:fillRef idx="1">
-            <a:schemeClr val="accent1"/>
-          </a:fillRef>
-          <a:effectRef idx="0">
-            <a:schemeClr val="accent1"/>
-          </a:effectRef>
-          <a:fontRef idx="minor">
-            <a:schemeClr val="lt1"/>
-          </a:fontRef>
-        </p:style>
-        <p:txBody>
-          <a:bodyPr rot="0" spcFirstLastPara="0" vertOverflow="overflow" horzOverflow="overflow" vert="horz" wrap="square" lIns="91440" tIns="45720" rIns="91440" bIns="45720" numCol="1" spcCol="0" rtlCol="0" fromWordArt="0" anchor="ctr" anchorCtr="0" forceAA="0" compatLnSpc="1">
-            <a:prstTxWarp prst="textNoShape">
-              <a:avLst/>
-            </a:prstTxWarp>
-            <a:noAutofit/>
-          </a:bodyPr>
-          <a:lstStyle/>
-          <a:p>
-            <a:pPr algn="ctr"/>
-            <a:endParaRPr lang="pt-BR"/>
-          </a:p>
-        </p:txBody>
-      </p:sp>
-      <p:sp>
-        <p:nvSpPr>
-          <p:cNvPr id="5" name="Seta: para a Direita 4">
-            <a:extLst>
-              <a:ext uri="{FF2B5EF4-FFF2-40B4-BE49-F238E27FC236}">
-                <a16:creationId xmlns:a16="http://schemas.microsoft.com/office/drawing/2014/main" id="{B524CE70-C116-4C85-8A7E-9C70B6AFA349}"/>
-              </a:ext>
-            </a:extLst>
-          </p:cNvPr>
-          <p:cNvSpPr/>
-          <p:nvPr/>
-        </p:nvSpPr>
-        <p:spPr>
-          <a:xfrm rot="1179653">
-            <a:off x="4789699" y="4281822"/>
-            <a:ext cx="1507639" cy="601134"/>
-          </a:xfrm>
-          <a:prstGeom prst="rightArrow">
-            <a:avLst/>
-          </a:prstGeom>
-          <a:solidFill>
-            <a:srgbClr val="FFFF00"/>
-          </a:solidFill>
-          <a:ln w="38100">
-            <a:solidFill>
-              <a:srgbClr val="FF0000"/>
-            </a:solidFill>
-          </a:ln>
-        </p:spPr>
-        <p:style>
-          <a:lnRef idx="2">
-            <a:schemeClr val="accent1">
-              <a:shade val="50000"/>
-            </a:schemeClr>
-          </a:lnRef>
-          <a:fillRef idx="1">
-            <a:schemeClr val="accent1"/>
-          </a:fillRef>
-          <a:effectRef idx="0">
-            <a:schemeClr val="accent1"/>
-          </a:effectRef>
-          <a:fontRef idx="minor">
-            <a:schemeClr val="lt1"/>
-          </a:fontRef>
-        </p:style>
-        <p:txBody>
-          <a:bodyPr rot="0" spcFirstLastPara="0" vertOverflow="overflow" horzOverflow="overflow" vert="horz" wrap="square" lIns="91440" tIns="45720" rIns="91440" bIns="45720" numCol="1" spcCol="0" rtlCol="0" fromWordArt="0" anchor="ctr" anchorCtr="0" forceAA="0" compatLnSpc="1">
-            <a:prstTxWarp prst="textNoShape">
-              <a:avLst/>
-            </a:prstTxWarp>
-            <a:noAutofit/>
-          </a:bodyPr>
-          <a:lstStyle/>
-          <a:p>
-            <a:pPr algn="ctr"/>
-            <a:endParaRPr lang="pt-BR"/>
-          </a:p>
-        </p:txBody>
-      </p:sp>
-    </p:spTree>
-    <p:extLst>
-      <p:ext uri="{BB962C8B-B14F-4D97-AF65-F5344CB8AC3E}">
-        <p14:creationId xmlns:p14="http://schemas.microsoft.com/office/powerpoint/2010/main" val="2316724026"/>
-      </p:ext>
-    </p:extLst>
-  </p:cSld>
-  <p:clrMapOvr>
-    <a:masterClrMapping/>
-  </p:clrMapOvr>
-</p:sld>
-</file>
-
 <file path=ppt/slides/slide22.xml><?xml version="1.0" encoding="utf-8"?>
 <p:sld xmlns:a="http://schemas.openxmlformats.org/drawingml/2006/main" xmlns:r="http://schemas.openxmlformats.org/officeDocument/2006/relationships" xmlns:p="http://schemas.openxmlformats.org/presentationml/2006/main">
   <p:cSld>
@@ -6801,7 +6795,7 @@
           <p:cNvPr id="3" name="Imagem 2">
             <a:extLst>
               <a:ext uri="{FF2B5EF4-FFF2-40B4-BE49-F238E27FC236}">
-                <a16:creationId xmlns:a16="http://schemas.microsoft.com/office/drawing/2014/main" id="{2D13498A-81C0-4D45-8438-4E0502B5E9A2}"/>
+                <a16:creationId xmlns:a16="http://schemas.microsoft.com/office/drawing/2014/main" id="{2572F7F0-C9CD-4307-B47D-D143A2742827}"/>
               </a:ext>
             </a:extLst>
           </p:cNvPr>
@@ -6811,21 +6805,15 @@
           <p:nvPr/>
         </p:nvPicPr>
         <p:blipFill>
-          <a:blip r:embed="rId2">
-            <a:extLst>
-              <a:ext uri="{28A0092B-C50C-407E-A947-70E740481C1C}">
-                <a14:useLocalDpi xmlns:a14="http://schemas.microsoft.com/office/drawing/2010/main" val="0"/>
-              </a:ext>
-            </a:extLst>
-          </a:blip>
+          <a:blip r:embed="rId2"/>
           <a:stretch>
             <a:fillRect/>
           </a:stretch>
         </p:blipFill>
         <p:spPr>
           <a:xfrm>
-            <a:off x="1504309" y="599680"/>
-            <a:ext cx="9183382" cy="5658640"/>
+            <a:off x="3705225" y="990600"/>
+            <a:ext cx="4781550" cy="4876800"/>
           </a:xfrm>
           <a:prstGeom prst="rect">
             <a:avLst/>
@@ -6834,10 +6822,10 @@
       </p:pic>
       <p:sp>
         <p:nvSpPr>
-          <p:cNvPr id="4" name="Retângulo 3">
-            <a:extLst>
-              <a:ext uri="{FF2B5EF4-FFF2-40B4-BE49-F238E27FC236}">
-                <a16:creationId xmlns:a16="http://schemas.microsoft.com/office/drawing/2014/main" id="{19CBE482-A885-4299-991D-DBC165FA2C7D}"/>
+          <p:cNvPr id="4" name="Elipse 3">
+            <a:extLst>
+              <a:ext uri="{FF2B5EF4-FFF2-40B4-BE49-F238E27FC236}">
+                <a16:creationId xmlns:a16="http://schemas.microsoft.com/office/drawing/2014/main" id="{50662871-7A51-4283-9C66-7F529D44A739}"/>
               </a:ext>
             </a:extLst>
           </p:cNvPr>
@@ -6846,67 +6834,10 @@
         </p:nvSpPr>
         <p:spPr>
           <a:xfrm>
-            <a:off x="2032000" y="2734733"/>
-            <a:ext cx="3403600" cy="2904067"/>
-          </a:xfrm>
-          <a:prstGeom prst="rect">
-            <a:avLst/>
-          </a:prstGeom>
-          <a:noFill/>
-          <a:ln w="38100">
-            <a:solidFill>
-              <a:srgbClr val="FF0000"/>
-            </a:solidFill>
-          </a:ln>
-        </p:spPr>
-        <p:style>
-          <a:lnRef idx="2">
-            <a:schemeClr val="accent1">
-              <a:shade val="50000"/>
-            </a:schemeClr>
-          </a:lnRef>
-          <a:fillRef idx="1">
-            <a:schemeClr val="accent1"/>
-          </a:fillRef>
-          <a:effectRef idx="0">
-            <a:schemeClr val="accent1"/>
-          </a:effectRef>
-          <a:fontRef idx="minor">
-            <a:schemeClr val="lt1"/>
-          </a:fontRef>
-        </p:style>
-        <p:txBody>
-          <a:bodyPr rot="0" spcFirstLastPara="0" vertOverflow="overflow" horzOverflow="overflow" vert="horz" wrap="square" lIns="91440" tIns="45720" rIns="91440" bIns="45720" numCol="1" spcCol="0" rtlCol="0" fromWordArt="0" anchor="ctr" anchorCtr="0" forceAA="0" compatLnSpc="1">
-            <a:prstTxWarp prst="textNoShape">
-              <a:avLst/>
-            </a:prstTxWarp>
-            <a:noAutofit/>
-          </a:bodyPr>
-          <a:lstStyle/>
-          <a:p>
-            <a:pPr algn="ctr"/>
-            <a:endParaRPr lang="pt-BR"/>
-          </a:p>
-        </p:txBody>
-      </p:sp>
-      <p:sp>
-        <p:nvSpPr>
-          <p:cNvPr id="5" name="Seta: para a Direita 4">
-            <a:extLst>
-              <a:ext uri="{FF2B5EF4-FFF2-40B4-BE49-F238E27FC236}">
-                <a16:creationId xmlns:a16="http://schemas.microsoft.com/office/drawing/2014/main" id="{994E3EC8-F326-4319-BD36-47C158F3264C}"/>
-              </a:ext>
-            </a:extLst>
-          </p:cNvPr>
-          <p:cNvSpPr/>
-          <p:nvPr/>
-        </p:nvSpPr>
-        <p:spPr>
-          <a:xfrm>
-            <a:off x="4944533" y="4851400"/>
-            <a:ext cx="728134" cy="592667"/>
-          </a:xfrm>
-          <a:prstGeom prst="rightArrow">
+            <a:off x="797136" y="3589867"/>
+            <a:ext cx="2579794" cy="1837266"/>
+          </a:xfrm>
+          <a:prstGeom prst="ellipse">
             <a:avLst/>
           </a:prstGeom>
           <a:solidFill>
@@ -6944,14 +6875,63 @@
           <a:lstStyle/>
           <a:p>
             <a:pPr algn="ctr"/>
-            <a:endParaRPr lang="pt-BR"/>
-          </a:p>
-        </p:txBody>
-      </p:sp>
+            <a:r>
+              <a:rPr lang="pt-BR" dirty="0">
+                <a:solidFill>
+                  <a:schemeClr val="tx1"/>
+                </a:solidFill>
+              </a:rPr>
+              <a:t>A célula com o texto Felipe agora ocupa o espaço de 4 colunas</a:t>
+            </a:r>
+          </a:p>
+        </p:txBody>
+      </p:sp>
+      <p:cxnSp>
+        <p:nvCxnSpPr>
+          <p:cNvPr id="6" name="Conector de Seta Reta 5">
+            <a:extLst>
+              <a:ext uri="{FF2B5EF4-FFF2-40B4-BE49-F238E27FC236}">
+                <a16:creationId xmlns:a16="http://schemas.microsoft.com/office/drawing/2014/main" id="{9152EE91-DC6C-4785-A1E7-9CCE264B1B37}"/>
+              </a:ext>
+            </a:extLst>
+          </p:cNvPr>
+          <p:cNvCxnSpPr/>
+          <p:nvPr/>
+        </p:nvCxnSpPr>
+        <p:spPr>
+          <a:xfrm flipV="1">
+            <a:off x="3302000" y="3945467"/>
+            <a:ext cx="465667" cy="143933"/>
+          </a:xfrm>
+          <a:prstGeom prst="straightConnector1">
+            <a:avLst/>
+          </a:prstGeom>
+          <a:ln w="38100">
+            <a:solidFill>
+              <a:srgbClr val="FF0000"/>
+            </a:solidFill>
+            <a:tailEnd type="triangle"/>
+          </a:ln>
+        </p:spPr>
+        <p:style>
+          <a:lnRef idx="1">
+            <a:schemeClr val="accent1"/>
+          </a:lnRef>
+          <a:fillRef idx="0">
+            <a:schemeClr val="accent1"/>
+          </a:fillRef>
+          <a:effectRef idx="0">
+            <a:schemeClr val="accent1"/>
+          </a:effectRef>
+          <a:fontRef idx="minor">
+            <a:schemeClr val="tx1"/>
+          </a:fontRef>
+        </p:style>
+      </p:cxnSp>
     </p:spTree>
     <p:extLst>
       <p:ext uri="{BB962C8B-B14F-4D97-AF65-F5344CB8AC3E}">
-        <p14:creationId xmlns:p14="http://schemas.microsoft.com/office/powerpoint/2010/main" val="875468880"/>
+        <p14:creationId xmlns:p14="http://schemas.microsoft.com/office/powerpoint/2010/main" val="1075692153"/>
       </p:ext>
     </p:extLst>
   </p:cSld>
@@ -6983,7 +6963,7 @@
           <p:cNvPr id="3" name="Imagem 2">
             <a:extLst>
               <a:ext uri="{FF2B5EF4-FFF2-40B4-BE49-F238E27FC236}">
-                <a16:creationId xmlns:a16="http://schemas.microsoft.com/office/drawing/2014/main" id="{587BDD93-F85A-4CC0-AC15-B842A33400CD}"/>
+                <a16:creationId xmlns:a16="http://schemas.microsoft.com/office/drawing/2014/main" id="{D4F4F7DF-5F9E-4550-8315-ABE5C5D21340}"/>
               </a:ext>
             </a:extLst>
           </p:cNvPr>
@@ -7006,8 +6986,8 @@
         </p:blipFill>
         <p:spPr>
           <a:xfrm>
-            <a:off x="1056571" y="161469"/>
-            <a:ext cx="10078857" cy="6535062"/>
+            <a:off x="2495745" y="417608"/>
+            <a:ext cx="5490243" cy="6022784"/>
           </a:xfrm>
           <a:prstGeom prst="rect">
             <a:avLst/>
@@ -7019,7 +6999,7 @@
           <p:cNvPr id="4" name="Retângulo 3">
             <a:extLst>
               <a:ext uri="{FF2B5EF4-FFF2-40B4-BE49-F238E27FC236}">
-                <a16:creationId xmlns:a16="http://schemas.microsoft.com/office/drawing/2014/main" id="{7A9A1EF6-8F58-43F7-8181-2512E1780D52}"/>
+                <a16:creationId xmlns:a16="http://schemas.microsoft.com/office/drawing/2014/main" id="{2E4E5CA5-7F26-4D38-8EF2-D686AB930F7C}"/>
               </a:ext>
             </a:extLst>
           </p:cNvPr>
@@ -7028,8 +7008,8 @@
         </p:nvSpPr>
         <p:spPr>
           <a:xfrm>
-            <a:off x="1566333" y="161470"/>
-            <a:ext cx="3352800" cy="2869598"/>
+            <a:off x="3200400" y="1354667"/>
+            <a:ext cx="3996267" cy="1371600"/>
           </a:xfrm>
           <a:prstGeom prst="rect">
             <a:avLst/>
@@ -7076,7 +7056,7 @@
           <p:cNvPr id="5" name="Retângulo 4">
             <a:extLst>
               <a:ext uri="{FF2B5EF4-FFF2-40B4-BE49-F238E27FC236}">
-                <a16:creationId xmlns:a16="http://schemas.microsoft.com/office/drawing/2014/main" id="{6409404A-DA65-4AC0-8DC1-6860B8F955D5}"/>
+                <a16:creationId xmlns:a16="http://schemas.microsoft.com/office/drawing/2014/main" id="{1164D556-686D-47D1-A0AD-6C064DF184D6}"/>
               </a:ext>
             </a:extLst>
           </p:cNvPr>
@@ -7085,8 +7065,8 @@
         </p:nvSpPr>
         <p:spPr>
           <a:xfrm>
-            <a:off x="1566333" y="3277203"/>
-            <a:ext cx="3352800" cy="2869598"/>
+            <a:off x="3200399" y="3031066"/>
+            <a:ext cx="3996267" cy="2252133"/>
           </a:xfrm>
           <a:prstGeom prst="rect">
             <a:avLst/>
@@ -7128,99 +7108,155 @@
           </a:p>
         </p:txBody>
       </p:sp>
-      <p:cxnSp>
-        <p:nvCxnSpPr>
-          <p:cNvPr id="8" name="Conector de Seta Reta 7">
-            <a:extLst>
-              <a:ext uri="{FF2B5EF4-FFF2-40B4-BE49-F238E27FC236}">
-                <a16:creationId xmlns:a16="http://schemas.microsoft.com/office/drawing/2014/main" id="{C35B1509-B9BC-462E-A36E-A547AC29392C}"/>
-              </a:ext>
-            </a:extLst>
-          </p:cNvPr>
-          <p:cNvCxnSpPr>
-            <a:cxnSpLocks/>
-          </p:cNvCxnSpPr>
-          <p:nvPr/>
-        </p:nvCxnSpPr>
-        <p:spPr>
-          <a:xfrm>
-            <a:off x="4978400" y="3031068"/>
-            <a:ext cx="1236133" cy="1786465"/>
-          </a:xfrm>
-          <a:prstGeom prst="straightConnector1">
-            <a:avLst/>
-          </a:prstGeom>
+      <p:sp>
+        <p:nvSpPr>
+          <p:cNvPr id="6" name="Seta: para a Direita 5">
+            <a:extLst>
+              <a:ext uri="{FF2B5EF4-FFF2-40B4-BE49-F238E27FC236}">
+                <a16:creationId xmlns:a16="http://schemas.microsoft.com/office/drawing/2014/main" id="{51C1D2ED-1710-4958-85B3-02E273A2756C}"/>
+              </a:ext>
+            </a:extLst>
+          </p:cNvPr>
+          <p:cNvSpPr/>
+          <p:nvPr/>
+        </p:nvSpPr>
+        <p:spPr>
+          <a:xfrm>
+            <a:off x="1075267" y="1557867"/>
+            <a:ext cx="1854200" cy="1109133"/>
+          </a:xfrm>
+          <a:prstGeom prst="rightArrow">
+            <a:avLst/>
+          </a:prstGeom>
+          <a:solidFill>
+            <a:srgbClr val="FFFF00"/>
+          </a:solidFill>
           <a:ln w="38100">
             <a:solidFill>
               <a:srgbClr val="FF0000"/>
             </a:solidFill>
-            <a:tailEnd type="triangle"/>
           </a:ln>
         </p:spPr>
         <p:style>
-          <a:lnRef idx="1">
-            <a:schemeClr val="accent1"/>
+          <a:lnRef idx="2">
+            <a:schemeClr val="accent1">
+              <a:shade val="50000"/>
+            </a:schemeClr>
           </a:lnRef>
-          <a:fillRef idx="0">
+          <a:fillRef idx="1">
             <a:schemeClr val="accent1"/>
           </a:fillRef>
           <a:effectRef idx="0">
             <a:schemeClr val="accent1"/>
           </a:effectRef>
           <a:fontRef idx="minor">
-            <a:schemeClr val="tx1"/>
+            <a:schemeClr val="lt1"/>
           </a:fontRef>
         </p:style>
-      </p:cxnSp>
-      <p:cxnSp>
-        <p:nvCxnSpPr>
-          <p:cNvPr id="11" name="Conector de Seta Reta 10">
-            <a:extLst>
-              <a:ext uri="{FF2B5EF4-FFF2-40B4-BE49-F238E27FC236}">
-                <a16:creationId xmlns:a16="http://schemas.microsoft.com/office/drawing/2014/main" id="{46A560CF-FCDD-4A64-942A-4D3A76A9850B}"/>
-              </a:ext>
-            </a:extLst>
-          </p:cNvPr>
-          <p:cNvCxnSpPr>
-            <a:cxnSpLocks/>
-            <a:stCxn id="5" idx="3"/>
-          </p:cNvCxnSpPr>
-          <p:nvPr/>
-        </p:nvCxnSpPr>
-        <p:spPr>
-          <a:xfrm>
-            <a:off x="4919133" y="4712002"/>
-            <a:ext cx="1354667" cy="351666"/>
-          </a:xfrm>
-          <a:prstGeom prst="straightConnector1">
-            <a:avLst/>
-          </a:prstGeom>
+        <p:txBody>
+          <a:bodyPr rot="0" spcFirstLastPara="0" vertOverflow="overflow" horzOverflow="overflow" vert="horz" wrap="square" lIns="91440" tIns="45720" rIns="91440" bIns="45720" numCol="1" spcCol="0" rtlCol="0" fromWordArt="0" anchor="ctr" anchorCtr="0" forceAA="0" compatLnSpc="1">
+            <a:prstTxWarp prst="textNoShape">
+              <a:avLst/>
+            </a:prstTxWarp>
+            <a:noAutofit/>
+          </a:bodyPr>
+          <a:lstStyle/>
+          <a:p>
+            <a:pPr algn="ctr"/>
+            <a:r>
+              <a:rPr lang="pt-BR" dirty="0">
+                <a:solidFill>
+                  <a:schemeClr val="tx1"/>
+                </a:solidFill>
+              </a:rPr>
+              <a:t>Insira h3</a:t>
+            </a:r>
+          </a:p>
+        </p:txBody>
+      </p:sp>
+      <p:sp>
+        <p:nvSpPr>
+          <p:cNvPr id="7" name="Seta: para a Direita 6">
+            <a:extLst>
+              <a:ext uri="{FF2B5EF4-FFF2-40B4-BE49-F238E27FC236}">
+                <a16:creationId xmlns:a16="http://schemas.microsoft.com/office/drawing/2014/main" id="{B367AE79-1AEB-4180-AFFC-B1DE08E34035}"/>
+              </a:ext>
+            </a:extLst>
+          </p:cNvPr>
+          <p:cNvSpPr/>
+          <p:nvPr/>
+        </p:nvSpPr>
+        <p:spPr>
+          <a:xfrm>
+            <a:off x="1210733" y="3716867"/>
+            <a:ext cx="1718734" cy="1168400"/>
+          </a:xfrm>
+          <a:prstGeom prst="rightArrow">
+            <a:avLst/>
+          </a:prstGeom>
+          <a:solidFill>
+            <a:srgbClr val="FFFF00"/>
+          </a:solidFill>
           <a:ln w="38100">
             <a:solidFill>
               <a:srgbClr val="FF0000"/>
             </a:solidFill>
-            <a:tailEnd type="triangle"/>
           </a:ln>
         </p:spPr>
         <p:style>
-          <a:lnRef idx="1">
-            <a:schemeClr val="accent1"/>
+          <a:lnRef idx="2">
+            <a:schemeClr val="accent1">
+              <a:shade val="50000"/>
+            </a:schemeClr>
           </a:lnRef>
-          <a:fillRef idx="0">
+          <a:fillRef idx="1">
             <a:schemeClr val="accent1"/>
           </a:fillRef>
           <a:effectRef idx="0">
             <a:schemeClr val="accent1"/>
           </a:effectRef>
           <a:fontRef idx="minor">
-            <a:schemeClr val="tx1"/>
+            <a:schemeClr val="lt1"/>
           </a:fontRef>
         </p:style>
-      </p:cxnSp>
+        <p:txBody>
+          <a:bodyPr rot="0" spcFirstLastPara="0" vertOverflow="overflow" horzOverflow="overflow" vert="horz" wrap="square" lIns="91440" tIns="45720" rIns="91440" bIns="45720" numCol="1" spcCol="0" rtlCol="0" fromWordArt="0" anchor="ctr" anchorCtr="0" forceAA="0" compatLnSpc="1">
+            <a:prstTxWarp prst="textNoShape">
+              <a:avLst/>
+            </a:prstTxWarp>
+            <a:noAutofit/>
+          </a:bodyPr>
+          <a:lstStyle/>
+          <a:p>
+            <a:pPr algn="ctr"/>
+            <a:r>
+              <a:rPr lang="pt-BR" dirty="0">
+                <a:solidFill>
+                  <a:schemeClr val="tx1"/>
+                </a:solidFill>
+              </a:rPr>
+              <a:t>Insira o </a:t>
+            </a:r>
+            <a:r>
+              <a:rPr lang="pt-BR" dirty="0" err="1">
+                <a:solidFill>
+                  <a:schemeClr val="tx1"/>
+                </a:solidFill>
+              </a:rPr>
+              <a:t>table</a:t>
+            </a:r>
+            <a:endParaRPr lang="pt-BR" dirty="0">
+              <a:solidFill>
+                <a:schemeClr val="tx1"/>
+              </a:solidFill>
+            </a:endParaRPr>
+          </a:p>
+        </p:txBody>
+      </p:sp>
     </p:spTree>
     <p:extLst>
       <p:ext uri="{BB962C8B-B14F-4D97-AF65-F5344CB8AC3E}">
-        <p14:creationId xmlns:p14="http://schemas.microsoft.com/office/powerpoint/2010/main" val="574917782"/>
+        <p14:creationId xmlns:p14="http://schemas.microsoft.com/office/powerpoint/2010/main" val="94773565"/>
       </p:ext>
     </p:extLst>
   </p:cSld>
@@ -7247,10 +7283,236 @@
           <a:chExt cx="0" cy="0"/>
         </a:xfrm>
       </p:grpSpPr>
+      <p:pic>
+        <p:nvPicPr>
+          <p:cNvPr id="3" name="Imagem 2">
+            <a:extLst>
+              <a:ext uri="{FF2B5EF4-FFF2-40B4-BE49-F238E27FC236}">
+                <a16:creationId xmlns:a16="http://schemas.microsoft.com/office/drawing/2014/main" id="{D7CEA340-CDAA-442F-9890-CB1489FFB193}"/>
+              </a:ext>
+            </a:extLst>
+          </p:cNvPr>
+          <p:cNvPicPr>
+            <a:picLocks noChangeAspect="1"/>
+          </p:cNvPicPr>
+          <p:nvPr/>
+        </p:nvPicPr>
+        <p:blipFill>
+          <a:blip r:embed="rId2">
+            <a:extLst>
+              <a:ext uri="{28A0092B-C50C-407E-A947-70E740481C1C}">
+                <a14:useLocalDpi xmlns:a14="http://schemas.microsoft.com/office/drawing/2010/main" val="0"/>
+              </a:ext>
+            </a:extLst>
+          </a:blip>
+          <a:stretch>
+            <a:fillRect/>
+          </a:stretch>
+        </p:blipFill>
+        <p:spPr>
+          <a:xfrm>
+            <a:off x="461654" y="1816962"/>
+            <a:ext cx="5778741" cy="3669438"/>
+          </a:xfrm>
+          <a:prstGeom prst="rect">
+            <a:avLst/>
+          </a:prstGeom>
+        </p:spPr>
+      </p:pic>
+      <p:pic>
+        <p:nvPicPr>
+          <p:cNvPr id="4" name="Imagem 3">
+            <a:extLst>
+              <a:ext uri="{FF2B5EF4-FFF2-40B4-BE49-F238E27FC236}">
+                <a16:creationId xmlns:a16="http://schemas.microsoft.com/office/drawing/2014/main" id="{DF64668E-D3B1-4BB3-B52A-071B51A341A0}"/>
+              </a:ext>
+            </a:extLst>
+          </p:cNvPr>
+          <p:cNvPicPr>
+            <a:picLocks noChangeAspect="1"/>
+          </p:cNvPicPr>
+          <p:nvPr/>
+        </p:nvPicPr>
+        <p:blipFill>
+          <a:blip r:embed="rId3"/>
+          <a:stretch>
+            <a:fillRect/>
+          </a:stretch>
+        </p:blipFill>
+        <p:spPr>
+          <a:xfrm>
+            <a:off x="6948796" y="1126067"/>
+            <a:ext cx="4781550" cy="4876800"/>
+          </a:xfrm>
+          <a:prstGeom prst="rect">
+            <a:avLst/>
+          </a:prstGeom>
+        </p:spPr>
+      </p:pic>
+      <p:sp>
+        <p:nvSpPr>
+          <p:cNvPr id="2" name="Retângulo 1">
+            <a:extLst>
+              <a:ext uri="{FF2B5EF4-FFF2-40B4-BE49-F238E27FC236}">
+                <a16:creationId xmlns:a16="http://schemas.microsoft.com/office/drawing/2014/main" id="{41D647ED-7A96-4B72-AB38-C52ADCC0410D}"/>
+              </a:ext>
+            </a:extLst>
+          </p:cNvPr>
+          <p:cNvSpPr/>
+          <p:nvPr/>
+        </p:nvSpPr>
+        <p:spPr>
+          <a:xfrm>
+            <a:off x="1000461" y="2743200"/>
+            <a:ext cx="4808668" cy="1925619"/>
+          </a:xfrm>
+          <a:prstGeom prst="rect">
+            <a:avLst/>
+          </a:prstGeom>
+          <a:noFill/>
+          <a:ln w="38100">
+            <a:solidFill>
+              <a:srgbClr val="FF0000"/>
+            </a:solidFill>
+          </a:ln>
+        </p:spPr>
+        <p:style>
+          <a:lnRef idx="2">
+            <a:schemeClr val="accent1">
+              <a:shade val="50000"/>
+            </a:schemeClr>
+          </a:lnRef>
+          <a:fillRef idx="1">
+            <a:schemeClr val="accent1"/>
+          </a:fillRef>
+          <a:effectRef idx="0">
+            <a:schemeClr val="accent1"/>
+          </a:effectRef>
+          <a:fontRef idx="minor">
+            <a:schemeClr val="lt1"/>
+          </a:fontRef>
+        </p:style>
+        <p:txBody>
+          <a:bodyPr rtlCol="0" anchor="ctr"/>
+          <a:lstStyle/>
+          <a:p>
+            <a:pPr algn="ctr"/>
+            <a:endParaRPr lang="pt-BR"/>
+          </a:p>
+        </p:txBody>
+      </p:sp>
+      <p:sp>
+        <p:nvSpPr>
+          <p:cNvPr id="5" name="Seta: para a Direita 4">
+            <a:extLst>
+              <a:ext uri="{FF2B5EF4-FFF2-40B4-BE49-F238E27FC236}">
+                <a16:creationId xmlns:a16="http://schemas.microsoft.com/office/drawing/2014/main" id="{24056D73-32ED-4EAF-9E66-1BE6B046E439}"/>
+              </a:ext>
+            </a:extLst>
+          </p:cNvPr>
+          <p:cNvSpPr/>
+          <p:nvPr/>
+        </p:nvSpPr>
+        <p:spPr>
+          <a:xfrm>
+            <a:off x="0" y="3313355"/>
+            <a:ext cx="882127" cy="828339"/>
+          </a:xfrm>
+          <a:prstGeom prst="rightArrow">
+            <a:avLst/>
+          </a:prstGeom>
+          <a:solidFill>
+            <a:srgbClr val="FFFF00"/>
+          </a:solidFill>
+          <a:ln w="38100">
+            <a:solidFill>
+              <a:srgbClr val="FF0000"/>
+            </a:solidFill>
+          </a:ln>
+        </p:spPr>
+        <p:style>
+          <a:lnRef idx="2">
+            <a:schemeClr val="accent1">
+              <a:shade val="50000"/>
+            </a:schemeClr>
+          </a:lnRef>
+          <a:fillRef idx="1">
+            <a:schemeClr val="accent1"/>
+          </a:fillRef>
+          <a:effectRef idx="0">
+            <a:schemeClr val="accent1"/>
+          </a:effectRef>
+          <a:fontRef idx="minor">
+            <a:schemeClr val="lt1"/>
+          </a:fontRef>
+        </p:style>
+        <p:txBody>
+          <a:bodyPr rtlCol="0" anchor="ctr"/>
+          <a:lstStyle/>
+          <a:p>
+            <a:pPr algn="ctr"/>
+            <a:endParaRPr lang="pt-BR"/>
+          </a:p>
+        </p:txBody>
+      </p:sp>
+      <p:sp>
+        <p:nvSpPr>
+          <p:cNvPr id="6" name="Seta: para a Direita 5">
+            <a:extLst>
+              <a:ext uri="{FF2B5EF4-FFF2-40B4-BE49-F238E27FC236}">
+                <a16:creationId xmlns:a16="http://schemas.microsoft.com/office/drawing/2014/main" id="{ABD7A7AD-B065-4E7D-BE6A-3AC97327E8BC}"/>
+              </a:ext>
+            </a:extLst>
+          </p:cNvPr>
+          <p:cNvSpPr/>
+          <p:nvPr/>
+        </p:nvSpPr>
+        <p:spPr>
+          <a:xfrm rot="1559765">
+            <a:off x="5670516" y="4388872"/>
+            <a:ext cx="1237130" cy="473336"/>
+          </a:xfrm>
+          <a:prstGeom prst="rightArrow">
+            <a:avLst/>
+          </a:prstGeom>
+          <a:solidFill>
+            <a:srgbClr val="FFFF00"/>
+          </a:solidFill>
+          <a:ln w="38100">
+            <a:solidFill>
+              <a:srgbClr val="FF0000"/>
+            </a:solidFill>
+          </a:ln>
+        </p:spPr>
+        <p:style>
+          <a:lnRef idx="2">
+            <a:schemeClr val="accent1">
+              <a:shade val="50000"/>
+            </a:schemeClr>
+          </a:lnRef>
+          <a:fillRef idx="1">
+            <a:schemeClr val="accent1"/>
+          </a:fillRef>
+          <a:effectRef idx="0">
+            <a:schemeClr val="accent1"/>
+          </a:effectRef>
+          <a:fontRef idx="minor">
+            <a:schemeClr val="lt1"/>
+          </a:fontRef>
+        </p:style>
+        <p:txBody>
+          <a:bodyPr rtlCol="0" anchor="ctr"/>
+          <a:lstStyle/>
+          <a:p>
+            <a:pPr algn="ctr"/>
+            <a:endParaRPr lang="pt-BR"/>
+          </a:p>
+        </p:txBody>
+      </p:sp>
     </p:spTree>
     <p:extLst>
       <p:ext uri="{BB962C8B-B14F-4D97-AF65-F5344CB8AC3E}">
-        <p14:creationId xmlns:p14="http://schemas.microsoft.com/office/powerpoint/2010/main" val="1048976227"/>
+        <p14:creationId xmlns:p14="http://schemas.microsoft.com/office/powerpoint/2010/main" val="3967689529"/>
       </p:ext>
     </p:extLst>
   </p:cSld>
@@ -7277,10 +7539,162 @@
           <a:chExt cx="0" cy="0"/>
         </a:xfrm>
       </p:grpSpPr>
+      <p:pic>
+        <p:nvPicPr>
+          <p:cNvPr id="3" name="Imagem 2">
+            <a:extLst>
+              <a:ext uri="{FF2B5EF4-FFF2-40B4-BE49-F238E27FC236}">
+                <a16:creationId xmlns:a16="http://schemas.microsoft.com/office/drawing/2014/main" id="{4070E73D-080F-44D2-9806-7BD12CBB96F8}"/>
+              </a:ext>
+            </a:extLst>
+          </p:cNvPr>
+          <p:cNvPicPr>
+            <a:picLocks noChangeAspect="1"/>
+          </p:cNvPicPr>
+          <p:nvPr/>
+        </p:nvPicPr>
+        <p:blipFill>
+          <a:blip r:embed="rId2">
+            <a:extLst>
+              <a:ext uri="{28A0092B-C50C-407E-A947-70E740481C1C}">
+                <a14:useLocalDpi xmlns:a14="http://schemas.microsoft.com/office/drawing/2010/main" val="0"/>
+              </a:ext>
+            </a:extLst>
+          </a:blip>
+          <a:stretch>
+            <a:fillRect/>
+          </a:stretch>
+        </p:blipFill>
+        <p:spPr>
+          <a:xfrm>
+            <a:off x="989887" y="366285"/>
+            <a:ext cx="10212225" cy="6125430"/>
+          </a:xfrm>
+          <a:prstGeom prst="rect">
+            <a:avLst/>
+          </a:prstGeom>
+        </p:spPr>
+      </p:pic>
+      <p:sp>
+        <p:nvSpPr>
+          <p:cNvPr id="4" name="Retângulo 3">
+            <a:extLst>
+              <a:ext uri="{FF2B5EF4-FFF2-40B4-BE49-F238E27FC236}">
+                <a16:creationId xmlns:a16="http://schemas.microsoft.com/office/drawing/2014/main" id="{D949A4FE-EDA1-4693-8E03-71C05149E938}"/>
+              </a:ext>
+            </a:extLst>
+          </p:cNvPr>
+          <p:cNvSpPr/>
+          <p:nvPr/>
+        </p:nvSpPr>
+        <p:spPr>
+          <a:xfrm>
+            <a:off x="2497667" y="2988733"/>
+            <a:ext cx="2438400" cy="1862667"/>
+          </a:xfrm>
+          <a:prstGeom prst="rect">
+            <a:avLst/>
+          </a:prstGeom>
+          <a:noFill/>
+          <a:ln w="38100">
+            <a:solidFill>
+              <a:srgbClr val="FF0000"/>
+            </a:solidFill>
+          </a:ln>
+        </p:spPr>
+        <p:style>
+          <a:lnRef idx="2">
+            <a:schemeClr val="accent1">
+              <a:shade val="50000"/>
+            </a:schemeClr>
+          </a:lnRef>
+          <a:fillRef idx="1">
+            <a:schemeClr val="accent1"/>
+          </a:fillRef>
+          <a:effectRef idx="0">
+            <a:schemeClr val="accent1"/>
+          </a:effectRef>
+          <a:fontRef idx="minor">
+            <a:schemeClr val="lt1"/>
+          </a:fontRef>
+        </p:style>
+        <p:txBody>
+          <a:bodyPr rot="0" spcFirstLastPara="0" vertOverflow="overflow" horzOverflow="overflow" vert="horz" wrap="square" lIns="91440" tIns="45720" rIns="91440" bIns="45720" numCol="1" spcCol="0" rtlCol="0" fromWordArt="0" anchor="ctr" anchorCtr="0" forceAA="0" compatLnSpc="1">
+            <a:prstTxWarp prst="textNoShape">
+              <a:avLst/>
+            </a:prstTxWarp>
+            <a:noAutofit/>
+          </a:bodyPr>
+          <a:lstStyle/>
+          <a:p>
+            <a:pPr algn="ctr"/>
+            <a:endParaRPr lang="pt-BR"/>
+          </a:p>
+        </p:txBody>
+      </p:sp>
+      <p:sp>
+        <p:nvSpPr>
+          <p:cNvPr id="5" name="Seta: para a Direita 4">
+            <a:extLst>
+              <a:ext uri="{FF2B5EF4-FFF2-40B4-BE49-F238E27FC236}">
+                <a16:creationId xmlns:a16="http://schemas.microsoft.com/office/drawing/2014/main" id="{B524CE70-C116-4C85-8A7E-9C70B6AFA349}"/>
+              </a:ext>
+            </a:extLst>
+          </p:cNvPr>
+          <p:cNvSpPr/>
+          <p:nvPr/>
+        </p:nvSpPr>
+        <p:spPr>
+          <a:xfrm rot="1179653">
+            <a:off x="4789699" y="4281822"/>
+            <a:ext cx="1507639" cy="601134"/>
+          </a:xfrm>
+          <a:prstGeom prst="rightArrow">
+            <a:avLst/>
+          </a:prstGeom>
+          <a:solidFill>
+            <a:srgbClr val="FFFF00"/>
+          </a:solidFill>
+          <a:ln w="38100">
+            <a:solidFill>
+              <a:srgbClr val="FF0000"/>
+            </a:solidFill>
+          </a:ln>
+        </p:spPr>
+        <p:style>
+          <a:lnRef idx="2">
+            <a:schemeClr val="accent1">
+              <a:shade val="50000"/>
+            </a:schemeClr>
+          </a:lnRef>
+          <a:fillRef idx="1">
+            <a:schemeClr val="accent1"/>
+          </a:fillRef>
+          <a:effectRef idx="0">
+            <a:schemeClr val="accent1"/>
+          </a:effectRef>
+          <a:fontRef idx="minor">
+            <a:schemeClr val="lt1"/>
+          </a:fontRef>
+        </p:style>
+        <p:txBody>
+          <a:bodyPr rot="0" spcFirstLastPara="0" vertOverflow="overflow" horzOverflow="overflow" vert="horz" wrap="square" lIns="91440" tIns="45720" rIns="91440" bIns="45720" numCol="1" spcCol="0" rtlCol="0" fromWordArt="0" anchor="ctr" anchorCtr="0" forceAA="0" compatLnSpc="1">
+            <a:prstTxWarp prst="textNoShape">
+              <a:avLst/>
+            </a:prstTxWarp>
+            <a:noAutofit/>
+          </a:bodyPr>
+          <a:lstStyle/>
+          <a:p>
+            <a:pPr algn="ctr"/>
+            <a:endParaRPr lang="pt-BR"/>
+          </a:p>
+        </p:txBody>
+      </p:sp>
     </p:spTree>
     <p:extLst>
       <p:ext uri="{BB962C8B-B14F-4D97-AF65-F5344CB8AC3E}">
-        <p14:creationId xmlns:p14="http://schemas.microsoft.com/office/powerpoint/2010/main" val="2177057709"/>
+        <p14:creationId xmlns:p14="http://schemas.microsoft.com/office/powerpoint/2010/main" val="2316724026"/>
       </p:ext>
     </p:extLst>
   </p:cSld>
@@ -7307,10 +7721,162 @@
           <a:chExt cx="0" cy="0"/>
         </a:xfrm>
       </p:grpSpPr>
+      <p:pic>
+        <p:nvPicPr>
+          <p:cNvPr id="3" name="Imagem 2">
+            <a:extLst>
+              <a:ext uri="{FF2B5EF4-FFF2-40B4-BE49-F238E27FC236}">
+                <a16:creationId xmlns:a16="http://schemas.microsoft.com/office/drawing/2014/main" id="{2D13498A-81C0-4D45-8438-4E0502B5E9A2}"/>
+              </a:ext>
+            </a:extLst>
+          </p:cNvPr>
+          <p:cNvPicPr>
+            <a:picLocks noChangeAspect="1"/>
+          </p:cNvPicPr>
+          <p:nvPr/>
+        </p:nvPicPr>
+        <p:blipFill>
+          <a:blip r:embed="rId2">
+            <a:extLst>
+              <a:ext uri="{28A0092B-C50C-407E-A947-70E740481C1C}">
+                <a14:useLocalDpi xmlns:a14="http://schemas.microsoft.com/office/drawing/2010/main" val="0"/>
+              </a:ext>
+            </a:extLst>
+          </a:blip>
+          <a:stretch>
+            <a:fillRect/>
+          </a:stretch>
+        </p:blipFill>
+        <p:spPr>
+          <a:xfrm>
+            <a:off x="1504309" y="599680"/>
+            <a:ext cx="9183382" cy="5658640"/>
+          </a:xfrm>
+          <a:prstGeom prst="rect">
+            <a:avLst/>
+          </a:prstGeom>
+        </p:spPr>
+      </p:pic>
+      <p:sp>
+        <p:nvSpPr>
+          <p:cNvPr id="4" name="Retângulo 3">
+            <a:extLst>
+              <a:ext uri="{FF2B5EF4-FFF2-40B4-BE49-F238E27FC236}">
+                <a16:creationId xmlns:a16="http://schemas.microsoft.com/office/drawing/2014/main" id="{19CBE482-A885-4299-991D-DBC165FA2C7D}"/>
+              </a:ext>
+            </a:extLst>
+          </p:cNvPr>
+          <p:cNvSpPr/>
+          <p:nvPr/>
+        </p:nvSpPr>
+        <p:spPr>
+          <a:xfrm>
+            <a:off x="2032000" y="2734733"/>
+            <a:ext cx="3403600" cy="2904067"/>
+          </a:xfrm>
+          <a:prstGeom prst="rect">
+            <a:avLst/>
+          </a:prstGeom>
+          <a:noFill/>
+          <a:ln w="38100">
+            <a:solidFill>
+              <a:srgbClr val="FF0000"/>
+            </a:solidFill>
+          </a:ln>
+        </p:spPr>
+        <p:style>
+          <a:lnRef idx="2">
+            <a:schemeClr val="accent1">
+              <a:shade val="50000"/>
+            </a:schemeClr>
+          </a:lnRef>
+          <a:fillRef idx="1">
+            <a:schemeClr val="accent1"/>
+          </a:fillRef>
+          <a:effectRef idx="0">
+            <a:schemeClr val="accent1"/>
+          </a:effectRef>
+          <a:fontRef idx="minor">
+            <a:schemeClr val="lt1"/>
+          </a:fontRef>
+        </p:style>
+        <p:txBody>
+          <a:bodyPr rot="0" spcFirstLastPara="0" vertOverflow="overflow" horzOverflow="overflow" vert="horz" wrap="square" lIns="91440" tIns="45720" rIns="91440" bIns="45720" numCol="1" spcCol="0" rtlCol="0" fromWordArt="0" anchor="ctr" anchorCtr="0" forceAA="0" compatLnSpc="1">
+            <a:prstTxWarp prst="textNoShape">
+              <a:avLst/>
+            </a:prstTxWarp>
+            <a:noAutofit/>
+          </a:bodyPr>
+          <a:lstStyle/>
+          <a:p>
+            <a:pPr algn="ctr"/>
+            <a:endParaRPr lang="pt-BR"/>
+          </a:p>
+        </p:txBody>
+      </p:sp>
+      <p:sp>
+        <p:nvSpPr>
+          <p:cNvPr id="5" name="Seta: para a Direita 4">
+            <a:extLst>
+              <a:ext uri="{FF2B5EF4-FFF2-40B4-BE49-F238E27FC236}">
+                <a16:creationId xmlns:a16="http://schemas.microsoft.com/office/drawing/2014/main" id="{994E3EC8-F326-4319-BD36-47C158F3264C}"/>
+              </a:ext>
+            </a:extLst>
+          </p:cNvPr>
+          <p:cNvSpPr/>
+          <p:nvPr/>
+        </p:nvSpPr>
+        <p:spPr>
+          <a:xfrm>
+            <a:off x="4944533" y="4851400"/>
+            <a:ext cx="728134" cy="592667"/>
+          </a:xfrm>
+          <a:prstGeom prst="rightArrow">
+            <a:avLst/>
+          </a:prstGeom>
+          <a:solidFill>
+            <a:srgbClr val="FFFF00"/>
+          </a:solidFill>
+          <a:ln w="38100">
+            <a:solidFill>
+              <a:srgbClr val="FF0000"/>
+            </a:solidFill>
+          </a:ln>
+        </p:spPr>
+        <p:style>
+          <a:lnRef idx="2">
+            <a:schemeClr val="accent1">
+              <a:shade val="50000"/>
+            </a:schemeClr>
+          </a:lnRef>
+          <a:fillRef idx="1">
+            <a:schemeClr val="accent1"/>
+          </a:fillRef>
+          <a:effectRef idx="0">
+            <a:schemeClr val="accent1"/>
+          </a:effectRef>
+          <a:fontRef idx="minor">
+            <a:schemeClr val="lt1"/>
+          </a:fontRef>
+        </p:style>
+        <p:txBody>
+          <a:bodyPr rot="0" spcFirstLastPara="0" vertOverflow="overflow" horzOverflow="overflow" vert="horz" wrap="square" lIns="91440" tIns="45720" rIns="91440" bIns="45720" numCol="1" spcCol="0" rtlCol="0" fromWordArt="0" anchor="ctr" anchorCtr="0" forceAA="0" compatLnSpc="1">
+            <a:prstTxWarp prst="textNoShape">
+              <a:avLst/>
+            </a:prstTxWarp>
+            <a:noAutofit/>
+          </a:bodyPr>
+          <a:lstStyle/>
+          <a:p>
+            <a:pPr algn="ctr"/>
+            <a:endParaRPr lang="pt-BR"/>
+          </a:p>
+        </p:txBody>
+      </p:sp>
     </p:spTree>
     <p:extLst>
       <p:ext uri="{BB962C8B-B14F-4D97-AF65-F5344CB8AC3E}">
-        <p14:creationId xmlns:p14="http://schemas.microsoft.com/office/powerpoint/2010/main" val="3779089914"/>
+        <p14:creationId xmlns:p14="http://schemas.microsoft.com/office/powerpoint/2010/main" val="875468880"/>
       </p:ext>
     </p:extLst>
   </p:cSld>
@@ -7337,10 +7903,249 @@
           <a:chExt cx="0" cy="0"/>
         </a:xfrm>
       </p:grpSpPr>
+      <p:pic>
+        <p:nvPicPr>
+          <p:cNvPr id="3" name="Imagem 2">
+            <a:extLst>
+              <a:ext uri="{FF2B5EF4-FFF2-40B4-BE49-F238E27FC236}">
+                <a16:creationId xmlns:a16="http://schemas.microsoft.com/office/drawing/2014/main" id="{587BDD93-F85A-4CC0-AC15-B842A33400CD}"/>
+              </a:ext>
+            </a:extLst>
+          </p:cNvPr>
+          <p:cNvPicPr>
+            <a:picLocks noChangeAspect="1"/>
+          </p:cNvPicPr>
+          <p:nvPr/>
+        </p:nvPicPr>
+        <p:blipFill>
+          <a:blip r:embed="rId2">
+            <a:extLst>
+              <a:ext uri="{28A0092B-C50C-407E-A947-70E740481C1C}">
+                <a14:useLocalDpi xmlns:a14="http://schemas.microsoft.com/office/drawing/2010/main" val="0"/>
+              </a:ext>
+            </a:extLst>
+          </a:blip>
+          <a:stretch>
+            <a:fillRect/>
+          </a:stretch>
+        </p:blipFill>
+        <p:spPr>
+          <a:xfrm>
+            <a:off x="1056571" y="161469"/>
+            <a:ext cx="10078857" cy="6535062"/>
+          </a:xfrm>
+          <a:prstGeom prst="rect">
+            <a:avLst/>
+          </a:prstGeom>
+        </p:spPr>
+      </p:pic>
+      <p:sp>
+        <p:nvSpPr>
+          <p:cNvPr id="4" name="Retângulo 3">
+            <a:extLst>
+              <a:ext uri="{FF2B5EF4-FFF2-40B4-BE49-F238E27FC236}">
+                <a16:creationId xmlns:a16="http://schemas.microsoft.com/office/drawing/2014/main" id="{7A9A1EF6-8F58-43F7-8181-2512E1780D52}"/>
+              </a:ext>
+            </a:extLst>
+          </p:cNvPr>
+          <p:cNvSpPr/>
+          <p:nvPr/>
+        </p:nvSpPr>
+        <p:spPr>
+          <a:xfrm>
+            <a:off x="1566333" y="161470"/>
+            <a:ext cx="3352800" cy="2869598"/>
+          </a:xfrm>
+          <a:prstGeom prst="rect">
+            <a:avLst/>
+          </a:prstGeom>
+          <a:noFill/>
+          <a:ln w="38100">
+            <a:solidFill>
+              <a:srgbClr val="FF0000"/>
+            </a:solidFill>
+          </a:ln>
+        </p:spPr>
+        <p:style>
+          <a:lnRef idx="2">
+            <a:schemeClr val="accent1">
+              <a:shade val="50000"/>
+            </a:schemeClr>
+          </a:lnRef>
+          <a:fillRef idx="1">
+            <a:schemeClr val="accent1"/>
+          </a:fillRef>
+          <a:effectRef idx="0">
+            <a:schemeClr val="accent1"/>
+          </a:effectRef>
+          <a:fontRef idx="minor">
+            <a:schemeClr val="lt1"/>
+          </a:fontRef>
+        </p:style>
+        <p:txBody>
+          <a:bodyPr rot="0" spcFirstLastPara="0" vertOverflow="overflow" horzOverflow="overflow" vert="horz" wrap="square" lIns="91440" tIns="45720" rIns="91440" bIns="45720" numCol="1" spcCol="0" rtlCol="0" fromWordArt="0" anchor="ctr" anchorCtr="0" forceAA="0" compatLnSpc="1">
+            <a:prstTxWarp prst="textNoShape">
+              <a:avLst/>
+            </a:prstTxWarp>
+            <a:noAutofit/>
+          </a:bodyPr>
+          <a:lstStyle/>
+          <a:p>
+            <a:pPr algn="ctr"/>
+            <a:endParaRPr lang="pt-BR"/>
+          </a:p>
+        </p:txBody>
+      </p:sp>
+      <p:sp>
+        <p:nvSpPr>
+          <p:cNvPr id="5" name="Retângulo 4">
+            <a:extLst>
+              <a:ext uri="{FF2B5EF4-FFF2-40B4-BE49-F238E27FC236}">
+                <a16:creationId xmlns:a16="http://schemas.microsoft.com/office/drawing/2014/main" id="{6409404A-DA65-4AC0-8DC1-6860B8F955D5}"/>
+              </a:ext>
+            </a:extLst>
+          </p:cNvPr>
+          <p:cNvSpPr/>
+          <p:nvPr/>
+        </p:nvSpPr>
+        <p:spPr>
+          <a:xfrm>
+            <a:off x="1566333" y="3277203"/>
+            <a:ext cx="3352800" cy="2869598"/>
+          </a:xfrm>
+          <a:prstGeom prst="rect">
+            <a:avLst/>
+          </a:prstGeom>
+          <a:noFill/>
+          <a:ln w="38100">
+            <a:solidFill>
+              <a:srgbClr val="FF0000"/>
+            </a:solidFill>
+          </a:ln>
+        </p:spPr>
+        <p:style>
+          <a:lnRef idx="2">
+            <a:schemeClr val="accent1">
+              <a:shade val="50000"/>
+            </a:schemeClr>
+          </a:lnRef>
+          <a:fillRef idx="1">
+            <a:schemeClr val="accent1"/>
+          </a:fillRef>
+          <a:effectRef idx="0">
+            <a:schemeClr val="accent1"/>
+          </a:effectRef>
+          <a:fontRef idx="minor">
+            <a:schemeClr val="lt1"/>
+          </a:fontRef>
+        </p:style>
+        <p:txBody>
+          <a:bodyPr rot="0" spcFirstLastPara="0" vertOverflow="overflow" horzOverflow="overflow" vert="horz" wrap="square" lIns="91440" tIns="45720" rIns="91440" bIns="45720" numCol="1" spcCol="0" rtlCol="0" fromWordArt="0" anchor="ctr" anchorCtr="0" forceAA="0" compatLnSpc="1">
+            <a:prstTxWarp prst="textNoShape">
+              <a:avLst/>
+            </a:prstTxWarp>
+            <a:noAutofit/>
+          </a:bodyPr>
+          <a:lstStyle/>
+          <a:p>
+            <a:pPr algn="ctr"/>
+            <a:endParaRPr lang="pt-BR"/>
+          </a:p>
+        </p:txBody>
+      </p:sp>
+      <p:cxnSp>
+        <p:nvCxnSpPr>
+          <p:cNvPr id="8" name="Conector de Seta Reta 7">
+            <a:extLst>
+              <a:ext uri="{FF2B5EF4-FFF2-40B4-BE49-F238E27FC236}">
+                <a16:creationId xmlns:a16="http://schemas.microsoft.com/office/drawing/2014/main" id="{C35B1509-B9BC-462E-A36E-A547AC29392C}"/>
+              </a:ext>
+            </a:extLst>
+          </p:cNvPr>
+          <p:cNvCxnSpPr>
+            <a:cxnSpLocks/>
+          </p:cNvCxnSpPr>
+          <p:nvPr/>
+        </p:nvCxnSpPr>
+        <p:spPr>
+          <a:xfrm>
+            <a:off x="4978400" y="3031068"/>
+            <a:ext cx="1236133" cy="1786465"/>
+          </a:xfrm>
+          <a:prstGeom prst="straightConnector1">
+            <a:avLst/>
+          </a:prstGeom>
+          <a:ln w="38100">
+            <a:solidFill>
+              <a:srgbClr val="FF0000"/>
+            </a:solidFill>
+            <a:tailEnd type="triangle"/>
+          </a:ln>
+        </p:spPr>
+        <p:style>
+          <a:lnRef idx="1">
+            <a:schemeClr val="accent1"/>
+          </a:lnRef>
+          <a:fillRef idx="0">
+            <a:schemeClr val="accent1"/>
+          </a:fillRef>
+          <a:effectRef idx="0">
+            <a:schemeClr val="accent1"/>
+          </a:effectRef>
+          <a:fontRef idx="minor">
+            <a:schemeClr val="tx1"/>
+          </a:fontRef>
+        </p:style>
+      </p:cxnSp>
+      <p:cxnSp>
+        <p:nvCxnSpPr>
+          <p:cNvPr id="11" name="Conector de Seta Reta 10">
+            <a:extLst>
+              <a:ext uri="{FF2B5EF4-FFF2-40B4-BE49-F238E27FC236}">
+                <a16:creationId xmlns:a16="http://schemas.microsoft.com/office/drawing/2014/main" id="{46A560CF-FCDD-4A64-942A-4D3A76A9850B}"/>
+              </a:ext>
+            </a:extLst>
+          </p:cNvPr>
+          <p:cNvCxnSpPr>
+            <a:cxnSpLocks/>
+            <a:stCxn id="5" idx="3"/>
+          </p:cNvCxnSpPr>
+          <p:nvPr/>
+        </p:nvCxnSpPr>
+        <p:spPr>
+          <a:xfrm>
+            <a:off x="4919133" y="4712002"/>
+            <a:ext cx="1354667" cy="351666"/>
+          </a:xfrm>
+          <a:prstGeom prst="straightConnector1">
+            <a:avLst/>
+          </a:prstGeom>
+          <a:ln w="38100">
+            <a:solidFill>
+              <a:srgbClr val="FF0000"/>
+            </a:solidFill>
+            <a:tailEnd type="triangle"/>
+          </a:ln>
+        </p:spPr>
+        <p:style>
+          <a:lnRef idx="1">
+            <a:schemeClr val="accent1"/>
+          </a:lnRef>
+          <a:fillRef idx="0">
+            <a:schemeClr val="accent1"/>
+          </a:fillRef>
+          <a:effectRef idx="0">
+            <a:schemeClr val="accent1"/>
+          </a:effectRef>
+          <a:fontRef idx="minor">
+            <a:schemeClr val="tx1"/>
+          </a:fontRef>
+        </p:style>
+      </p:cxnSp>
     </p:spTree>
     <p:extLst>
       <p:ext uri="{BB962C8B-B14F-4D97-AF65-F5344CB8AC3E}">
-        <p14:creationId xmlns:p14="http://schemas.microsoft.com/office/powerpoint/2010/main" val="3883236559"/>
+        <p14:creationId xmlns:p14="http://schemas.microsoft.com/office/powerpoint/2010/main" val="574917782"/>
       </p:ext>
     </p:extLst>
   </p:cSld>
@@ -7367,10 +8172,126 @@
           <a:chExt cx="0" cy="0"/>
         </a:xfrm>
       </p:grpSpPr>
+      <p:pic>
+        <p:nvPicPr>
+          <p:cNvPr id="3" name="Imagem 2">
+            <a:extLst>
+              <a:ext uri="{FF2B5EF4-FFF2-40B4-BE49-F238E27FC236}">
+                <a16:creationId xmlns:a16="http://schemas.microsoft.com/office/drawing/2014/main" id="{EE905C2A-DFE7-4596-A1CD-D92F41C05507}"/>
+              </a:ext>
+            </a:extLst>
+          </p:cNvPr>
+          <p:cNvPicPr>
+            <a:picLocks noChangeAspect="1"/>
+          </p:cNvPicPr>
+          <p:nvPr/>
+        </p:nvPicPr>
+        <p:blipFill>
+          <a:blip r:embed="rId2">
+            <a:extLst>
+              <a:ext uri="{28A0092B-C50C-407E-A947-70E740481C1C}">
+                <a14:useLocalDpi xmlns:a14="http://schemas.microsoft.com/office/drawing/2010/main" val="0"/>
+              </a:ext>
+            </a:extLst>
+          </a:blip>
+          <a:stretch>
+            <a:fillRect/>
+          </a:stretch>
+        </p:blipFill>
+        <p:spPr>
+          <a:xfrm>
+            <a:off x="305896" y="689953"/>
+            <a:ext cx="5557022" cy="6004973"/>
+          </a:xfrm>
+          <a:prstGeom prst="rect">
+            <a:avLst/>
+          </a:prstGeom>
+        </p:spPr>
+      </p:pic>
+      <p:pic>
+        <p:nvPicPr>
+          <p:cNvPr id="7" name="Imagem 6">
+            <a:extLst>
+              <a:ext uri="{FF2B5EF4-FFF2-40B4-BE49-F238E27FC236}">
+                <a16:creationId xmlns:a16="http://schemas.microsoft.com/office/drawing/2014/main" id="{2FF30652-2417-4C17-9E77-46389013BFBC}"/>
+              </a:ext>
+            </a:extLst>
+          </p:cNvPr>
+          <p:cNvPicPr>
+            <a:picLocks noChangeAspect="1"/>
+          </p:cNvPicPr>
+          <p:nvPr/>
+        </p:nvPicPr>
+        <p:blipFill>
+          <a:blip r:embed="rId3">
+            <a:extLst>
+              <a:ext uri="{28A0092B-C50C-407E-A947-70E740481C1C}">
+                <a14:useLocalDpi xmlns:a14="http://schemas.microsoft.com/office/drawing/2010/main" val="0"/>
+              </a:ext>
+            </a:extLst>
+          </a:blip>
+          <a:stretch>
+            <a:fillRect/>
+          </a:stretch>
+        </p:blipFill>
+        <p:spPr>
+          <a:xfrm>
+            <a:off x="7136647" y="1317879"/>
+            <a:ext cx="4534928" cy="3888822"/>
+          </a:xfrm>
+          <a:prstGeom prst="rect">
+            <a:avLst/>
+          </a:prstGeom>
+        </p:spPr>
+      </p:pic>
+      <p:cxnSp>
+        <p:nvCxnSpPr>
+          <p:cNvPr id="5" name="Conector de Seta Reta 4">
+            <a:extLst>
+              <a:ext uri="{FF2B5EF4-FFF2-40B4-BE49-F238E27FC236}">
+                <a16:creationId xmlns:a16="http://schemas.microsoft.com/office/drawing/2014/main" id="{AA1DCA6F-8612-4FA4-A55B-1BD233677BC9}"/>
+              </a:ext>
+            </a:extLst>
+          </p:cNvPr>
+          <p:cNvCxnSpPr>
+            <a:cxnSpLocks/>
+          </p:cNvCxnSpPr>
+          <p:nvPr/>
+        </p:nvCxnSpPr>
+        <p:spPr>
+          <a:xfrm flipV="1">
+            <a:off x="3141233" y="2528047"/>
+            <a:ext cx="4851699" cy="333487"/>
+          </a:xfrm>
+          <a:prstGeom prst="straightConnector1">
+            <a:avLst/>
+          </a:prstGeom>
+          <a:ln w="38100">
+            <a:solidFill>
+              <a:srgbClr val="FF0000"/>
+            </a:solidFill>
+            <a:tailEnd type="triangle"/>
+          </a:ln>
+        </p:spPr>
+        <p:style>
+          <a:lnRef idx="1">
+            <a:schemeClr val="accent1"/>
+          </a:lnRef>
+          <a:fillRef idx="0">
+            <a:schemeClr val="accent1"/>
+          </a:fillRef>
+          <a:effectRef idx="0">
+            <a:schemeClr val="accent1"/>
+          </a:effectRef>
+          <a:fontRef idx="minor">
+            <a:schemeClr val="tx1"/>
+          </a:fontRef>
+        </p:style>
+      </p:cxnSp>
     </p:spTree>
     <p:extLst>
       <p:ext uri="{BB962C8B-B14F-4D97-AF65-F5344CB8AC3E}">
-        <p14:creationId xmlns:p14="http://schemas.microsoft.com/office/powerpoint/2010/main" val="3179840118"/>
+        <p14:creationId xmlns:p14="http://schemas.microsoft.com/office/powerpoint/2010/main" val="1048976227"/>
       </p:ext>
     </p:extLst>
   </p:cSld>
@@ -7397,10 +8318,220 @@
           <a:chExt cx="0" cy="0"/>
         </a:xfrm>
       </p:grpSpPr>
+      <p:pic>
+        <p:nvPicPr>
+          <p:cNvPr id="2" name="Imagem 1">
+            <a:extLst>
+              <a:ext uri="{FF2B5EF4-FFF2-40B4-BE49-F238E27FC236}">
+                <a16:creationId xmlns:a16="http://schemas.microsoft.com/office/drawing/2014/main" id="{431F1B8B-8E2D-4029-8F57-1EA190A6F262}"/>
+              </a:ext>
+            </a:extLst>
+          </p:cNvPr>
+          <p:cNvPicPr>
+            <a:picLocks noChangeAspect="1"/>
+          </p:cNvPicPr>
+          <p:nvPr/>
+        </p:nvPicPr>
+        <p:blipFill>
+          <a:blip r:embed="rId2">
+            <a:extLst>
+              <a:ext uri="{28A0092B-C50C-407E-A947-70E740481C1C}">
+                <a14:useLocalDpi xmlns:a14="http://schemas.microsoft.com/office/drawing/2010/main" val="0"/>
+              </a:ext>
+            </a:extLst>
+          </a:blip>
+          <a:stretch>
+            <a:fillRect/>
+          </a:stretch>
+        </p:blipFill>
+        <p:spPr>
+          <a:xfrm>
+            <a:off x="337814" y="242114"/>
+            <a:ext cx="4534928" cy="3888822"/>
+          </a:xfrm>
+          <a:prstGeom prst="rect">
+            <a:avLst/>
+          </a:prstGeom>
+        </p:spPr>
+      </p:pic>
+      <p:pic>
+        <p:nvPicPr>
+          <p:cNvPr id="4" name="Imagem 3">
+            <a:extLst>
+              <a:ext uri="{FF2B5EF4-FFF2-40B4-BE49-F238E27FC236}">
+                <a16:creationId xmlns:a16="http://schemas.microsoft.com/office/drawing/2014/main" id="{5BD68C1F-FD03-4FBE-8D18-FE493100E3E6}"/>
+              </a:ext>
+            </a:extLst>
+          </p:cNvPr>
+          <p:cNvPicPr>
+            <a:picLocks noChangeAspect="1"/>
+          </p:cNvPicPr>
+          <p:nvPr/>
+        </p:nvPicPr>
+        <p:blipFill>
+          <a:blip r:embed="rId3">
+            <a:extLst>
+              <a:ext uri="{28A0092B-C50C-407E-A947-70E740481C1C}">
+                <a14:useLocalDpi xmlns:a14="http://schemas.microsoft.com/office/drawing/2010/main" val="0"/>
+              </a:ext>
+            </a:extLst>
+          </a:blip>
+          <a:stretch>
+            <a:fillRect/>
+          </a:stretch>
+        </p:blipFill>
+        <p:spPr>
+          <a:xfrm>
+            <a:off x="4386164" y="2852041"/>
+            <a:ext cx="7199729" cy="3667026"/>
+          </a:xfrm>
+          <a:prstGeom prst="rect">
+            <a:avLst/>
+          </a:prstGeom>
+        </p:spPr>
+      </p:pic>
+      <p:sp>
+        <p:nvSpPr>
+          <p:cNvPr id="5" name="Seta: Dobrada para Cima 4">
+            <a:extLst>
+              <a:ext uri="{FF2B5EF4-FFF2-40B4-BE49-F238E27FC236}">
+                <a16:creationId xmlns:a16="http://schemas.microsoft.com/office/drawing/2014/main" id="{595BAA56-6A7F-4C5E-BC38-F904FC48A413}"/>
+              </a:ext>
+            </a:extLst>
+          </p:cNvPr>
+          <p:cNvSpPr/>
+          <p:nvPr/>
+        </p:nvSpPr>
+        <p:spPr>
+          <a:xfrm rot="10800000" flipH="1">
+            <a:off x="948697" y="1261232"/>
+            <a:ext cx="6495595" cy="2568489"/>
+          </a:xfrm>
+          <a:prstGeom prst="bentUpArrow">
+            <a:avLst>
+              <a:gd name="adj1" fmla="val 14948"/>
+              <a:gd name="adj2" fmla="val 25000"/>
+              <a:gd name="adj3" fmla="val 25000"/>
+            </a:avLst>
+          </a:prstGeom>
+          <a:noFill/>
+          <a:ln w="38100">
+            <a:solidFill>
+              <a:srgbClr val="FF0000"/>
+            </a:solidFill>
+          </a:ln>
+        </p:spPr>
+        <p:style>
+          <a:lnRef idx="2">
+            <a:schemeClr val="accent1">
+              <a:shade val="50000"/>
+            </a:schemeClr>
+          </a:lnRef>
+          <a:fillRef idx="1">
+            <a:schemeClr val="accent1"/>
+          </a:fillRef>
+          <a:effectRef idx="0">
+            <a:schemeClr val="accent1"/>
+          </a:effectRef>
+          <a:fontRef idx="minor">
+            <a:schemeClr val="lt1"/>
+          </a:fontRef>
+        </p:style>
+        <p:txBody>
+          <a:bodyPr rot="0" spcFirstLastPara="0" vertOverflow="overflow" horzOverflow="overflow" vert="horz" wrap="square" lIns="91440" tIns="45720" rIns="91440" bIns="45720" numCol="1" spcCol="0" rtlCol="0" fromWordArt="0" anchor="ctr" anchorCtr="0" forceAA="0" compatLnSpc="1">
+            <a:prstTxWarp prst="textNoShape">
+              <a:avLst/>
+            </a:prstTxWarp>
+            <a:noAutofit/>
+          </a:bodyPr>
+          <a:lstStyle/>
+          <a:p>
+            <a:pPr algn="ctr"/>
+            <a:endParaRPr lang="pt-BR"/>
+          </a:p>
+        </p:txBody>
+      </p:sp>
+      <p:sp>
+        <p:nvSpPr>
+          <p:cNvPr id="6" name="Seta: para a Esquerda 5">
+            <a:extLst>
+              <a:ext uri="{FF2B5EF4-FFF2-40B4-BE49-F238E27FC236}">
+                <a16:creationId xmlns:a16="http://schemas.microsoft.com/office/drawing/2014/main" id="{128CDAE0-F2FF-40EB-B2FD-3A5F7477A57F}"/>
+              </a:ext>
+            </a:extLst>
+          </p:cNvPr>
+          <p:cNvSpPr/>
+          <p:nvPr/>
+        </p:nvSpPr>
+        <p:spPr>
+          <a:xfrm>
+            <a:off x="7336714" y="4924415"/>
+            <a:ext cx="3259567" cy="1344706"/>
+          </a:xfrm>
+          <a:prstGeom prst="leftArrow">
+            <a:avLst/>
+          </a:prstGeom>
+          <a:solidFill>
+            <a:srgbClr val="FFFF00"/>
+          </a:solidFill>
+          <a:ln w="38100">
+            <a:solidFill>
+              <a:srgbClr val="FF0000"/>
+            </a:solidFill>
+          </a:ln>
+        </p:spPr>
+        <p:style>
+          <a:lnRef idx="2">
+            <a:schemeClr val="accent1">
+              <a:shade val="50000"/>
+            </a:schemeClr>
+          </a:lnRef>
+          <a:fillRef idx="1">
+            <a:schemeClr val="accent1"/>
+          </a:fillRef>
+          <a:effectRef idx="0">
+            <a:schemeClr val="accent1"/>
+          </a:effectRef>
+          <a:fontRef idx="minor">
+            <a:schemeClr val="lt1"/>
+          </a:fontRef>
+        </p:style>
+        <p:txBody>
+          <a:bodyPr rtlCol="0" anchor="ctr"/>
+          <a:lstStyle/>
+          <a:p>
+            <a:pPr algn="ctr"/>
+            <a:r>
+              <a:rPr lang="pt-BR" dirty="0">
+                <a:solidFill>
+                  <a:schemeClr val="tx1"/>
+                </a:solidFill>
+              </a:rPr>
+              <a:t>Excluir um par &lt;</a:t>
+            </a:r>
+            <a:r>
+              <a:rPr lang="pt-BR" dirty="0" err="1">
+                <a:solidFill>
+                  <a:schemeClr val="tx1"/>
+                </a:solidFill>
+              </a:rPr>
+              <a:t>td</a:t>
+            </a:r>
+            <a:r>
+              <a:rPr lang="pt-BR" dirty="0">
+                <a:solidFill>
+                  <a:schemeClr val="tx1"/>
+                </a:solidFill>
+              </a:rPr>
+              <a:t>&gt;</a:t>
+            </a:r>
+          </a:p>
+        </p:txBody>
+      </p:sp>
     </p:spTree>
     <p:extLst>
       <p:ext uri="{BB962C8B-B14F-4D97-AF65-F5344CB8AC3E}">
-        <p14:creationId xmlns:p14="http://schemas.microsoft.com/office/powerpoint/2010/main" val="144112274"/>
+        <p14:creationId xmlns:p14="http://schemas.microsoft.com/office/powerpoint/2010/main" val="2177057709"/>
       </p:ext>
     </p:extLst>
   </p:cSld>
@@ -7432,7 +8563,7 @@
           <p:cNvPr id="3" name="Imagem 2">
             <a:extLst>
               <a:ext uri="{FF2B5EF4-FFF2-40B4-BE49-F238E27FC236}">
-                <a16:creationId xmlns:a16="http://schemas.microsoft.com/office/drawing/2014/main" id="{DEC23805-0A1F-459C-9D7F-EA4E8B51E3B0}"/>
+                <a16:creationId xmlns:a16="http://schemas.microsoft.com/office/drawing/2014/main" id="{D8BB2ABD-7117-4752-87DF-6126A84EEFB7}"/>
               </a:ext>
             </a:extLst>
           </p:cNvPr>
@@ -7455,8 +8586,8 @@
         </p:blipFill>
         <p:spPr>
           <a:xfrm>
-            <a:off x="1235575" y="391233"/>
-            <a:ext cx="9720850" cy="6075532"/>
+            <a:off x="1981488" y="639500"/>
+            <a:ext cx="8229024" cy="5579000"/>
           </a:xfrm>
           <a:prstGeom prst="rect">
             <a:avLst/>
@@ -7468,7 +8599,7 @@
           <p:cNvPr id="4" name="Retângulo 3">
             <a:extLst>
               <a:ext uri="{FF2B5EF4-FFF2-40B4-BE49-F238E27FC236}">
-                <a16:creationId xmlns:a16="http://schemas.microsoft.com/office/drawing/2014/main" id="{9E5F02F6-0CAF-4A66-B777-C5D4185B9CE1}"/>
+                <a16:creationId xmlns:a16="http://schemas.microsoft.com/office/drawing/2014/main" id="{B536D16E-8941-4973-8F37-9022EA58552C}"/>
               </a:ext>
             </a:extLst>
           </p:cNvPr>
@@ -7477,8 +8608,8 @@
         </p:nvSpPr>
         <p:spPr>
           <a:xfrm>
-            <a:off x="2201333" y="2760133"/>
-            <a:ext cx="8094134" cy="1981200"/>
+            <a:off x="3668358" y="4055633"/>
+            <a:ext cx="2506531" cy="1086522"/>
           </a:xfrm>
           <a:prstGeom prst="rect">
             <a:avLst/>
@@ -7507,71 +8638,7 @@
           </a:fontRef>
         </p:style>
         <p:txBody>
-          <a:bodyPr rot="0" spcFirstLastPara="0" vertOverflow="overflow" horzOverflow="overflow" vert="horz" wrap="square" lIns="91440" tIns="45720" rIns="91440" bIns="45720" numCol="1" spcCol="0" rtlCol="0" fromWordArt="0" anchor="ctr" anchorCtr="0" forceAA="0" compatLnSpc="1">
-            <a:prstTxWarp prst="textNoShape">
-              <a:avLst/>
-            </a:prstTxWarp>
-            <a:noAutofit/>
-          </a:bodyPr>
-          <a:lstStyle/>
-          <a:p>
-            <a:pPr algn="ctr"/>
-            <a:endParaRPr lang="pt-BR"/>
-          </a:p>
-        </p:txBody>
-      </p:sp>
-      <p:sp>
-        <p:nvSpPr>
-          <p:cNvPr id="5" name="Seta: para a Direita 4">
-            <a:extLst>
-              <a:ext uri="{FF2B5EF4-FFF2-40B4-BE49-F238E27FC236}">
-                <a16:creationId xmlns:a16="http://schemas.microsoft.com/office/drawing/2014/main" id="{5E9D2EDE-B8BA-4942-863C-7B4F4C1A8A97}"/>
-              </a:ext>
-            </a:extLst>
-          </p:cNvPr>
-          <p:cNvSpPr/>
-          <p:nvPr/>
-        </p:nvSpPr>
-        <p:spPr>
-          <a:xfrm>
-            <a:off x="482600" y="3090333"/>
-            <a:ext cx="1524000" cy="1270000"/>
-          </a:xfrm>
-          <a:prstGeom prst="rightArrow">
-            <a:avLst/>
-          </a:prstGeom>
-          <a:solidFill>
-            <a:srgbClr val="FFFF00"/>
-          </a:solidFill>
-          <a:ln w="38100">
-            <a:solidFill>
-              <a:srgbClr val="FF0000"/>
-            </a:solidFill>
-          </a:ln>
-        </p:spPr>
-        <p:style>
-          <a:lnRef idx="2">
-            <a:schemeClr val="accent1">
-              <a:shade val="50000"/>
-            </a:schemeClr>
-          </a:lnRef>
-          <a:fillRef idx="1">
-            <a:schemeClr val="accent1"/>
-          </a:fillRef>
-          <a:effectRef idx="0">
-            <a:schemeClr val="accent1"/>
-          </a:effectRef>
-          <a:fontRef idx="minor">
-            <a:schemeClr val="lt1"/>
-          </a:fontRef>
-        </p:style>
-        <p:txBody>
-          <a:bodyPr rot="0" spcFirstLastPara="0" vertOverflow="overflow" horzOverflow="overflow" vert="horz" wrap="square" lIns="91440" tIns="45720" rIns="91440" bIns="45720" numCol="1" spcCol="0" rtlCol="0" fromWordArt="0" anchor="ctr" anchorCtr="0" forceAA="0" compatLnSpc="1">
-            <a:prstTxWarp prst="textNoShape">
-              <a:avLst/>
-            </a:prstTxWarp>
-            <a:noAutofit/>
-          </a:bodyPr>
+          <a:bodyPr rtlCol="0" anchor="ctr"/>
           <a:lstStyle/>
           <a:p>
             <a:pPr algn="ctr"/>
@@ -7582,7 +8649,7 @@
     </p:spTree>
     <p:extLst>
       <p:ext uri="{BB962C8B-B14F-4D97-AF65-F5344CB8AC3E}">
-        <p14:creationId xmlns:p14="http://schemas.microsoft.com/office/powerpoint/2010/main" val="3189368703"/>
+        <p14:creationId xmlns:p14="http://schemas.microsoft.com/office/powerpoint/2010/main" val="2361835118"/>
       </p:ext>
     </p:extLst>
   </p:cSld>
@@ -7593,6 +8660,564 @@
 </file>
 
 <file path=ppt/slides/slide30.xml><?xml version="1.0" encoding="utf-8"?>
+<p:sld xmlns:a="http://schemas.openxmlformats.org/drawingml/2006/main" xmlns:r="http://schemas.openxmlformats.org/officeDocument/2006/relationships" xmlns:p="http://schemas.openxmlformats.org/presentationml/2006/main">
+  <p:cSld>
+    <p:spTree>
+      <p:nvGrpSpPr>
+        <p:cNvPr id="1" name=""/>
+        <p:cNvGrpSpPr/>
+        <p:nvPr/>
+      </p:nvGrpSpPr>
+      <p:grpSpPr>
+        <a:xfrm>
+          <a:off x="0" y="0"/>
+          <a:ext cx="0" cy="0"/>
+          <a:chOff x="0" y="0"/>
+          <a:chExt cx="0" cy="0"/>
+        </a:xfrm>
+      </p:grpSpPr>
+      <p:pic>
+        <p:nvPicPr>
+          <p:cNvPr id="2" name="Imagem 1">
+            <a:extLst>
+              <a:ext uri="{FF2B5EF4-FFF2-40B4-BE49-F238E27FC236}">
+                <a16:creationId xmlns:a16="http://schemas.microsoft.com/office/drawing/2014/main" id="{08AABA58-A9D8-49D3-91A3-B506C9316598}"/>
+              </a:ext>
+            </a:extLst>
+          </p:cNvPr>
+          <p:cNvPicPr>
+            <a:picLocks noChangeAspect="1"/>
+          </p:cNvPicPr>
+          <p:nvPr/>
+        </p:nvPicPr>
+        <p:blipFill>
+          <a:blip r:embed="rId2"/>
+          <a:stretch>
+            <a:fillRect/>
+          </a:stretch>
+        </p:blipFill>
+        <p:spPr>
+          <a:xfrm>
+            <a:off x="3109912" y="719137"/>
+            <a:ext cx="5972175" cy="5419725"/>
+          </a:xfrm>
+          <a:prstGeom prst="rect">
+            <a:avLst/>
+          </a:prstGeom>
+        </p:spPr>
+      </p:pic>
+    </p:spTree>
+    <p:extLst>
+      <p:ext uri="{BB962C8B-B14F-4D97-AF65-F5344CB8AC3E}">
+        <p14:creationId xmlns:p14="http://schemas.microsoft.com/office/powerpoint/2010/main" val="3779089914"/>
+      </p:ext>
+    </p:extLst>
+  </p:cSld>
+  <p:clrMapOvr>
+    <a:masterClrMapping/>
+  </p:clrMapOvr>
+</p:sld>
+</file>
+
+<file path=ppt/slides/slide31.xml><?xml version="1.0" encoding="utf-8"?>
+<p:sld xmlns:a="http://schemas.openxmlformats.org/drawingml/2006/main" xmlns:r="http://schemas.openxmlformats.org/officeDocument/2006/relationships" xmlns:p="http://schemas.openxmlformats.org/presentationml/2006/main">
+  <p:cSld>
+    <p:spTree>
+      <p:nvGrpSpPr>
+        <p:cNvPr id="1" name=""/>
+        <p:cNvGrpSpPr/>
+        <p:nvPr/>
+      </p:nvGrpSpPr>
+      <p:grpSpPr>
+        <a:xfrm>
+          <a:off x="0" y="0"/>
+          <a:ext cx="0" cy="0"/>
+          <a:chOff x="0" y="0"/>
+          <a:chExt cx="0" cy="0"/>
+        </a:xfrm>
+      </p:grpSpPr>
+      <p:pic>
+        <p:nvPicPr>
+          <p:cNvPr id="4" name="Imagem 3">
+            <a:extLst>
+              <a:ext uri="{FF2B5EF4-FFF2-40B4-BE49-F238E27FC236}">
+                <a16:creationId xmlns:a16="http://schemas.microsoft.com/office/drawing/2014/main" id="{34211658-EFE6-41CF-85DC-B2C489E26859}"/>
+              </a:ext>
+            </a:extLst>
+          </p:cNvPr>
+          <p:cNvPicPr>
+            <a:picLocks noChangeAspect="1"/>
+          </p:cNvPicPr>
+          <p:nvPr/>
+        </p:nvPicPr>
+        <p:blipFill>
+          <a:blip r:embed="rId2"/>
+          <a:stretch>
+            <a:fillRect/>
+          </a:stretch>
+        </p:blipFill>
+        <p:spPr>
+          <a:xfrm>
+            <a:off x="6516740" y="873499"/>
+            <a:ext cx="5426881" cy="4924873"/>
+          </a:xfrm>
+          <a:prstGeom prst="rect">
+            <a:avLst/>
+          </a:prstGeom>
+        </p:spPr>
+      </p:pic>
+      <p:pic>
+        <p:nvPicPr>
+          <p:cNvPr id="3" name="Imagem 2">
+            <a:extLst>
+              <a:ext uri="{FF2B5EF4-FFF2-40B4-BE49-F238E27FC236}">
+                <a16:creationId xmlns:a16="http://schemas.microsoft.com/office/drawing/2014/main" id="{F26DBD30-4D09-4A1E-BA25-256C06DE2A1F}"/>
+              </a:ext>
+            </a:extLst>
+          </p:cNvPr>
+          <p:cNvPicPr>
+            <a:picLocks noChangeAspect="1"/>
+          </p:cNvPicPr>
+          <p:nvPr/>
+        </p:nvPicPr>
+        <p:blipFill>
+          <a:blip r:embed="rId3">
+            <a:extLst>
+              <a:ext uri="{28A0092B-C50C-407E-A947-70E740481C1C}">
+                <a14:useLocalDpi xmlns:a14="http://schemas.microsoft.com/office/drawing/2010/main" val="0"/>
+              </a:ext>
+            </a:extLst>
+          </a:blip>
+          <a:stretch>
+            <a:fillRect/>
+          </a:stretch>
+        </p:blipFill>
+        <p:spPr>
+          <a:xfrm>
+            <a:off x="5981" y="1241734"/>
+            <a:ext cx="6115306" cy="4664216"/>
+          </a:xfrm>
+          <a:prstGeom prst="rect">
+            <a:avLst/>
+          </a:prstGeom>
+        </p:spPr>
+      </p:pic>
+      <p:sp>
+        <p:nvSpPr>
+          <p:cNvPr id="5" name="Retângulo 4">
+            <a:extLst>
+              <a:ext uri="{FF2B5EF4-FFF2-40B4-BE49-F238E27FC236}">
+                <a16:creationId xmlns:a16="http://schemas.microsoft.com/office/drawing/2014/main" id="{686C116F-F0C0-44F0-8CCE-5B4B5A5C3A52}"/>
+              </a:ext>
+            </a:extLst>
+          </p:cNvPr>
+          <p:cNvSpPr/>
+          <p:nvPr/>
+        </p:nvSpPr>
+        <p:spPr>
+          <a:xfrm>
+            <a:off x="935915" y="2872292"/>
+            <a:ext cx="5160085" cy="1893346"/>
+          </a:xfrm>
+          <a:prstGeom prst="rect">
+            <a:avLst/>
+          </a:prstGeom>
+          <a:noFill/>
+          <a:ln w="38100">
+            <a:solidFill>
+              <a:srgbClr val="FF0000"/>
+            </a:solidFill>
+          </a:ln>
+        </p:spPr>
+        <p:style>
+          <a:lnRef idx="2">
+            <a:schemeClr val="accent1">
+              <a:shade val="50000"/>
+            </a:schemeClr>
+          </a:lnRef>
+          <a:fillRef idx="1">
+            <a:schemeClr val="accent1"/>
+          </a:fillRef>
+          <a:effectRef idx="0">
+            <a:schemeClr val="accent1"/>
+          </a:effectRef>
+          <a:fontRef idx="minor">
+            <a:schemeClr val="lt1"/>
+          </a:fontRef>
+        </p:style>
+        <p:txBody>
+          <a:bodyPr rtlCol="0" anchor="ctr"/>
+          <a:lstStyle/>
+          <a:p>
+            <a:pPr algn="ctr"/>
+            <a:endParaRPr lang="pt-BR"/>
+          </a:p>
+        </p:txBody>
+      </p:sp>
+      <p:sp>
+        <p:nvSpPr>
+          <p:cNvPr id="6" name="Seta: para a Direita 5">
+            <a:extLst>
+              <a:ext uri="{FF2B5EF4-FFF2-40B4-BE49-F238E27FC236}">
+                <a16:creationId xmlns:a16="http://schemas.microsoft.com/office/drawing/2014/main" id="{25F801B3-BD32-4758-AFD2-9549C1CE3581}"/>
+              </a:ext>
+            </a:extLst>
+          </p:cNvPr>
+          <p:cNvSpPr/>
+          <p:nvPr/>
+        </p:nvSpPr>
+        <p:spPr>
+          <a:xfrm>
+            <a:off x="5325035" y="4173967"/>
+            <a:ext cx="1191705" cy="796066"/>
+          </a:xfrm>
+          <a:prstGeom prst="rightArrow">
+            <a:avLst/>
+          </a:prstGeom>
+          <a:solidFill>
+            <a:srgbClr val="FFFF00"/>
+          </a:solidFill>
+          <a:ln w="38100">
+            <a:solidFill>
+              <a:srgbClr val="FF0000"/>
+            </a:solidFill>
+          </a:ln>
+        </p:spPr>
+        <p:style>
+          <a:lnRef idx="2">
+            <a:schemeClr val="accent1">
+              <a:shade val="50000"/>
+            </a:schemeClr>
+          </a:lnRef>
+          <a:fillRef idx="1">
+            <a:schemeClr val="accent1"/>
+          </a:fillRef>
+          <a:effectRef idx="0">
+            <a:schemeClr val="accent1"/>
+          </a:effectRef>
+          <a:fontRef idx="minor">
+            <a:schemeClr val="lt1"/>
+          </a:fontRef>
+        </p:style>
+        <p:txBody>
+          <a:bodyPr rtlCol="0" anchor="ctr"/>
+          <a:lstStyle/>
+          <a:p>
+            <a:pPr algn="ctr"/>
+            <a:endParaRPr lang="pt-BR"/>
+          </a:p>
+        </p:txBody>
+      </p:sp>
+    </p:spTree>
+    <p:extLst>
+      <p:ext uri="{BB962C8B-B14F-4D97-AF65-F5344CB8AC3E}">
+        <p14:creationId xmlns:p14="http://schemas.microsoft.com/office/powerpoint/2010/main" val="3883236559"/>
+      </p:ext>
+    </p:extLst>
+  </p:cSld>
+  <p:clrMapOvr>
+    <a:masterClrMapping/>
+  </p:clrMapOvr>
+</p:sld>
+</file>
+
+<file path=ppt/slides/slide32.xml><?xml version="1.0" encoding="utf-8"?>
+<p:sld xmlns:a="http://schemas.openxmlformats.org/drawingml/2006/main" xmlns:r="http://schemas.openxmlformats.org/officeDocument/2006/relationships" xmlns:p="http://schemas.openxmlformats.org/presentationml/2006/main">
+  <p:cSld>
+    <p:spTree>
+      <p:nvGrpSpPr>
+        <p:cNvPr id="1" name=""/>
+        <p:cNvGrpSpPr/>
+        <p:nvPr/>
+      </p:nvGrpSpPr>
+      <p:grpSpPr>
+        <a:xfrm>
+          <a:off x="0" y="0"/>
+          <a:ext cx="0" cy="0"/>
+          <a:chOff x="0" y="0"/>
+          <a:chExt cx="0" cy="0"/>
+        </a:xfrm>
+      </p:grpSpPr>
+      <p:pic>
+        <p:nvPicPr>
+          <p:cNvPr id="3" name="Imagem 2">
+            <a:extLst>
+              <a:ext uri="{FF2B5EF4-FFF2-40B4-BE49-F238E27FC236}">
+                <a16:creationId xmlns:a16="http://schemas.microsoft.com/office/drawing/2014/main" id="{C9604ECB-09A3-4836-B03E-6FA12308A384}"/>
+              </a:ext>
+            </a:extLst>
+          </p:cNvPr>
+          <p:cNvPicPr>
+            <a:picLocks noChangeAspect="1"/>
+          </p:cNvPicPr>
+          <p:nvPr/>
+        </p:nvPicPr>
+        <p:blipFill>
+          <a:blip r:embed="rId2">
+            <a:extLst>
+              <a:ext uri="{28A0092B-C50C-407E-A947-70E740481C1C}">
+                <a14:useLocalDpi xmlns:a14="http://schemas.microsoft.com/office/drawing/2010/main" val="0"/>
+              </a:ext>
+            </a:extLst>
+          </a:blip>
+          <a:stretch>
+            <a:fillRect/>
+          </a:stretch>
+        </p:blipFill>
+        <p:spPr>
+          <a:xfrm>
+            <a:off x="433983" y="1480865"/>
+            <a:ext cx="5106113" cy="3896269"/>
+          </a:xfrm>
+          <a:prstGeom prst="rect">
+            <a:avLst/>
+          </a:prstGeom>
+        </p:spPr>
+      </p:pic>
+      <p:pic>
+        <p:nvPicPr>
+          <p:cNvPr id="4" name="Imagem 3">
+            <a:extLst>
+              <a:ext uri="{FF2B5EF4-FFF2-40B4-BE49-F238E27FC236}">
+                <a16:creationId xmlns:a16="http://schemas.microsoft.com/office/drawing/2014/main" id="{07A80643-B518-46A9-A14F-C0883C3F7CDB}"/>
+              </a:ext>
+            </a:extLst>
+          </p:cNvPr>
+          <p:cNvPicPr>
+            <a:picLocks noChangeAspect="1"/>
+          </p:cNvPicPr>
+          <p:nvPr/>
+        </p:nvPicPr>
+        <p:blipFill>
+          <a:blip r:embed="rId3"/>
+          <a:stretch>
+            <a:fillRect/>
+          </a:stretch>
+        </p:blipFill>
+        <p:spPr>
+          <a:xfrm>
+            <a:off x="5785842" y="826713"/>
+            <a:ext cx="5972175" cy="5419725"/>
+          </a:xfrm>
+          <a:prstGeom prst="rect">
+            <a:avLst/>
+          </a:prstGeom>
+        </p:spPr>
+      </p:pic>
+      <p:sp>
+        <p:nvSpPr>
+          <p:cNvPr id="5" name="Retângulo 4">
+            <a:extLst>
+              <a:ext uri="{FF2B5EF4-FFF2-40B4-BE49-F238E27FC236}">
+                <a16:creationId xmlns:a16="http://schemas.microsoft.com/office/drawing/2014/main" id="{69D885FC-CC7F-4437-925E-60B885187FB0}"/>
+              </a:ext>
+            </a:extLst>
+          </p:cNvPr>
+          <p:cNvSpPr/>
+          <p:nvPr/>
+        </p:nvSpPr>
+        <p:spPr>
+          <a:xfrm>
+            <a:off x="1226372" y="3098202"/>
+            <a:ext cx="4152452" cy="1075765"/>
+          </a:xfrm>
+          <a:prstGeom prst="rect">
+            <a:avLst/>
+          </a:prstGeom>
+          <a:noFill/>
+          <a:ln w="38100">
+            <a:solidFill>
+              <a:srgbClr val="FF0000"/>
+            </a:solidFill>
+          </a:ln>
+        </p:spPr>
+        <p:style>
+          <a:lnRef idx="2">
+            <a:schemeClr val="accent1">
+              <a:shade val="50000"/>
+            </a:schemeClr>
+          </a:lnRef>
+          <a:fillRef idx="1">
+            <a:schemeClr val="accent1"/>
+          </a:fillRef>
+          <a:effectRef idx="0">
+            <a:schemeClr val="accent1"/>
+          </a:effectRef>
+          <a:fontRef idx="minor">
+            <a:schemeClr val="lt1"/>
+          </a:fontRef>
+        </p:style>
+        <p:txBody>
+          <a:bodyPr rtlCol="0" anchor="ctr"/>
+          <a:lstStyle/>
+          <a:p>
+            <a:pPr algn="ctr"/>
+            <a:endParaRPr lang="pt-BR"/>
+          </a:p>
+        </p:txBody>
+      </p:sp>
+    </p:spTree>
+    <p:extLst>
+      <p:ext uri="{BB962C8B-B14F-4D97-AF65-F5344CB8AC3E}">
+        <p14:creationId xmlns:p14="http://schemas.microsoft.com/office/powerpoint/2010/main" val="3179840118"/>
+      </p:ext>
+    </p:extLst>
+  </p:cSld>
+  <p:clrMapOvr>
+    <a:masterClrMapping/>
+  </p:clrMapOvr>
+</p:sld>
+</file>
+
+<file path=ppt/slides/slide33.xml><?xml version="1.0" encoding="utf-8"?>
+<p:sld xmlns:a="http://schemas.openxmlformats.org/drawingml/2006/main" xmlns:r="http://schemas.openxmlformats.org/officeDocument/2006/relationships" xmlns:p="http://schemas.openxmlformats.org/presentationml/2006/main">
+  <p:cSld>
+    <p:spTree>
+      <p:nvGrpSpPr>
+        <p:cNvPr id="1" name=""/>
+        <p:cNvGrpSpPr/>
+        <p:nvPr/>
+      </p:nvGrpSpPr>
+      <p:grpSpPr>
+        <a:xfrm>
+          <a:off x="0" y="0"/>
+          <a:ext cx="0" cy="0"/>
+          <a:chOff x="0" y="0"/>
+          <a:chExt cx="0" cy="0"/>
+        </a:xfrm>
+      </p:grpSpPr>
+      <p:pic>
+        <p:nvPicPr>
+          <p:cNvPr id="3" name="Imagem 2">
+            <a:extLst>
+              <a:ext uri="{FF2B5EF4-FFF2-40B4-BE49-F238E27FC236}">
+                <a16:creationId xmlns:a16="http://schemas.microsoft.com/office/drawing/2014/main" id="{FA8C4947-3E49-4771-B712-8EC5A2F2FE70}"/>
+              </a:ext>
+            </a:extLst>
+          </p:cNvPr>
+          <p:cNvPicPr>
+            <a:picLocks noChangeAspect="1"/>
+          </p:cNvPicPr>
+          <p:nvPr/>
+        </p:nvPicPr>
+        <p:blipFill>
+          <a:blip r:embed="rId2">
+            <a:extLst>
+              <a:ext uri="{28A0092B-C50C-407E-A947-70E740481C1C}">
+                <a14:useLocalDpi xmlns:a14="http://schemas.microsoft.com/office/drawing/2010/main" val="0"/>
+              </a:ext>
+            </a:extLst>
+          </a:blip>
+          <a:stretch>
+            <a:fillRect/>
+          </a:stretch>
+        </p:blipFill>
+        <p:spPr>
+          <a:xfrm>
+            <a:off x="338396" y="1366549"/>
+            <a:ext cx="5125165" cy="4124901"/>
+          </a:xfrm>
+          <a:prstGeom prst="rect">
+            <a:avLst/>
+          </a:prstGeom>
+        </p:spPr>
+      </p:pic>
+      <p:pic>
+        <p:nvPicPr>
+          <p:cNvPr id="4" name="Imagem 3">
+            <a:extLst>
+              <a:ext uri="{FF2B5EF4-FFF2-40B4-BE49-F238E27FC236}">
+                <a16:creationId xmlns:a16="http://schemas.microsoft.com/office/drawing/2014/main" id="{737A3724-3770-4CCD-AA5E-BE1B66ECE3FD}"/>
+              </a:ext>
+            </a:extLst>
+          </p:cNvPr>
+          <p:cNvPicPr>
+            <a:picLocks noChangeAspect="1"/>
+          </p:cNvPicPr>
+          <p:nvPr/>
+        </p:nvPicPr>
+        <p:blipFill>
+          <a:blip r:embed="rId3"/>
+          <a:stretch>
+            <a:fillRect/>
+          </a:stretch>
+        </p:blipFill>
+        <p:spPr>
+          <a:xfrm>
+            <a:off x="5745535" y="719136"/>
+            <a:ext cx="5972175" cy="5419725"/>
+          </a:xfrm>
+          <a:prstGeom prst="rect">
+            <a:avLst/>
+          </a:prstGeom>
+        </p:spPr>
+      </p:pic>
+      <p:sp>
+        <p:nvSpPr>
+          <p:cNvPr id="5" name="Retângulo 4">
+            <a:extLst>
+              <a:ext uri="{FF2B5EF4-FFF2-40B4-BE49-F238E27FC236}">
+                <a16:creationId xmlns:a16="http://schemas.microsoft.com/office/drawing/2014/main" id="{571C3DEF-BB63-486A-8433-21C6BE8BD67F}"/>
+              </a:ext>
+            </a:extLst>
+          </p:cNvPr>
+          <p:cNvSpPr/>
+          <p:nvPr/>
+        </p:nvSpPr>
+        <p:spPr>
+          <a:xfrm>
+            <a:off x="1409252" y="2958353"/>
+            <a:ext cx="3668357" cy="1559859"/>
+          </a:xfrm>
+          <a:prstGeom prst="rect">
+            <a:avLst/>
+          </a:prstGeom>
+          <a:noFill/>
+          <a:ln w="38100">
+            <a:solidFill>
+              <a:srgbClr val="FF0000"/>
+            </a:solidFill>
+          </a:ln>
+        </p:spPr>
+        <p:style>
+          <a:lnRef idx="2">
+            <a:schemeClr val="accent1">
+              <a:shade val="50000"/>
+            </a:schemeClr>
+          </a:lnRef>
+          <a:fillRef idx="1">
+            <a:schemeClr val="accent1"/>
+          </a:fillRef>
+          <a:effectRef idx="0">
+            <a:schemeClr val="accent1"/>
+          </a:effectRef>
+          <a:fontRef idx="minor">
+            <a:schemeClr val="lt1"/>
+          </a:fontRef>
+        </p:style>
+        <p:txBody>
+          <a:bodyPr rtlCol="0" anchor="ctr"/>
+          <a:lstStyle/>
+          <a:p>
+            <a:pPr algn="ctr"/>
+            <a:endParaRPr lang="pt-BR"/>
+          </a:p>
+        </p:txBody>
+      </p:sp>
+    </p:spTree>
+    <p:extLst>
+      <p:ext uri="{BB962C8B-B14F-4D97-AF65-F5344CB8AC3E}">
+        <p14:creationId xmlns:p14="http://schemas.microsoft.com/office/powerpoint/2010/main" val="144112274"/>
+      </p:ext>
+    </p:extLst>
+  </p:cSld>
+  <p:clrMapOvr>
+    <a:masterClrMapping/>
+  </p:clrMapOvr>
+</p:sld>
+</file>
+
+<file path=ppt/slides/slide34.xml><?xml version="1.0" encoding="utf-8"?>
 <p:sld xmlns:a="http://schemas.openxmlformats.org/drawingml/2006/main" xmlns:r="http://schemas.openxmlformats.org/officeDocument/2006/relationships" xmlns:p="http://schemas.openxmlformats.org/presentationml/2006/main">
   <p:cSld>
     <p:spTree>
@@ -7622,7 +9247,7 @@
 </p:sld>
 </file>
 
-<file path=ppt/slides/slide31.xml><?xml version="1.0" encoding="utf-8"?>
+<file path=ppt/slides/slide35.xml><?xml version="1.0" encoding="utf-8"?>
 <p:sld xmlns:a="http://schemas.openxmlformats.org/drawingml/2006/main" xmlns:r="http://schemas.openxmlformats.org/officeDocument/2006/relationships" xmlns:p="http://schemas.openxmlformats.org/presentationml/2006/main">
   <p:cSld>
     <p:spTree>
@@ -7652,7 +9277,7 @@
 </p:sld>
 </file>
 
-<file path=ppt/slides/slide32.xml><?xml version="1.0" encoding="utf-8"?>
+<file path=ppt/slides/slide36.xml><?xml version="1.0" encoding="utf-8"?>
 <p:sld xmlns:a="http://schemas.openxmlformats.org/drawingml/2006/main" xmlns:r="http://schemas.openxmlformats.org/officeDocument/2006/relationships" xmlns:p="http://schemas.openxmlformats.org/presentationml/2006/main">
   <p:cSld>
     <p:spTree>
@@ -7682,7 +9307,7 @@
 </p:sld>
 </file>
 
-<file path=ppt/slides/slide33.xml><?xml version="1.0" encoding="utf-8"?>
+<file path=ppt/slides/slide37.xml><?xml version="1.0" encoding="utf-8"?>
 <p:sld xmlns:a="http://schemas.openxmlformats.org/drawingml/2006/main" xmlns:r="http://schemas.openxmlformats.org/officeDocument/2006/relationships" xmlns:p="http://schemas.openxmlformats.org/presentationml/2006/main">
   <p:cSld>
     <p:spTree>
@@ -7712,7 +9337,7 @@
 </p:sld>
 </file>
 
-<file path=ppt/slides/slide34.xml><?xml version="1.0" encoding="utf-8"?>
+<file path=ppt/slides/slide38.xml><?xml version="1.0" encoding="utf-8"?>
 <p:sld xmlns:a="http://schemas.openxmlformats.org/drawingml/2006/main" xmlns:r="http://schemas.openxmlformats.org/officeDocument/2006/relationships" xmlns:p="http://schemas.openxmlformats.org/presentationml/2006/main">
   <p:cSld>
     <p:spTree>
@@ -7742,7 +9367,7 @@
 </p:sld>
 </file>
 
-<file path=ppt/slides/slide35.xml><?xml version="1.0" encoding="utf-8"?>
+<file path=ppt/slides/slide39.xml><?xml version="1.0" encoding="utf-8"?>
 <p:sld xmlns:a="http://schemas.openxmlformats.org/drawingml/2006/main" xmlns:r="http://schemas.openxmlformats.org/officeDocument/2006/relationships" xmlns:p="http://schemas.openxmlformats.org/presentationml/2006/main">
   <p:cSld>
     <p:spTree>
@@ -7772,7 +9397,179 @@
 </p:sld>
 </file>
 
-<file path=ppt/slides/slide36.xml><?xml version="1.0" encoding="utf-8"?>
+<file path=ppt/slides/slide4.xml><?xml version="1.0" encoding="utf-8"?>
+<p:sld xmlns:a="http://schemas.openxmlformats.org/drawingml/2006/main" xmlns:r="http://schemas.openxmlformats.org/officeDocument/2006/relationships" xmlns:p="http://schemas.openxmlformats.org/presentationml/2006/main">
+  <p:cSld>
+    <p:spTree>
+      <p:nvGrpSpPr>
+        <p:cNvPr id="1" name=""/>
+        <p:cNvGrpSpPr/>
+        <p:nvPr/>
+      </p:nvGrpSpPr>
+      <p:grpSpPr>
+        <a:xfrm>
+          <a:off x="0" y="0"/>
+          <a:ext cx="0" cy="0"/>
+          <a:chOff x="0" y="0"/>
+          <a:chExt cx="0" cy="0"/>
+        </a:xfrm>
+      </p:grpSpPr>
+      <p:pic>
+        <p:nvPicPr>
+          <p:cNvPr id="3" name="Imagem 2">
+            <a:extLst>
+              <a:ext uri="{FF2B5EF4-FFF2-40B4-BE49-F238E27FC236}">
+                <a16:creationId xmlns:a16="http://schemas.microsoft.com/office/drawing/2014/main" id="{0B03687B-A014-4223-860C-B7B4957B7BC1}"/>
+              </a:ext>
+            </a:extLst>
+          </p:cNvPr>
+          <p:cNvPicPr>
+            <a:picLocks noChangeAspect="1"/>
+          </p:cNvPicPr>
+          <p:nvPr/>
+        </p:nvPicPr>
+        <p:blipFill>
+          <a:blip r:embed="rId2">
+            <a:extLst>
+              <a:ext uri="{28A0092B-C50C-407E-A947-70E740481C1C}">
+                <a14:useLocalDpi xmlns:a14="http://schemas.microsoft.com/office/drawing/2010/main" val="0"/>
+              </a:ext>
+            </a:extLst>
+          </a:blip>
+          <a:stretch>
+            <a:fillRect/>
+          </a:stretch>
+        </p:blipFill>
+        <p:spPr>
+          <a:xfrm>
+            <a:off x="2691542" y="411267"/>
+            <a:ext cx="6808915" cy="6035464"/>
+          </a:xfrm>
+          <a:prstGeom prst="rect">
+            <a:avLst/>
+          </a:prstGeom>
+        </p:spPr>
+      </p:pic>
+      <p:sp>
+        <p:nvSpPr>
+          <p:cNvPr id="4" name="Retângulo 3">
+            <a:extLst>
+              <a:ext uri="{FF2B5EF4-FFF2-40B4-BE49-F238E27FC236}">
+                <a16:creationId xmlns:a16="http://schemas.microsoft.com/office/drawing/2014/main" id="{18FF59CC-3A3D-4EE0-AD00-211BDD7181DF}"/>
+              </a:ext>
+            </a:extLst>
+          </p:cNvPr>
+          <p:cNvSpPr/>
+          <p:nvPr/>
+        </p:nvSpPr>
+        <p:spPr>
+          <a:xfrm>
+            <a:off x="4152452" y="3711388"/>
+            <a:ext cx="1861073" cy="1624405"/>
+          </a:xfrm>
+          <a:prstGeom prst="rect">
+            <a:avLst/>
+          </a:prstGeom>
+          <a:noFill/>
+          <a:ln w="38100">
+            <a:solidFill>
+              <a:srgbClr val="FF0000"/>
+            </a:solidFill>
+          </a:ln>
+        </p:spPr>
+        <p:style>
+          <a:lnRef idx="2">
+            <a:schemeClr val="accent1">
+              <a:shade val="50000"/>
+            </a:schemeClr>
+          </a:lnRef>
+          <a:fillRef idx="1">
+            <a:schemeClr val="accent1"/>
+          </a:fillRef>
+          <a:effectRef idx="0">
+            <a:schemeClr val="accent1"/>
+          </a:effectRef>
+          <a:fontRef idx="minor">
+            <a:schemeClr val="lt1"/>
+          </a:fontRef>
+        </p:style>
+        <p:txBody>
+          <a:bodyPr rtlCol="0" anchor="ctr"/>
+          <a:lstStyle/>
+          <a:p>
+            <a:pPr algn="ctr"/>
+            <a:endParaRPr lang="pt-BR"/>
+          </a:p>
+        </p:txBody>
+      </p:sp>
+      <p:sp>
+        <p:nvSpPr>
+          <p:cNvPr id="5" name="Seta: para a Direita 4">
+            <a:extLst>
+              <a:ext uri="{FF2B5EF4-FFF2-40B4-BE49-F238E27FC236}">
+                <a16:creationId xmlns:a16="http://schemas.microsoft.com/office/drawing/2014/main" id="{EF834891-2B41-4C04-B7E2-8A815B0B982F}"/>
+              </a:ext>
+            </a:extLst>
+          </p:cNvPr>
+          <p:cNvSpPr/>
+          <p:nvPr/>
+        </p:nvSpPr>
+        <p:spPr>
+          <a:xfrm>
+            <a:off x="957431" y="3926540"/>
+            <a:ext cx="3076687" cy="1269404"/>
+          </a:xfrm>
+          <a:prstGeom prst="rightArrow">
+            <a:avLst/>
+          </a:prstGeom>
+          <a:solidFill>
+            <a:srgbClr val="FFFF00"/>
+          </a:solidFill>
+          <a:ln w="38100">
+            <a:solidFill>
+              <a:srgbClr val="FF0000"/>
+            </a:solidFill>
+          </a:ln>
+        </p:spPr>
+        <p:style>
+          <a:lnRef idx="2">
+            <a:schemeClr val="accent1">
+              <a:shade val="50000"/>
+            </a:schemeClr>
+          </a:lnRef>
+          <a:fillRef idx="1">
+            <a:schemeClr val="accent1"/>
+          </a:fillRef>
+          <a:effectRef idx="0">
+            <a:schemeClr val="accent1"/>
+          </a:effectRef>
+          <a:fontRef idx="minor">
+            <a:schemeClr val="lt1"/>
+          </a:fontRef>
+        </p:style>
+        <p:txBody>
+          <a:bodyPr rtlCol="0" anchor="ctr"/>
+          <a:lstStyle/>
+          <a:p>
+            <a:pPr algn="ctr"/>
+            <a:endParaRPr lang="pt-BR"/>
+          </a:p>
+        </p:txBody>
+      </p:sp>
+    </p:spTree>
+    <p:extLst>
+      <p:ext uri="{BB962C8B-B14F-4D97-AF65-F5344CB8AC3E}">
+        <p14:creationId xmlns:p14="http://schemas.microsoft.com/office/powerpoint/2010/main" val="1587407648"/>
+      </p:ext>
+    </p:extLst>
+  </p:cSld>
+  <p:clrMapOvr>
+    <a:masterClrMapping/>
+  </p:clrMapOvr>
+</p:sld>
+</file>
+
+<file path=ppt/slides/slide40.xml><?xml version="1.0" encoding="utf-8"?>
 <p:sld xmlns:a="http://schemas.openxmlformats.org/drawingml/2006/main" xmlns:r="http://schemas.openxmlformats.org/officeDocument/2006/relationships" xmlns:p="http://schemas.openxmlformats.org/presentationml/2006/main">
   <p:cSld>
     <p:spTree>
@@ -7802,7 +9599,7 @@
 </p:sld>
 </file>
 
-<file path=ppt/slides/slide37.xml><?xml version="1.0" encoding="utf-8"?>
+<file path=ppt/slides/slide41.xml><?xml version="1.0" encoding="utf-8"?>
 <p:sld xmlns:a="http://schemas.openxmlformats.org/drawingml/2006/main" xmlns:r="http://schemas.openxmlformats.org/officeDocument/2006/relationships" xmlns:p="http://schemas.openxmlformats.org/presentationml/2006/main">
   <p:cSld>
     <p:spTree>
@@ -7832,66 +9629,6 @@
 </p:sld>
 </file>
 
-<file path=ppt/slides/slide4.xml><?xml version="1.0" encoding="utf-8"?>
-<p:sld xmlns:a="http://schemas.openxmlformats.org/drawingml/2006/main" xmlns:r="http://schemas.openxmlformats.org/officeDocument/2006/relationships" xmlns:p="http://schemas.openxmlformats.org/presentationml/2006/main">
-  <p:cSld>
-    <p:spTree>
-      <p:nvGrpSpPr>
-        <p:cNvPr id="1" name=""/>
-        <p:cNvGrpSpPr/>
-        <p:nvPr/>
-      </p:nvGrpSpPr>
-      <p:grpSpPr>
-        <a:xfrm>
-          <a:off x="0" y="0"/>
-          <a:ext cx="0" cy="0"/>
-          <a:chOff x="0" y="0"/>
-          <a:chExt cx="0" cy="0"/>
-        </a:xfrm>
-      </p:grpSpPr>
-      <p:pic>
-        <p:nvPicPr>
-          <p:cNvPr id="3" name="Imagem 2">
-            <a:extLst>
-              <a:ext uri="{FF2B5EF4-FFF2-40B4-BE49-F238E27FC236}">
-                <a16:creationId xmlns:a16="http://schemas.microsoft.com/office/drawing/2014/main" id="{ED0F38C9-0E2A-4D81-993C-F866A0D20311}"/>
-              </a:ext>
-            </a:extLst>
-          </p:cNvPr>
-          <p:cNvPicPr>
-            <a:picLocks noChangeAspect="1"/>
-          </p:cNvPicPr>
-          <p:nvPr/>
-        </p:nvPicPr>
-        <p:blipFill>
-          <a:blip r:embed="rId2"/>
-          <a:stretch>
-            <a:fillRect/>
-          </a:stretch>
-        </p:blipFill>
-        <p:spPr>
-          <a:xfrm>
-            <a:off x="1662112" y="990600"/>
-            <a:ext cx="8867775" cy="4876800"/>
-          </a:xfrm>
-          <a:prstGeom prst="rect">
-            <a:avLst/>
-          </a:prstGeom>
-        </p:spPr>
-      </p:pic>
-    </p:spTree>
-    <p:extLst>
-      <p:ext uri="{BB962C8B-B14F-4D97-AF65-F5344CB8AC3E}">
-        <p14:creationId xmlns:p14="http://schemas.microsoft.com/office/powerpoint/2010/main" val="2618269113"/>
-      </p:ext>
-    </p:extLst>
-  </p:cSld>
-  <p:clrMapOvr>
-    <a:masterClrMapping/>
-  </p:clrMapOvr>
-</p:sld>
-</file>
-
 <file path=ppt/slides/slide5.xml><?xml version="1.0" encoding="utf-8"?>
 <p:sld xmlns:a="http://schemas.openxmlformats.org/drawingml/2006/main" xmlns:r="http://schemas.openxmlformats.org/officeDocument/2006/relationships" xmlns:p="http://schemas.openxmlformats.org/presentationml/2006/main">
   <p:cSld>
@@ -7911,10 +9648,10 @@
       </p:grpSpPr>
       <p:pic>
         <p:nvPicPr>
-          <p:cNvPr id="3" name="Imagem 2">
-            <a:extLst>
-              <a:ext uri="{FF2B5EF4-FFF2-40B4-BE49-F238E27FC236}">
-                <a16:creationId xmlns:a16="http://schemas.microsoft.com/office/drawing/2014/main" id="{C18A0C9F-7511-4999-9021-8D3EE6602465}"/>
+          <p:cNvPr id="5" name="Imagem 4">
+            <a:extLst>
+              <a:ext uri="{FF2B5EF4-FFF2-40B4-BE49-F238E27FC236}">
+                <a16:creationId xmlns:a16="http://schemas.microsoft.com/office/drawing/2014/main" id="{D8983BCF-5B3E-4C14-8086-22D1C8AAB59C}"/>
               </a:ext>
             </a:extLst>
           </p:cNvPr>
@@ -7937,8 +9674,8 @@
         </p:blipFill>
         <p:spPr>
           <a:xfrm>
-            <a:off x="2689812" y="97738"/>
-            <a:ext cx="6812374" cy="6662524"/>
+            <a:off x="3132104" y="0"/>
+            <a:ext cx="5927792" cy="6858000"/>
           </a:xfrm>
           <a:prstGeom prst="rect">
             <a:avLst/>
@@ -7947,10 +9684,10 @@
       </p:pic>
       <p:sp>
         <p:nvSpPr>
-          <p:cNvPr id="4" name="Retângulo 3">
-            <a:extLst>
-              <a:ext uri="{FF2B5EF4-FFF2-40B4-BE49-F238E27FC236}">
-                <a16:creationId xmlns:a16="http://schemas.microsoft.com/office/drawing/2014/main" id="{4D4088F3-6178-46B4-B30E-43CCF0558B8A}"/>
+          <p:cNvPr id="9" name="Retângulo 8">
+            <a:extLst>
+              <a:ext uri="{FF2B5EF4-FFF2-40B4-BE49-F238E27FC236}">
+                <a16:creationId xmlns:a16="http://schemas.microsoft.com/office/drawing/2014/main" id="{72404E74-9A78-46B6-8AE7-EA61E556E95E}"/>
               </a:ext>
             </a:extLst>
           </p:cNvPr>
@@ -7959,8 +9696,8 @@
         </p:nvSpPr>
         <p:spPr>
           <a:xfrm>
-            <a:off x="3259667" y="2658533"/>
-            <a:ext cx="3302000" cy="2870200"/>
+            <a:off x="3479800" y="1109133"/>
+            <a:ext cx="4428067" cy="2040467"/>
           </a:xfrm>
           <a:prstGeom prst="rect">
             <a:avLst/>
@@ -8004,10 +9741,10 @@
       </p:sp>
       <p:sp>
         <p:nvSpPr>
-          <p:cNvPr id="5" name="Seta: para a Direita 4">
-            <a:extLst>
-              <a:ext uri="{FF2B5EF4-FFF2-40B4-BE49-F238E27FC236}">
-                <a16:creationId xmlns:a16="http://schemas.microsoft.com/office/drawing/2014/main" id="{2EF3BE99-71D4-4BD9-B6B2-1B5903370ED2}"/>
+          <p:cNvPr id="10" name="Retângulo 9">
+            <a:extLst>
+              <a:ext uri="{FF2B5EF4-FFF2-40B4-BE49-F238E27FC236}">
+                <a16:creationId xmlns:a16="http://schemas.microsoft.com/office/drawing/2014/main" id="{0022AC2F-EB36-4147-A622-371FB55C4DDB}"/>
               </a:ext>
             </a:extLst>
           </p:cNvPr>
@@ -8016,8 +9753,65 @@
         </p:nvSpPr>
         <p:spPr>
           <a:xfrm>
-            <a:off x="1397000" y="3429000"/>
-            <a:ext cx="1557867" cy="1303867"/>
+            <a:off x="3479800" y="3318933"/>
+            <a:ext cx="4428067" cy="2040467"/>
+          </a:xfrm>
+          <a:prstGeom prst="rect">
+            <a:avLst/>
+          </a:prstGeom>
+          <a:noFill/>
+          <a:ln w="38100">
+            <a:solidFill>
+              <a:srgbClr val="FF0000"/>
+            </a:solidFill>
+          </a:ln>
+        </p:spPr>
+        <p:style>
+          <a:lnRef idx="2">
+            <a:schemeClr val="accent1">
+              <a:shade val="50000"/>
+            </a:schemeClr>
+          </a:lnRef>
+          <a:fillRef idx="1">
+            <a:schemeClr val="accent1"/>
+          </a:fillRef>
+          <a:effectRef idx="0">
+            <a:schemeClr val="accent1"/>
+          </a:effectRef>
+          <a:fontRef idx="minor">
+            <a:schemeClr val="lt1"/>
+          </a:fontRef>
+        </p:style>
+        <p:txBody>
+          <a:bodyPr rot="0" spcFirstLastPara="0" vertOverflow="overflow" horzOverflow="overflow" vert="horz" wrap="square" lIns="91440" tIns="45720" rIns="91440" bIns="45720" numCol="1" spcCol="0" rtlCol="0" fromWordArt="0" anchor="ctr" anchorCtr="0" forceAA="0" compatLnSpc="1">
+            <a:prstTxWarp prst="textNoShape">
+              <a:avLst/>
+            </a:prstTxWarp>
+            <a:noAutofit/>
+          </a:bodyPr>
+          <a:lstStyle/>
+          <a:p>
+            <a:pPr algn="ctr"/>
+            <a:endParaRPr lang="pt-BR"/>
+          </a:p>
+        </p:txBody>
+      </p:sp>
+      <p:sp>
+        <p:nvSpPr>
+          <p:cNvPr id="11" name="Seta: para a Direita 10">
+            <a:extLst>
+              <a:ext uri="{FF2B5EF4-FFF2-40B4-BE49-F238E27FC236}">
+                <a16:creationId xmlns:a16="http://schemas.microsoft.com/office/drawing/2014/main" id="{E92C9069-8D35-4D31-826A-11222EAC567A}"/>
+              </a:ext>
+            </a:extLst>
+          </p:cNvPr>
+          <p:cNvSpPr/>
+          <p:nvPr/>
+        </p:nvSpPr>
+        <p:spPr>
+          <a:xfrm>
+            <a:off x="258185" y="1342826"/>
+            <a:ext cx="2873920" cy="1623882"/>
           </a:xfrm>
           <a:prstGeom prst="rightArrow">
             <a:avLst/>
@@ -8057,16 +9851,23 @@
           <a:lstStyle/>
           <a:p>
             <a:pPr algn="ctr"/>
-            <a:endParaRPr lang="pt-BR"/>
-          </a:p>
-        </p:txBody>
-      </p:sp>
-      <p:sp>
-        <p:nvSpPr>
-          <p:cNvPr id="6" name="Retângulo 5">
-            <a:extLst>
-              <a:ext uri="{FF2B5EF4-FFF2-40B4-BE49-F238E27FC236}">
-                <a16:creationId xmlns:a16="http://schemas.microsoft.com/office/drawing/2014/main" id="{49E599F0-76F9-45AD-89EC-D5BA565BDC46}"/>
+            <a:r>
+              <a:rPr lang="pt-BR" dirty="0">
+                <a:solidFill>
+                  <a:schemeClr val="tx1"/>
+                </a:solidFill>
+              </a:rPr>
+              <a:t>Inserir esta regra CSS para formatar as tabelas</a:t>
+            </a:r>
+          </a:p>
+        </p:txBody>
+      </p:sp>
+      <p:sp>
+        <p:nvSpPr>
+          <p:cNvPr id="12" name="Seta: para a Direita 11">
+            <a:extLst>
+              <a:ext uri="{FF2B5EF4-FFF2-40B4-BE49-F238E27FC236}">
+                <a16:creationId xmlns:a16="http://schemas.microsoft.com/office/drawing/2014/main" id="{BA645492-2F85-4B62-8430-D00A6224F5DA}"/>
               </a:ext>
             </a:extLst>
           </p:cNvPr>
@@ -8075,16 +9876,18 @@
         </p:nvSpPr>
         <p:spPr>
           <a:xfrm>
-            <a:off x="3996267" y="3513667"/>
-            <a:ext cx="1024466" cy="1303866"/>
-          </a:xfrm>
-          <a:prstGeom prst="rect">
-            <a:avLst/>
-          </a:prstGeom>
-          <a:noFill/>
+            <a:off x="258184" y="3417159"/>
+            <a:ext cx="2873920" cy="1623882"/>
+          </a:xfrm>
+          <a:prstGeom prst="rightArrow">
+            <a:avLst/>
+          </a:prstGeom>
+          <a:solidFill>
+            <a:srgbClr val="FFFF00"/>
+          </a:solidFill>
           <a:ln w="38100">
             <a:solidFill>
-              <a:schemeClr val="accent6"/>
+              <a:srgbClr val="FF0000"/>
             </a:solidFill>
           </a:ln>
         </p:spPr>
@@ -8114,76 +9917,21 @@
           <a:lstStyle/>
           <a:p>
             <a:pPr algn="ctr"/>
-            <a:endParaRPr lang="pt-BR"/>
-          </a:p>
-        </p:txBody>
-      </p:sp>
-      <p:sp>
-        <p:nvSpPr>
-          <p:cNvPr id="7" name="Seta: para a Esquerda 6">
-            <a:extLst>
-              <a:ext uri="{FF2B5EF4-FFF2-40B4-BE49-F238E27FC236}">
-                <a16:creationId xmlns:a16="http://schemas.microsoft.com/office/drawing/2014/main" id="{330E3DBC-F096-4076-A2C6-7E23EF70FAC4}"/>
-              </a:ext>
-            </a:extLst>
-          </p:cNvPr>
-          <p:cNvSpPr/>
-          <p:nvPr/>
-        </p:nvSpPr>
-        <p:spPr>
-          <a:xfrm>
-            <a:off x="5198533" y="3725333"/>
-            <a:ext cx="897467" cy="736600"/>
-          </a:xfrm>
-          <a:prstGeom prst="leftArrow">
-            <a:avLst/>
-          </a:prstGeom>
-          <a:solidFill>
-            <a:schemeClr val="accent6">
-              <a:lumMod val="60000"/>
-              <a:lumOff val="40000"/>
-            </a:schemeClr>
-          </a:solidFill>
-          <a:ln w="38100">
-            <a:solidFill>
-              <a:schemeClr val="accent6"/>
-            </a:solidFill>
-          </a:ln>
-        </p:spPr>
-        <p:style>
-          <a:lnRef idx="2">
-            <a:schemeClr val="accent1">
-              <a:shade val="50000"/>
-            </a:schemeClr>
-          </a:lnRef>
-          <a:fillRef idx="1">
-            <a:schemeClr val="accent1"/>
-          </a:fillRef>
-          <a:effectRef idx="0">
-            <a:schemeClr val="accent1"/>
-          </a:effectRef>
-          <a:fontRef idx="minor">
-            <a:schemeClr val="lt1"/>
-          </a:fontRef>
-        </p:style>
-        <p:txBody>
-          <a:bodyPr rot="0" spcFirstLastPara="0" vertOverflow="overflow" horzOverflow="overflow" vert="horz" wrap="square" lIns="91440" tIns="45720" rIns="91440" bIns="45720" numCol="1" spcCol="0" rtlCol="0" fromWordArt="0" anchor="ctr" anchorCtr="0" forceAA="0" compatLnSpc="1">
-            <a:prstTxWarp prst="textNoShape">
-              <a:avLst/>
-            </a:prstTxWarp>
-            <a:noAutofit/>
-          </a:bodyPr>
-          <a:lstStyle/>
-          <a:p>
-            <a:pPr algn="ctr"/>
-            <a:endParaRPr lang="pt-BR"/>
+            <a:r>
+              <a:rPr lang="pt-BR" dirty="0">
+                <a:solidFill>
+                  <a:schemeClr val="tx1"/>
+                </a:solidFill>
+              </a:rPr>
+              <a:t>Inserir esta regra CSS para formatar o &lt;h1&gt;</a:t>
+            </a:r>
           </a:p>
         </p:txBody>
       </p:sp>
     </p:spTree>
     <p:extLst>
       <p:ext uri="{BB962C8B-B14F-4D97-AF65-F5344CB8AC3E}">
-        <p14:creationId xmlns:p14="http://schemas.microsoft.com/office/powerpoint/2010/main" val="889626324"/>
+        <p14:creationId xmlns:p14="http://schemas.microsoft.com/office/powerpoint/2010/main" val="2099739676"/>
       </p:ext>
     </p:extLst>
   </p:cSld>
@@ -8212,10 +9960,10 @@
       </p:grpSpPr>
       <p:pic>
         <p:nvPicPr>
-          <p:cNvPr id="3" name="Imagem 2">
-            <a:extLst>
-              <a:ext uri="{FF2B5EF4-FFF2-40B4-BE49-F238E27FC236}">
-                <a16:creationId xmlns:a16="http://schemas.microsoft.com/office/drawing/2014/main" id="{D40A6E9E-513F-416B-814B-6E28EEDE54B9}"/>
+          <p:cNvPr id="2" name="Imagem 1">
+            <a:extLst>
+              <a:ext uri="{FF2B5EF4-FFF2-40B4-BE49-F238E27FC236}">
+                <a16:creationId xmlns:a16="http://schemas.microsoft.com/office/drawing/2014/main" id="{F6354D68-90D4-48BA-A6C7-11B99C3C3262}"/>
               </a:ext>
             </a:extLst>
           </p:cNvPr>
@@ -8225,246 +9973,25 @@
           <p:nvPr/>
         </p:nvPicPr>
         <p:blipFill>
-          <a:blip r:embed="rId2">
-            <a:extLst>
-              <a:ext uri="{28A0092B-C50C-407E-A947-70E740481C1C}">
-                <a14:useLocalDpi xmlns:a14="http://schemas.microsoft.com/office/drawing/2010/main" val="0"/>
-              </a:ext>
-            </a:extLst>
-          </a:blip>
+          <a:blip r:embed="rId2"/>
           <a:stretch>
             <a:fillRect/>
           </a:stretch>
         </p:blipFill>
         <p:spPr>
           <a:xfrm>
-            <a:off x="1050379" y="128127"/>
-            <a:ext cx="10091241" cy="6601747"/>
+            <a:off x="3108863" y="543121"/>
+            <a:ext cx="5974273" cy="5771757"/>
           </a:xfrm>
           <a:prstGeom prst="rect">
             <a:avLst/>
           </a:prstGeom>
         </p:spPr>
       </p:pic>
-      <p:sp>
-        <p:nvSpPr>
-          <p:cNvPr id="4" name="Retângulo 3">
-            <a:extLst>
-              <a:ext uri="{FF2B5EF4-FFF2-40B4-BE49-F238E27FC236}">
-                <a16:creationId xmlns:a16="http://schemas.microsoft.com/office/drawing/2014/main" id="{189823EE-9725-4A57-B50B-7109F4F2F6FB}"/>
-              </a:ext>
-            </a:extLst>
-          </p:cNvPr>
-          <p:cNvSpPr/>
-          <p:nvPr/>
-        </p:nvSpPr>
-        <p:spPr>
-          <a:xfrm>
-            <a:off x="2692400" y="3158067"/>
-            <a:ext cx="2633133" cy="1507066"/>
-          </a:xfrm>
-          <a:prstGeom prst="rect">
-            <a:avLst/>
-          </a:prstGeom>
-          <a:noFill/>
-          <a:ln w="38100">
-            <a:solidFill>
-              <a:srgbClr val="FF0000"/>
-            </a:solidFill>
-          </a:ln>
-        </p:spPr>
-        <p:style>
-          <a:lnRef idx="2">
-            <a:schemeClr val="accent1">
-              <a:shade val="50000"/>
-            </a:schemeClr>
-          </a:lnRef>
-          <a:fillRef idx="1">
-            <a:schemeClr val="accent1"/>
-          </a:fillRef>
-          <a:effectRef idx="0">
-            <a:schemeClr val="accent1"/>
-          </a:effectRef>
-          <a:fontRef idx="minor">
-            <a:schemeClr val="lt1"/>
-          </a:fontRef>
-        </p:style>
-        <p:txBody>
-          <a:bodyPr rot="0" spcFirstLastPara="0" vertOverflow="overflow" horzOverflow="overflow" vert="horz" wrap="square" lIns="91440" tIns="45720" rIns="91440" bIns="45720" numCol="1" spcCol="0" rtlCol="0" fromWordArt="0" anchor="ctr" anchorCtr="0" forceAA="0" compatLnSpc="1">
-            <a:prstTxWarp prst="textNoShape">
-              <a:avLst/>
-            </a:prstTxWarp>
-            <a:noAutofit/>
-          </a:bodyPr>
-          <a:lstStyle/>
-          <a:p>
-            <a:pPr algn="ctr"/>
-            <a:endParaRPr lang="pt-BR"/>
-          </a:p>
-        </p:txBody>
-      </p:sp>
-      <p:sp>
-        <p:nvSpPr>
-          <p:cNvPr id="5" name="Seta: para a Direita 4">
-            <a:extLst>
-              <a:ext uri="{FF2B5EF4-FFF2-40B4-BE49-F238E27FC236}">
-                <a16:creationId xmlns:a16="http://schemas.microsoft.com/office/drawing/2014/main" id="{8033E91F-AEAD-4E23-B77A-A02D0A922533}"/>
-              </a:ext>
-            </a:extLst>
-          </p:cNvPr>
-          <p:cNvSpPr/>
-          <p:nvPr/>
-        </p:nvSpPr>
-        <p:spPr>
-          <a:xfrm>
-            <a:off x="1329267" y="3318933"/>
-            <a:ext cx="1193800" cy="982134"/>
-          </a:xfrm>
-          <a:prstGeom prst="rightArrow">
-            <a:avLst/>
-          </a:prstGeom>
-          <a:solidFill>
-            <a:srgbClr val="FFFF00"/>
-          </a:solidFill>
-          <a:ln w="38100">
-            <a:solidFill>
-              <a:srgbClr val="FF0000"/>
-            </a:solidFill>
-          </a:ln>
-        </p:spPr>
-        <p:style>
-          <a:lnRef idx="2">
-            <a:schemeClr val="accent1">
-              <a:shade val="50000"/>
-            </a:schemeClr>
-          </a:lnRef>
-          <a:fillRef idx="1">
-            <a:schemeClr val="accent1"/>
-          </a:fillRef>
-          <a:effectRef idx="0">
-            <a:schemeClr val="accent1"/>
-          </a:effectRef>
-          <a:fontRef idx="minor">
-            <a:schemeClr val="lt1"/>
-          </a:fontRef>
-        </p:style>
-        <p:txBody>
-          <a:bodyPr rot="0" spcFirstLastPara="0" vertOverflow="overflow" horzOverflow="overflow" vert="horz" wrap="square" lIns="91440" tIns="45720" rIns="91440" bIns="45720" numCol="1" spcCol="0" rtlCol="0" fromWordArt="0" anchor="ctr" anchorCtr="0" forceAA="0" compatLnSpc="1">
-            <a:prstTxWarp prst="textNoShape">
-              <a:avLst/>
-            </a:prstTxWarp>
-            <a:noAutofit/>
-          </a:bodyPr>
-          <a:lstStyle/>
-          <a:p>
-            <a:pPr algn="ctr"/>
-            <a:endParaRPr lang="pt-BR"/>
-          </a:p>
-        </p:txBody>
-      </p:sp>
-      <p:cxnSp>
-        <p:nvCxnSpPr>
-          <p:cNvPr id="7" name="Conector de Seta Reta 6">
-            <a:extLst>
-              <a:ext uri="{FF2B5EF4-FFF2-40B4-BE49-F238E27FC236}">
-                <a16:creationId xmlns:a16="http://schemas.microsoft.com/office/drawing/2014/main" id="{4FEC145C-B362-4376-BD35-A77A6C348F17}"/>
-              </a:ext>
-            </a:extLst>
-          </p:cNvPr>
-          <p:cNvCxnSpPr/>
-          <p:nvPr/>
-        </p:nvCxnSpPr>
-        <p:spPr>
-          <a:xfrm flipH="1" flipV="1">
-            <a:off x="7636676" y="4758267"/>
-            <a:ext cx="101857" cy="711200"/>
-          </a:xfrm>
-          <a:prstGeom prst="straightConnector1">
-            <a:avLst/>
-          </a:prstGeom>
-          <a:ln w="38100">
-            <a:solidFill>
-              <a:schemeClr val="accent6"/>
-            </a:solidFill>
-            <a:tailEnd type="triangle"/>
-          </a:ln>
-        </p:spPr>
-        <p:style>
-          <a:lnRef idx="1">
-            <a:schemeClr val="accent1"/>
-          </a:lnRef>
-          <a:fillRef idx="0">
-            <a:schemeClr val="accent1"/>
-          </a:fillRef>
-          <a:effectRef idx="0">
-            <a:schemeClr val="accent1"/>
-          </a:effectRef>
-          <a:fontRef idx="minor">
-            <a:schemeClr val="tx1"/>
-          </a:fontRef>
-        </p:style>
-      </p:cxnSp>
-      <p:sp>
-        <p:nvSpPr>
-          <p:cNvPr id="8" name="Elipse 7">
-            <a:extLst>
-              <a:ext uri="{FF2B5EF4-FFF2-40B4-BE49-F238E27FC236}">
-                <a16:creationId xmlns:a16="http://schemas.microsoft.com/office/drawing/2014/main" id="{203BBF35-A274-4DF1-9A40-3069B3E14F63}"/>
-              </a:ext>
-            </a:extLst>
-          </p:cNvPr>
-          <p:cNvSpPr/>
-          <p:nvPr/>
-        </p:nvSpPr>
-        <p:spPr>
-          <a:xfrm>
-            <a:off x="6867736" y="5469467"/>
-            <a:ext cx="1741593" cy="990600"/>
-          </a:xfrm>
-          <a:prstGeom prst="ellipse">
-            <a:avLst/>
-          </a:prstGeom>
-          <a:ln>
-            <a:solidFill>
-              <a:schemeClr val="accent6"/>
-            </a:solidFill>
-          </a:ln>
-        </p:spPr>
-        <p:style>
-          <a:lnRef idx="1">
-            <a:schemeClr val="accent6"/>
-          </a:lnRef>
-          <a:fillRef idx="2">
-            <a:schemeClr val="accent6"/>
-          </a:fillRef>
-          <a:effectRef idx="1">
-            <a:schemeClr val="accent6"/>
-          </a:effectRef>
-          <a:fontRef idx="minor">
-            <a:schemeClr val="dk1"/>
-          </a:fontRef>
-        </p:style>
-        <p:txBody>
-          <a:bodyPr rot="0" spcFirstLastPara="0" vertOverflow="overflow" horzOverflow="overflow" vert="horz" wrap="square" lIns="91440" tIns="45720" rIns="91440" bIns="45720" numCol="1" spcCol="0" rtlCol="0" fromWordArt="0" anchor="ctr" anchorCtr="0" forceAA="0" compatLnSpc="1">
-            <a:prstTxWarp prst="textNoShape">
-              <a:avLst/>
-            </a:prstTxWarp>
-            <a:noAutofit/>
-          </a:bodyPr>
-          <a:lstStyle/>
-          <a:p>
-            <a:pPr algn="ctr"/>
-            <a:r>
-              <a:rPr lang="pt-BR" dirty="0"/>
-              <a:t>Resultado</a:t>
-            </a:r>
-          </a:p>
-        </p:txBody>
-      </p:sp>
     </p:spTree>
     <p:extLst>
       <p:ext uri="{BB962C8B-B14F-4D97-AF65-F5344CB8AC3E}">
-        <p14:creationId xmlns:p14="http://schemas.microsoft.com/office/powerpoint/2010/main" val="3160457805"/>
+        <p14:creationId xmlns:p14="http://schemas.microsoft.com/office/powerpoint/2010/main" val="1571144132"/>
       </p:ext>
     </p:extLst>
   </p:cSld>
@@ -8496,7 +10023,7 @@
           <p:cNvPr id="3" name="Imagem 2">
             <a:extLst>
               <a:ext uri="{FF2B5EF4-FFF2-40B4-BE49-F238E27FC236}">
-                <a16:creationId xmlns:a16="http://schemas.microsoft.com/office/drawing/2014/main" id="{01E9F0F6-4C5B-4198-B6EC-9292C5CE0ABB}"/>
+                <a16:creationId xmlns:a16="http://schemas.microsoft.com/office/drawing/2014/main" id="{DEC23805-0A1F-459C-9D7F-EA4E8B51E3B0}"/>
               </a:ext>
             </a:extLst>
           </p:cNvPr>
@@ -8519,8 +10046,8 @@
         </p:blipFill>
         <p:spPr>
           <a:xfrm>
-            <a:off x="470893" y="685607"/>
-            <a:ext cx="11250215" cy="5486785"/>
+            <a:off x="1235575" y="391233"/>
+            <a:ext cx="9720850" cy="6075532"/>
           </a:xfrm>
           <a:prstGeom prst="rect">
             <a:avLst/>
@@ -8532,7 +10059,7 @@
           <p:cNvPr id="4" name="Retângulo 3">
             <a:extLst>
               <a:ext uri="{FF2B5EF4-FFF2-40B4-BE49-F238E27FC236}">
-                <a16:creationId xmlns:a16="http://schemas.microsoft.com/office/drawing/2014/main" id="{8154BCBE-E1EE-4559-BD93-29CB9BF9121E}"/>
+                <a16:creationId xmlns:a16="http://schemas.microsoft.com/office/drawing/2014/main" id="{9E5F02F6-0CAF-4A66-B777-C5D4185B9CE1}"/>
               </a:ext>
             </a:extLst>
           </p:cNvPr>
@@ -8541,8 +10068,8 @@
         </p:nvSpPr>
         <p:spPr>
           <a:xfrm>
-            <a:off x="1532467" y="1820333"/>
-            <a:ext cx="3843866" cy="2370667"/>
+            <a:off x="2201333" y="2760133"/>
+            <a:ext cx="8094134" cy="1981200"/>
           </a:xfrm>
           <a:prstGeom prst="rect">
             <a:avLst/>
@@ -8586,10 +10113,10 @@
       </p:sp>
       <p:sp>
         <p:nvSpPr>
-          <p:cNvPr id="5" name="Retângulo 4">
-            <a:extLst>
-              <a:ext uri="{FF2B5EF4-FFF2-40B4-BE49-F238E27FC236}">
-                <a16:creationId xmlns:a16="http://schemas.microsoft.com/office/drawing/2014/main" id="{11CAE6A6-0AB7-4AFA-9BA9-9C1C2701CAC6}"/>
+          <p:cNvPr id="5" name="Seta: para a Direita 4">
+            <a:extLst>
+              <a:ext uri="{FF2B5EF4-FFF2-40B4-BE49-F238E27FC236}">
+                <a16:creationId xmlns:a16="http://schemas.microsoft.com/office/drawing/2014/main" id="{5E9D2EDE-B8BA-4942-863C-7B4F4C1A8A97}"/>
               </a:ext>
             </a:extLst>
           </p:cNvPr>
@@ -8598,16 +10125,18 @@
         </p:nvSpPr>
         <p:spPr>
           <a:xfrm>
-            <a:off x="2286000" y="2226733"/>
-            <a:ext cx="2904067" cy="1524000"/>
-          </a:xfrm>
-          <a:prstGeom prst="rect">
-            <a:avLst/>
-          </a:prstGeom>
-          <a:noFill/>
+            <a:off x="482600" y="3090333"/>
+            <a:ext cx="1524000" cy="1270000"/>
+          </a:xfrm>
+          <a:prstGeom prst="rightArrow">
+            <a:avLst/>
+          </a:prstGeom>
+          <a:solidFill>
+            <a:srgbClr val="FFFF00"/>
+          </a:solidFill>
           <a:ln w="38100">
             <a:solidFill>
-              <a:schemeClr val="accent6"/>
+              <a:srgbClr val="FF0000"/>
             </a:solidFill>
           </a:ln>
         </p:spPr>
@@ -8641,10 +10170,71 @@
           </a:p>
         </p:txBody>
       </p:sp>
+      <p:sp>
+        <p:nvSpPr>
+          <p:cNvPr id="2" name="Seta: para a Direita 1">
+            <a:extLst>
+              <a:ext uri="{FF2B5EF4-FFF2-40B4-BE49-F238E27FC236}">
+                <a16:creationId xmlns:a16="http://schemas.microsoft.com/office/drawing/2014/main" id="{0B8E21F7-1A99-4554-A23A-B5FA23DBEE9F}"/>
+              </a:ext>
+            </a:extLst>
+          </p:cNvPr>
+          <p:cNvSpPr/>
+          <p:nvPr/>
+        </p:nvSpPr>
+        <p:spPr>
+          <a:xfrm>
+            <a:off x="9749775" y="5106515"/>
+            <a:ext cx="2413299" cy="1360250"/>
+          </a:xfrm>
+          <a:prstGeom prst="rightArrow">
+            <a:avLst/>
+          </a:prstGeom>
+          <a:solidFill>
+            <a:srgbClr val="FFFF00"/>
+          </a:solidFill>
+          <a:ln w="38100">
+            <a:solidFill>
+              <a:srgbClr val="FF0000"/>
+            </a:solidFill>
+          </a:ln>
+        </p:spPr>
+        <p:style>
+          <a:lnRef idx="2">
+            <a:schemeClr val="accent1">
+              <a:shade val="50000"/>
+            </a:schemeClr>
+          </a:lnRef>
+          <a:fillRef idx="1">
+            <a:schemeClr val="accent1"/>
+          </a:fillRef>
+          <a:effectRef idx="0">
+            <a:schemeClr val="accent1"/>
+          </a:effectRef>
+          <a:fontRef idx="minor">
+            <a:schemeClr val="lt1"/>
+          </a:fontRef>
+        </p:style>
+        <p:txBody>
+          <a:bodyPr rtlCol="0" anchor="ctr"/>
+          <a:lstStyle/>
+          <a:p>
+            <a:pPr algn="ctr"/>
+            <a:r>
+              <a:rPr lang="pt-BR" dirty="0">
+                <a:solidFill>
+                  <a:schemeClr val="tx1"/>
+                </a:solidFill>
+              </a:rPr>
+              <a:t>Vamos visualizar o resultado</a:t>
+            </a:r>
+          </a:p>
+        </p:txBody>
+      </p:sp>
     </p:spTree>
     <p:extLst>
       <p:ext uri="{BB962C8B-B14F-4D97-AF65-F5344CB8AC3E}">
-        <p14:creationId xmlns:p14="http://schemas.microsoft.com/office/powerpoint/2010/main" val="1823519928"/>
+        <p14:creationId xmlns:p14="http://schemas.microsoft.com/office/powerpoint/2010/main" val="3189368703"/>
       </p:ext>
     </p:extLst>
   </p:cSld>
@@ -8676,7 +10266,7 @@
           <p:cNvPr id="3" name="Imagem 2">
             <a:extLst>
               <a:ext uri="{FF2B5EF4-FFF2-40B4-BE49-F238E27FC236}">
-                <a16:creationId xmlns:a16="http://schemas.microsoft.com/office/drawing/2014/main" id="{2C03970E-6B55-4304-B08A-0259397C57EE}"/>
+                <a16:creationId xmlns:a16="http://schemas.microsoft.com/office/drawing/2014/main" id="{ED0F38C9-0E2A-4D81-993C-F866A0D20311}"/>
               </a:ext>
             </a:extLst>
           </p:cNvPr>
@@ -8686,405 +10276,25 @@
           <p:nvPr/>
         </p:nvPicPr>
         <p:blipFill>
-          <a:blip r:embed="rId2">
-            <a:extLst>
-              <a:ext uri="{28A0092B-C50C-407E-A947-70E740481C1C}">
-                <a14:useLocalDpi xmlns:a14="http://schemas.microsoft.com/office/drawing/2010/main" val="0"/>
-              </a:ext>
-            </a:extLst>
-          </a:blip>
+          <a:blip r:embed="rId2"/>
           <a:stretch>
             <a:fillRect/>
           </a:stretch>
         </p:blipFill>
         <p:spPr>
           <a:xfrm>
-            <a:off x="1029421" y="60014"/>
-            <a:ext cx="10133157" cy="6737973"/>
+            <a:off x="1662112" y="990600"/>
+            <a:ext cx="8867775" cy="4876800"/>
           </a:xfrm>
           <a:prstGeom prst="rect">
             <a:avLst/>
           </a:prstGeom>
         </p:spPr>
       </p:pic>
-      <p:sp>
-        <p:nvSpPr>
-          <p:cNvPr id="4" name="Retângulo 3">
-            <a:extLst>
-              <a:ext uri="{FF2B5EF4-FFF2-40B4-BE49-F238E27FC236}">
-                <a16:creationId xmlns:a16="http://schemas.microsoft.com/office/drawing/2014/main" id="{30B41244-7C8C-4183-AFD9-63BCD5677BCC}"/>
-              </a:ext>
-            </a:extLst>
-          </p:cNvPr>
-          <p:cNvSpPr/>
-          <p:nvPr/>
-        </p:nvSpPr>
-        <p:spPr>
-          <a:xfrm>
-            <a:off x="1998133" y="660400"/>
-            <a:ext cx="3217334" cy="2209800"/>
-          </a:xfrm>
-          <a:prstGeom prst="rect">
-            <a:avLst/>
-          </a:prstGeom>
-          <a:noFill/>
-          <a:ln w="38100">
-            <a:solidFill>
-              <a:srgbClr val="FF0000"/>
-            </a:solidFill>
-          </a:ln>
-        </p:spPr>
-        <p:style>
-          <a:lnRef idx="2">
-            <a:schemeClr val="accent1">
-              <a:shade val="50000"/>
-            </a:schemeClr>
-          </a:lnRef>
-          <a:fillRef idx="1">
-            <a:schemeClr val="accent1"/>
-          </a:fillRef>
-          <a:effectRef idx="0">
-            <a:schemeClr val="accent1"/>
-          </a:effectRef>
-          <a:fontRef idx="minor">
-            <a:schemeClr val="lt1"/>
-          </a:fontRef>
-        </p:style>
-        <p:txBody>
-          <a:bodyPr rot="0" spcFirstLastPara="0" vertOverflow="overflow" horzOverflow="overflow" vert="horz" wrap="square" lIns="91440" tIns="45720" rIns="91440" bIns="45720" numCol="1" spcCol="0" rtlCol="0" fromWordArt="0" anchor="ctr" anchorCtr="0" forceAA="0" compatLnSpc="1">
-            <a:prstTxWarp prst="textNoShape">
-              <a:avLst/>
-            </a:prstTxWarp>
-            <a:noAutofit/>
-          </a:bodyPr>
-          <a:lstStyle/>
-          <a:p>
-            <a:pPr algn="ctr"/>
-            <a:endParaRPr lang="pt-BR"/>
-          </a:p>
-        </p:txBody>
-      </p:sp>
-      <p:sp>
-        <p:nvSpPr>
-          <p:cNvPr id="5" name="Retângulo 4">
-            <a:extLst>
-              <a:ext uri="{FF2B5EF4-FFF2-40B4-BE49-F238E27FC236}">
-                <a16:creationId xmlns:a16="http://schemas.microsoft.com/office/drawing/2014/main" id="{73A90CF6-DE53-40C3-AE93-E154E93C2CC0}"/>
-              </a:ext>
-            </a:extLst>
-          </p:cNvPr>
-          <p:cNvSpPr/>
-          <p:nvPr/>
-        </p:nvSpPr>
-        <p:spPr>
-          <a:xfrm>
-            <a:off x="1998133" y="3031067"/>
-            <a:ext cx="3217334" cy="2209800"/>
-          </a:xfrm>
-          <a:prstGeom prst="rect">
-            <a:avLst/>
-          </a:prstGeom>
-          <a:noFill/>
-          <a:ln w="38100">
-            <a:solidFill>
-              <a:srgbClr val="FF0000"/>
-            </a:solidFill>
-          </a:ln>
-        </p:spPr>
-        <p:style>
-          <a:lnRef idx="2">
-            <a:schemeClr val="accent1">
-              <a:shade val="50000"/>
-            </a:schemeClr>
-          </a:lnRef>
-          <a:fillRef idx="1">
-            <a:schemeClr val="accent1"/>
-          </a:fillRef>
-          <a:effectRef idx="0">
-            <a:schemeClr val="accent1"/>
-          </a:effectRef>
-          <a:fontRef idx="minor">
-            <a:schemeClr val="lt1"/>
-          </a:fontRef>
-        </p:style>
-        <p:txBody>
-          <a:bodyPr rot="0" spcFirstLastPara="0" vertOverflow="overflow" horzOverflow="overflow" vert="horz" wrap="square" lIns="91440" tIns="45720" rIns="91440" bIns="45720" numCol="1" spcCol="0" rtlCol="0" fromWordArt="0" anchor="ctr" anchorCtr="0" forceAA="0" compatLnSpc="1">
-            <a:prstTxWarp prst="textNoShape">
-              <a:avLst/>
-            </a:prstTxWarp>
-            <a:noAutofit/>
-          </a:bodyPr>
-          <a:lstStyle/>
-          <a:p>
-            <a:pPr algn="ctr"/>
-            <a:endParaRPr lang="pt-BR"/>
-          </a:p>
-        </p:txBody>
-      </p:sp>
-      <p:sp>
-        <p:nvSpPr>
-          <p:cNvPr id="6" name="Retângulo 5">
-            <a:extLst>
-              <a:ext uri="{FF2B5EF4-FFF2-40B4-BE49-F238E27FC236}">
-                <a16:creationId xmlns:a16="http://schemas.microsoft.com/office/drawing/2014/main" id="{663429A4-C321-4934-83EF-AD7BC1BAB8E3}"/>
-              </a:ext>
-            </a:extLst>
-          </p:cNvPr>
-          <p:cNvSpPr/>
-          <p:nvPr/>
-        </p:nvSpPr>
-        <p:spPr>
-          <a:xfrm>
-            <a:off x="2760133" y="1007533"/>
-            <a:ext cx="2319867" cy="1380067"/>
-          </a:xfrm>
-          <a:prstGeom prst="rect">
-            <a:avLst/>
-          </a:prstGeom>
-          <a:noFill/>
-          <a:ln w="38100">
-            <a:solidFill>
-              <a:schemeClr val="accent6"/>
-            </a:solidFill>
-          </a:ln>
-        </p:spPr>
-        <p:style>
-          <a:lnRef idx="2">
-            <a:schemeClr val="accent1">
-              <a:shade val="50000"/>
-            </a:schemeClr>
-          </a:lnRef>
-          <a:fillRef idx="1">
-            <a:schemeClr val="accent1"/>
-          </a:fillRef>
-          <a:effectRef idx="0">
-            <a:schemeClr val="accent1"/>
-          </a:effectRef>
-          <a:fontRef idx="minor">
-            <a:schemeClr val="lt1"/>
-          </a:fontRef>
-        </p:style>
-        <p:txBody>
-          <a:bodyPr rot="0" spcFirstLastPara="0" vertOverflow="overflow" horzOverflow="overflow" vert="horz" wrap="square" lIns="91440" tIns="45720" rIns="91440" bIns="45720" numCol="1" spcCol="0" rtlCol="0" fromWordArt="0" anchor="ctr" anchorCtr="0" forceAA="0" compatLnSpc="1">
-            <a:prstTxWarp prst="textNoShape">
-              <a:avLst/>
-            </a:prstTxWarp>
-            <a:noAutofit/>
-          </a:bodyPr>
-          <a:lstStyle/>
-          <a:p>
-            <a:pPr algn="ctr"/>
-            <a:endParaRPr lang="pt-BR"/>
-          </a:p>
-        </p:txBody>
-      </p:sp>
-      <p:sp>
-        <p:nvSpPr>
-          <p:cNvPr id="7" name="Retângulo 6">
-            <a:extLst>
-              <a:ext uri="{FF2B5EF4-FFF2-40B4-BE49-F238E27FC236}">
-                <a16:creationId xmlns:a16="http://schemas.microsoft.com/office/drawing/2014/main" id="{7154FE27-5A4E-4817-83C1-BF7A3D252073}"/>
-              </a:ext>
-            </a:extLst>
-          </p:cNvPr>
-          <p:cNvSpPr/>
-          <p:nvPr/>
-        </p:nvSpPr>
-        <p:spPr>
-          <a:xfrm>
-            <a:off x="2760132" y="3429000"/>
-            <a:ext cx="2319867" cy="1380067"/>
-          </a:xfrm>
-          <a:prstGeom prst="rect">
-            <a:avLst/>
-          </a:prstGeom>
-          <a:noFill/>
-          <a:ln w="38100">
-            <a:solidFill>
-              <a:schemeClr val="accent6"/>
-            </a:solidFill>
-          </a:ln>
-        </p:spPr>
-        <p:style>
-          <a:lnRef idx="2">
-            <a:schemeClr val="accent1">
-              <a:shade val="50000"/>
-            </a:schemeClr>
-          </a:lnRef>
-          <a:fillRef idx="1">
-            <a:schemeClr val="accent1"/>
-          </a:fillRef>
-          <a:effectRef idx="0">
-            <a:schemeClr val="accent1"/>
-          </a:effectRef>
-          <a:fontRef idx="minor">
-            <a:schemeClr val="lt1"/>
-          </a:fontRef>
-        </p:style>
-        <p:txBody>
-          <a:bodyPr rot="0" spcFirstLastPara="0" vertOverflow="overflow" horzOverflow="overflow" vert="horz" wrap="square" lIns="91440" tIns="45720" rIns="91440" bIns="45720" numCol="1" spcCol="0" rtlCol="0" fromWordArt="0" anchor="ctr" anchorCtr="0" forceAA="0" compatLnSpc="1">
-            <a:prstTxWarp prst="textNoShape">
-              <a:avLst/>
-            </a:prstTxWarp>
-            <a:noAutofit/>
-          </a:bodyPr>
-          <a:lstStyle/>
-          <a:p>
-            <a:pPr algn="ctr"/>
-            <a:endParaRPr lang="pt-BR"/>
-          </a:p>
-        </p:txBody>
-      </p:sp>
-      <p:cxnSp>
-        <p:nvCxnSpPr>
-          <p:cNvPr id="8" name="Conector de Seta Reta 7">
-            <a:extLst>
-              <a:ext uri="{FF2B5EF4-FFF2-40B4-BE49-F238E27FC236}">
-                <a16:creationId xmlns:a16="http://schemas.microsoft.com/office/drawing/2014/main" id="{0C37E236-99D2-41DE-A242-4B7EE1DCBCE3}"/>
-              </a:ext>
-            </a:extLst>
-          </p:cNvPr>
-          <p:cNvCxnSpPr>
-            <a:cxnSpLocks/>
-            <a:stCxn id="9" idx="1"/>
-          </p:cNvCxnSpPr>
-          <p:nvPr/>
-        </p:nvCxnSpPr>
-        <p:spPr>
-          <a:xfrm flipH="1" flipV="1">
-            <a:off x="6307667" y="5342467"/>
-            <a:ext cx="394812" cy="432937"/>
-          </a:xfrm>
-          <a:prstGeom prst="straightConnector1">
-            <a:avLst/>
-          </a:prstGeom>
-          <a:ln w="38100">
-            <a:solidFill>
-              <a:schemeClr val="accent6"/>
-            </a:solidFill>
-            <a:tailEnd type="triangle"/>
-          </a:ln>
-        </p:spPr>
-        <p:style>
-          <a:lnRef idx="1">
-            <a:schemeClr val="accent1"/>
-          </a:lnRef>
-          <a:fillRef idx="0">
-            <a:schemeClr val="accent1"/>
-          </a:fillRef>
-          <a:effectRef idx="0">
-            <a:schemeClr val="accent1"/>
-          </a:effectRef>
-          <a:fontRef idx="minor">
-            <a:schemeClr val="tx1"/>
-          </a:fontRef>
-        </p:style>
-      </p:cxnSp>
-      <p:sp>
-        <p:nvSpPr>
-          <p:cNvPr id="9" name="Elipse 8">
-            <a:extLst>
-              <a:ext uri="{FF2B5EF4-FFF2-40B4-BE49-F238E27FC236}">
-                <a16:creationId xmlns:a16="http://schemas.microsoft.com/office/drawing/2014/main" id="{F2500FE0-68C5-411D-AFC2-A9BEDE078550}"/>
-              </a:ext>
-            </a:extLst>
-          </p:cNvPr>
-          <p:cNvSpPr/>
-          <p:nvPr/>
-        </p:nvSpPr>
-        <p:spPr>
-          <a:xfrm>
-            <a:off x="6447429" y="5630334"/>
-            <a:ext cx="1741593" cy="990600"/>
-          </a:xfrm>
-          <a:prstGeom prst="ellipse">
-            <a:avLst/>
-          </a:prstGeom>
-          <a:ln>
-            <a:solidFill>
-              <a:schemeClr val="accent6"/>
-            </a:solidFill>
-          </a:ln>
-        </p:spPr>
-        <p:style>
-          <a:lnRef idx="1">
-            <a:schemeClr val="accent6"/>
-          </a:lnRef>
-          <a:fillRef idx="2">
-            <a:schemeClr val="accent6"/>
-          </a:fillRef>
-          <a:effectRef idx="1">
-            <a:schemeClr val="accent6"/>
-          </a:effectRef>
-          <a:fontRef idx="minor">
-            <a:schemeClr val="dk1"/>
-          </a:fontRef>
-        </p:style>
-        <p:txBody>
-          <a:bodyPr rot="0" spcFirstLastPara="0" vertOverflow="overflow" horzOverflow="overflow" vert="horz" wrap="square" lIns="91440" tIns="45720" rIns="91440" bIns="45720" numCol="1" spcCol="0" rtlCol="0" fromWordArt="0" anchor="ctr" anchorCtr="0" forceAA="0" compatLnSpc="1">
-            <a:prstTxWarp prst="textNoShape">
-              <a:avLst/>
-            </a:prstTxWarp>
-            <a:noAutofit/>
-          </a:bodyPr>
-          <a:lstStyle/>
-          <a:p>
-            <a:pPr algn="ctr"/>
-            <a:r>
-              <a:rPr lang="pt-BR" dirty="0"/>
-              <a:t>Resultado</a:t>
-            </a:r>
-          </a:p>
-        </p:txBody>
-      </p:sp>
-      <p:cxnSp>
-        <p:nvCxnSpPr>
-          <p:cNvPr id="12" name="Conector de Seta Reta 11">
-            <a:extLst>
-              <a:ext uri="{FF2B5EF4-FFF2-40B4-BE49-F238E27FC236}">
-                <a16:creationId xmlns:a16="http://schemas.microsoft.com/office/drawing/2014/main" id="{5425374E-1593-4355-B56E-AA5004BD2523}"/>
-              </a:ext>
-            </a:extLst>
-          </p:cNvPr>
-          <p:cNvCxnSpPr>
-            <a:cxnSpLocks/>
-          </p:cNvCxnSpPr>
-          <p:nvPr/>
-        </p:nvCxnSpPr>
-        <p:spPr>
-          <a:xfrm flipH="1" flipV="1">
-            <a:off x="6510867" y="5024399"/>
-            <a:ext cx="191612" cy="751005"/>
-          </a:xfrm>
-          <a:prstGeom prst="straightConnector1">
-            <a:avLst/>
-          </a:prstGeom>
-          <a:ln w="38100">
-            <a:solidFill>
-              <a:schemeClr val="accent6"/>
-            </a:solidFill>
-            <a:tailEnd type="triangle"/>
-          </a:ln>
-        </p:spPr>
-        <p:style>
-          <a:lnRef idx="1">
-            <a:schemeClr val="accent1"/>
-          </a:lnRef>
-          <a:fillRef idx="0">
-            <a:schemeClr val="accent1"/>
-          </a:fillRef>
-          <a:effectRef idx="0">
-            <a:schemeClr val="accent1"/>
-          </a:effectRef>
-          <a:fontRef idx="minor">
-            <a:schemeClr val="tx1"/>
-          </a:fontRef>
-        </p:style>
-      </p:cxnSp>
     </p:spTree>
     <p:extLst>
       <p:ext uri="{BB962C8B-B14F-4D97-AF65-F5344CB8AC3E}">
-        <p14:creationId xmlns:p14="http://schemas.microsoft.com/office/powerpoint/2010/main" val="2399348406"/>
+        <p14:creationId xmlns:p14="http://schemas.microsoft.com/office/powerpoint/2010/main" val="2618269113"/>
       </p:ext>
     </p:extLst>
   </p:cSld>
@@ -9113,10 +10323,10 @@
       </p:grpSpPr>
       <p:pic>
         <p:nvPicPr>
-          <p:cNvPr id="4" name="Imagem 3">
-            <a:extLst>
-              <a:ext uri="{FF2B5EF4-FFF2-40B4-BE49-F238E27FC236}">
-                <a16:creationId xmlns:a16="http://schemas.microsoft.com/office/drawing/2014/main" id="{2B0E1C5E-1220-46CB-A461-B2D5781811AD}"/>
+          <p:cNvPr id="3" name="Imagem 2">
+            <a:extLst>
+              <a:ext uri="{FF2B5EF4-FFF2-40B4-BE49-F238E27FC236}">
+                <a16:creationId xmlns:a16="http://schemas.microsoft.com/office/drawing/2014/main" id="{C18A0C9F-7511-4999-9021-8D3EE6602465}"/>
               </a:ext>
             </a:extLst>
           </p:cNvPr>
@@ -9126,25 +10336,266 @@
           <p:nvPr/>
         </p:nvPicPr>
         <p:blipFill>
-          <a:blip r:embed="rId2"/>
+          <a:blip r:embed="rId2">
+            <a:extLst>
+              <a:ext uri="{28A0092B-C50C-407E-A947-70E740481C1C}">
+                <a14:useLocalDpi xmlns:a14="http://schemas.microsoft.com/office/drawing/2010/main" val="0"/>
+              </a:ext>
+            </a:extLst>
+          </a:blip>
           <a:stretch>
             <a:fillRect/>
           </a:stretch>
         </p:blipFill>
         <p:spPr>
           <a:xfrm>
-            <a:off x="3705225" y="990600"/>
-            <a:ext cx="4781550" cy="4876800"/>
+            <a:off x="2689812" y="97738"/>
+            <a:ext cx="6812374" cy="6662524"/>
           </a:xfrm>
           <a:prstGeom prst="rect">
             <a:avLst/>
           </a:prstGeom>
         </p:spPr>
       </p:pic>
+      <p:sp>
+        <p:nvSpPr>
+          <p:cNvPr id="4" name="Retângulo 3">
+            <a:extLst>
+              <a:ext uri="{FF2B5EF4-FFF2-40B4-BE49-F238E27FC236}">
+                <a16:creationId xmlns:a16="http://schemas.microsoft.com/office/drawing/2014/main" id="{4D4088F3-6178-46B4-B30E-43CCF0558B8A}"/>
+              </a:ext>
+            </a:extLst>
+          </p:cNvPr>
+          <p:cNvSpPr/>
+          <p:nvPr/>
+        </p:nvSpPr>
+        <p:spPr>
+          <a:xfrm>
+            <a:off x="3259667" y="2658533"/>
+            <a:ext cx="3302000" cy="2870200"/>
+          </a:xfrm>
+          <a:prstGeom prst="rect">
+            <a:avLst/>
+          </a:prstGeom>
+          <a:noFill/>
+          <a:ln w="38100">
+            <a:solidFill>
+              <a:srgbClr val="FF0000"/>
+            </a:solidFill>
+          </a:ln>
+        </p:spPr>
+        <p:style>
+          <a:lnRef idx="2">
+            <a:schemeClr val="accent1">
+              <a:shade val="50000"/>
+            </a:schemeClr>
+          </a:lnRef>
+          <a:fillRef idx="1">
+            <a:schemeClr val="accent1"/>
+          </a:fillRef>
+          <a:effectRef idx="0">
+            <a:schemeClr val="accent1"/>
+          </a:effectRef>
+          <a:fontRef idx="minor">
+            <a:schemeClr val="lt1"/>
+          </a:fontRef>
+        </p:style>
+        <p:txBody>
+          <a:bodyPr rot="0" spcFirstLastPara="0" vertOverflow="overflow" horzOverflow="overflow" vert="horz" wrap="square" lIns="91440" tIns="45720" rIns="91440" bIns="45720" numCol="1" spcCol="0" rtlCol="0" fromWordArt="0" anchor="ctr" anchorCtr="0" forceAA="0" compatLnSpc="1">
+            <a:prstTxWarp prst="textNoShape">
+              <a:avLst/>
+            </a:prstTxWarp>
+            <a:noAutofit/>
+          </a:bodyPr>
+          <a:lstStyle/>
+          <a:p>
+            <a:pPr algn="ctr"/>
+            <a:endParaRPr lang="pt-BR"/>
+          </a:p>
+        </p:txBody>
+      </p:sp>
+      <p:sp>
+        <p:nvSpPr>
+          <p:cNvPr id="5" name="Seta: para a Direita 4">
+            <a:extLst>
+              <a:ext uri="{FF2B5EF4-FFF2-40B4-BE49-F238E27FC236}">
+                <a16:creationId xmlns:a16="http://schemas.microsoft.com/office/drawing/2014/main" id="{2EF3BE99-71D4-4BD9-B6B2-1B5903370ED2}"/>
+              </a:ext>
+            </a:extLst>
+          </p:cNvPr>
+          <p:cNvSpPr/>
+          <p:nvPr/>
+        </p:nvSpPr>
+        <p:spPr>
+          <a:xfrm>
+            <a:off x="1397000" y="3429000"/>
+            <a:ext cx="1557867" cy="1303867"/>
+          </a:xfrm>
+          <a:prstGeom prst="rightArrow">
+            <a:avLst/>
+          </a:prstGeom>
+          <a:solidFill>
+            <a:srgbClr val="FFFF00"/>
+          </a:solidFill>
+          <a:ln w="38100">
+            <a:solidFill>
+              <a:srgbClr val="FF0000"/>
+            </a:solidFill>
+          </a:ln>
+        </p:spPr>
+        <p:style>
+          <a:lnRef idx="2">
+            <a:schemeClr val="accent1">
+              <a:shade val="50000"/>
+            </a:schemeClr>
+          </a:lnRef>
+          <a:fillRef idx="1">
+            <a:schemeClr val="accent1"/>
+          </a:fillRef>
+          <a:effectRef idx="0">
+            <a:schemeClr val="accent1"/>
+          </a:effectRef>
+          <a:fontRef idx="minor">
+            <a:schemeClr val="lt1"/>
+          </a:fontRef>
+        </p:style>
+        <p:txBody>
+          <a:bodyPr rot="0" spcFirstLastPara="0" vertOverflow="overflow" horzOverflow="overflow" vert="horz" wrap="square" lIns="91440" tIns="45720" rIns="91440" bIns="45720" numCol="1" spcCol="0" rtlCol="0" fromWordArt="0" anchor="ctr" anchorCtr="0" forceAA="0" compatLnSpc="1">
+            <a:prstTxWarp prst="textNoShape">
+              <a:avLst/>
+            </a:prstTxWarp>
+            <a:noAutofit/>
+          </a:bodyPr>
+          <a:lstStyle/>
+          <a:p>
+            <a:pPr algn="ctr"/>
+            <a:endParaRPr lang="pt-BR"/>
+          </a:p>
+        </p:txBody>
+      </p:sp>
+      <p:sp>
+        <p:nvSpPr>
+          <p:cNvPr id="6" name="Retângulo 5">
+            <a:extLst>
+              <a:ext uri="{FF2B5EF4-FFF2-40B4-BE49-F238E27FC236}">
+                <a16:creationId xmlns:a16="http://schemas.microsoft.com/office/drawing/2014/main" id="{49E599F0-76F9-45AD-89EC-D5BA565BDC46}"/>
+              </a:ext>
+            </a:extLst>
+          </p:cNvPr>
+          <p:cNvSpPr/>
+          <p:nvPr/>
+        </p:nvSpPr>
+        <p:spPr>
+          <a:xfrm>
+            <a:off x="3996267" y="3513667"/>
+            <a:ext cx="1024466" cy="1303866"/>
+          </a:xfrm>
+          <a:prstGeom prst="rect">
+            <a:avLst/>
+          </a:prstGeom>
+          <a:noFill/>
+          <a:ln w="38100">
+            <a:solidFill>
+              <a:schemeClr val="accent6"/>
+            </a:solidFill>
+          </a:ln>
+        </p:spPr>
+        <p:style>
+          <a:lnRef idx="2">
+            <a:schemeClr val="accent1">
+              <a:shade val="50000"/>
+            </a:schemeClr>
+          </a:lnRef>
+          <a:fillRef idx="1">
+            <a:schemeClr val="accent1"/>
+          </a:fillRef>
+          <a:effectRef idx="0">
+            <a:schemeClr val="accent1"/>
+          </a:effectRef>
+          <a:fontRef idx="minor">
+            <a:schemeClr val="lt1"/>
+          </a:fontRef>
+        </p:style>
+        <p:txBody>
+          <a:bodyPr rot="0" spcFirstLastPara="0" vertOverflow="overflow" horzOverflow="overflow" vert="horz" wrap="square" lIns="91440" tIns="45720" rIns="91440" bIns="45720" numCol="1" spcCol="0" rtlCol="0" fromWordArt="0" anchor="ctr" anchorCtr="0" forceAA="0" compatLnSpc="1">
+            <a:prstTxWarp prst="textNoShape">
+              <a:avLst/>
+            </a:prstTxWarp>
+            <a:noAutofit/>
+          </a:bodyPr>
+          <a:lstStyle/>
+          <a:p>
+            <a:pPr algn="ctr"/>
+            <a:endParaRPr lang="pt-BR"/>
+          </a:p>
+        </p:txBody>
+      </p:sp>
+      <p:sp>
+        <p:nvSpPr>
+          <p:cNvPr id="7" name="Seta: para a Esquerda 6">
+            <a:extLst>
+              <a:ext uri="{FF2B5EF4-FFF2-40B4-BE49-F238E27FC236}">
+                <a16:creationId xmlns:a16="http://schemas.microsoft.com/office/drawing/2014/main" id="{330E3DBC-F096-4076-A2C6-7E23EF70FAC4}"/>
+              </a:ext>
+            </a:extLst>
+          </p:cNvPr>
+          <p:cNvSpPr/>
+          <p:nvPr/>
+        </p:nvSpPr>
+        <p:spPr>
+          <a:xfrm>
+            <a:off x="5198533" y="3725333"/>
+            <a:ext cx="897467" cy="736600"/>
+          </a:xfrm>
+          <a:prstGeom prst="leftArrow">
+            <a:avLst/>
+          </a:prstGeom>
+          <a:solidFill>
+            <a:schemeClr val="accent6">
+              <a:lumMod val="60000"/>
+              <a:lumOff val="40000"/>
+            </a:schemeClr>
+          </a:solidFill>
+          <a:ln w="38100">
+            <a:solidFill>
+              <a:schemeClr val="accent6"/>
+            </a:solidFill>
+          </a:ln>
+        </p:spPr>
+        <p:style>
+          <a:lnRef idx="2">
+            <a:schemeClr val="accent1">
+              <a:shade val="50000"/>
+            </a:schemeClr>
+          </a:lnRef>
+          <a:fillRef idx="1">
+            <a:schemeClr val="accent1"/>
+          </a:fillRef>
+          <a:effectRef idx="0">
+            <a:schemeClr val="accent1"/>
+          </a:effectRef>
+          <a:fontRef idx="minor">
+            <a:schemeClr val="lt1"/>
+          </a:fontRef>
+        </p:style>
+        <p:txBody>
+          <a:bodyPr rot="0" spcFirstLastPara="0" vertOverflow="overflow" horzOverflow="overflow" vert="horz" wrap="square" lIns="91440" tIns="45720" rIns="91440" bIns="45720" numCol="1" spcCol="0" rtlCol="0" fromWordArt="0" anchor="ctr" anchorCtr="0" forceAA="0" compatLnSpc="1">
+            <a:prstTxWarp prst="textNoShape">
+              <a:avLst/>
+            </a:prstTxWarp>
+            <a:noAutofit/>
+          </a:bodyPr>
+          <a:lstStyle/>
+          <a:p>
+            <a:pPr algn="ctr"/>
+            <a:endParaRPr lang="pt-BR"/>
+          </a:p>
+        </p:txBody>
+      </p:sp>
     </p:spTree>
     <p:extLst>
       <p:ext uri="{BB962C8B-B14F-4D97-AF65-F5344CB8AC3E}">
-        <p14:creationId xmlns:p14="http://schemas.microsoft.com/office/powerpoint/2010/main" val="1916289122"/>
+        <p14:creationId xmlns:p14="http://schemas.microsoft.com/office/powerpoint/2010/main" val="889626324"/>
       </p:ext>
     </p:extLst>
   </p:cSld>
